--- a/Certificate_Pinning_en_Banca_Arquitectura_y_Operación_2026.pptx
+++ b/Certificate_Pinning_en_Banca_Arquitectura_y_Operación_2026.pptx
@@ -5,24 +5,27 @@
     <p:sldMasterId id="2147483648" r:id="rId1"/>
   </p:sldMasterIdLst>
   <p:notesMasterIdLst>
-    <p:notesMasterId r:id="rId17"/>
+    <p:notesMasterId r:id="rId20"/>
   </p:notesMasterIdLst>
   <p:sldIdLst>
-    <p:sldId id="256" r:id="rId2"/>
-    <p:sldId id="257" r:id="rId3"/>
-    <p:sldId id="258" r:id="rId4"/>
-    <p:sldId id="259" r:id="rId5"/>
-    <p:sldId id="260" r:id="rId6"/>
-    <p:sldId id="261" r:id="rId7"/>
-    <p:sldId id="262" r:id="rId8"/>
-    <p:sldId id="263" r:id="rId9"/>
-    <p:sldId id="264" r:id="rId10"/>
-    <p:sldId id="265" r:id="rId11"/>
-    <p:sldId id="266" r:id="rId12"/>
-    <p:sldId id="267" r:id="rId13"/>
-    <p:sldId id="268" r:id="rId14"/>
-    <p:sldId id="269" r:id="rId15"/>
-    <p:sldId id="270" r:id="rId16"/>
+    <p:sldId id="274" r:id="rId2"/>
+    <p:sldId id="256" r:id="rId3"/>
+    <p:sldId id="271" r:id="rId4"/>
+    <p:sldId id="257" r:id="rId5"/>
+    <p:sldId id="258" r:id="rId6"/>
+    <p:sldId id="259" r:id="rId7"/>
+    <p:sldId id="260" r:id="rId8"/>
+    <p:sldId id="261" r:id="rId9"/>
+    <p:sldId id="262" r:id="rId10"/>
+    <p:sldId id="263" r:id="rId11"/>
+    <p:sldId id="264" r:id="rId12"/>
+    <p:sldId id="265" r:id="rId13"/>
+    <p:sldId id="266" r:id="rId14"/>
+    <p:sldId id="267" r:id="rId15"/>
+    <p:sldId id="268" r:id="rId16"/>
+    <p:sldId id="269" r:id="rId17"/>
+    <p:sldId id="270" r:id="rId18"/>
+    <p:sldId id="273" r:id="rId19"/>
   </p:sldIdLst>
   <p:sldSz cx="9144000" cy="5143500" type="screen16x9"/>
   <p:notesSz cx="5143500" cy="9144000"/>
@@ -325,7 +328,7 @@
     </p:spTree>
     <p:extLst>
       <p:ext uri="{BB962C8B-B14F-4D97-AF65-F5344CB8AC3E}">
-        <p14:creationId xmlns:p14="http://schemas.microsoft.com/office/powerpoint/2010/main" val="1024086991"/>
+        <p14:creationId xmlns:p14="http://schemas.microsoft.com/office/powerpoint/2010/main" val="2226412260"/>
       </p:ext>
     </p:extLst>
   </p:cSld>
@@ -839,6 +842,258 @@
 </p:notes>
 </file>
 
+<file path=ppt/notesSlides/notesSlide16.xml><?xml version="1.0" encoding="utf-8"?>
+<p:notes xmlns:a="http://schemas.openxmlformats.org/drawingml/2006/main" xmlns:r="http://schemas.openxmlformats.org/officeDocument/2006/relationships" xmlns:p="http://schemas.openxmlformats.org/presentationml/2006/main">
+  <p:cSld>
+    <p:spTree>
+      <p:nvGrpSpPr>
+        <p:cNvPr id="1" name=""/>
+        <p:cNvGrpSpPr/>
+        <p:nvPr/>
+      </p:nvGrpSpPr>
+      <p:grpSpPr>
+        <a:xfrm>
+          <a:off x="0" y="0"/>
+          <a:ext cx="0" cy="0"/>
+          <a:chOff x="0" y="0"/>
+          <a:chExt cx="0" cy="0"/>
+        </a:xfrm>
+      </p:grpSpPr>
+      <p:sp>
+        <p:nvSpPr>
+          <p:cNvPr id="2" name="Slide Image Placeholder 1"/>
+          <p:cNvSpPr>
+            <a:spLocks noGrp="1" noRot="1" noChangeAspect="1"/>
+          </p:cNvSpPr>
+          <p:nvPr>
+            <p:ph type="sldImg"/>
+          </p:nvPr>
+        </p:nvSpPr>
+        <p:spPr/>
+      </p:sp>
+      <p:sp>
+        <p:nvSpPr>
+          <p:cNvPr id="3" name="Notes Placeholder 2"/>
+          <p:cNvSpPr>
+            <a:spLocks noGrp="1"/>
+          </p:cNvSpPr>
+          <p:nvPr>
+            <p:ph type="body" idx="1"/>
+          </p:nvPr>
+        </p:nvSpPr>
+        <p:spPr/>
+        <p:txBody>
+          <a:bodyPr/>
+          <a:lstStyle/>
+          <a:p>
+            <a:endParaRPr lang="en-US" dirty="0"/>
+          </a:p>
+        </p:txBody>
+      </p:sp>
+      <p:sp>
+        <p:nvSpPr>
+          <p:cNvPr id="4" name="Slide Number Placeholder 3"/>
+          <p:cNvSpPr>
+            <a:spLocks noGrp="1"/>
+          </p:cNvSpPr>
+          <p:nvPr>
+            <p:ph type="sldNum" sz="quarter" idx="10"/>
+          </p:nvPr>
+        </p:nvSpPr>
+        <p:spPr/>
+        <p:txBody>
+          <a:bodyPr/>
+          <a:lstStyle/>
+          <a:p>
+            <a:fld id="{F7021451-1387-4CA6-816F-3879F97B5CBC}" type="slidenum">
+              <a:rPr lang="en-US"/>
+              <a:t>16</a:t>
+            </a:fld>
+            <a:endParaRPr lang="en-US"/>
+          </a:p>
+        </p:txBody>
+      </p:sp>
+    </p:spTree>
+    <p:extLst>
+      <p:ext uri="{BB962C8B-B14F-4D97-AF65-F5344CB8AC3E}">
+        <p14:creationId xmlns:p14="http://schemas.microsoft.com/office/powerpoint/2010/main" val="1024086991"/>
+      </p:ext>
+    </p:extLst>
+  </p:cSld>
+  <p:clrMapOvr>
+    <a:masterClrMapping/>
+  </p:clrMapOvr>
+</p:notes>
+</file>
+
+<file path=ppt/notesSlides/notesSlide17.xml><?xml version="1.0" encoding="utf-8"?>
+<p:notes xmlns:a="http://schemas.openxmlformats.org/drawingml/2006/main" xmlns:r="http://schemas.openxmlformats.org/officeDocument/2006/relationships" xmlns:p="http://schemas.openxmlformats.org/presentationml/2006/main">
+  <p:cSld>
+    <p:spTree>
+      <p:nvGrpSpPr>
+        <p:cNvPr id="1" name=""/>
+        <p:cNvGrpSpPr/>
+        <p:nvPr/>
+      </p:nvGrpSpPr>
+      <p:grpSpPr>
+        <a:xfrm>
+          <a:off x="0" y="0"/>
+          <a:ext cx="0" cy="0"/>
+          <a:chOff x="0" y="0"/>
+          <a:chExt cx="0" cy="0"/>
+        </a:xfrm>
+      </p:grpSpPr>
+      <p:sp>
+        <p:nvSpPr>
+          <p:cNvPr id="2" name="Slide Image Placeholder 1"/>
+          <p:cNvSpPr>
+            <a:spLocks noGrp="1" noRot="1" noChangeAspect="1"/>
+          </p:cNvSpPr>
+          <p:nvPr>
+            <p:ph type="sldImg"/>
+          </p:nvPr>
+        </p:nvSpPr>
+        <p:spPr/>
+      </p:sp>
+      <p:sp>
+        <p:nvSpPr>
+          <p:cNvPr id="3" name="Notes Placeholder 2"/>
+          <p:cNvSpPr>
+            <a:spLocks noGrp="1"/>
+          </p:cNvSpPr>
+          <p:nvPr>
+            <p:ph type="body" idx="1"/>
+          </p:nvPr>
+        </p:nvSpPr>
+        <p:spPr/>
+        <p:txBody>
+          <a:bodyPr/>
+          <a:lstStyle/>
+          <a:p>
+            <a:endParaRPr lang="en-US" dirty="0"/>
+          </a:p>
+        </p:txBody>
+      </p:sp>
+      <p:sp>
+        <p:nvSpPr>
+          <p:cNvPr id="4" name="Slide Number Placeholder 3"/>
+          <p:cNvSpPr>
+            <a:spLocks noGrp="1"/>
+          </p:cNvSpPr>
+          <p:nvPr>
+            <p:ph type="sldNum" sz="quarter" idx="10"/>
+          </p:nvPr>
+        </p:nvSpPr>
+        <p:spPr/>
+        <p:txBody>
+          <a:bodyPr/>
+          <a:lstStyle/>
+          <a:p>
+            <a:fld id="{F7021451-1387-4CA6-816F-3879F97B5CBC}" type="slidenum">
+              <a:rPr lang="en-US"/>
+              <a:t>17</a:t>
+            </a:fld>
+            <a:endParaRPr lang="en-US"/>
+          </a:p>
+        </p:txBody>
+      </p:sp>
+    </p:spTree>
+    <p:extLst>
+      <p:ext uri="{BB962C8B-B14F-4D97-AF65-F5344CB8AC3E}">
+        <p14:creationId xmlns:p14="http://schemas.microsoft.com/office/powerpoint/2010/main" val="1024086991"/>
+      </p:ext>
+    </p:extLst>
+  </p:cSld>
+  <p:clrMapOvr>
+    <a:masterClrMapping/>
+  </p:clrMapOvr>
+</p:notes>
+</file>
+
+<file path=ppt/notesSlides/notesSlide18.xml><?xml version="1.0" encoding="utf-8"?>
+<p:notes xmlns:a="http://schemas.openxmlformats.org/drawingml/2006/main" xmlns:r="http://schemas.openxmlformats.org/officeDocument/2006/relationships" xmlns:p="http://schemas.openxmlformats.org/presentationml/2006/main">
+  <p:cSld>
+    <p:spTree>
+      <p:nvGrpSpPr>
+        <p:cNvPr id="1" name=""/>
+        <p:cNvGrpSpPr/>
+        <p:nvPr/>
+      </p:nvGrpSpPr>
+      <p:grpSpPr>
+        <a:xfrm>
+          <a:off x="0" y="0"/>
+          <a:ext cx="0" cy="0"/>
+          <a:chOff x="0" y="0"/>
+          <a:chExt cx="0" cy="0"/>
+        </a:xfrm>
+      </p:grpSpPr>
+      <p:sp>
+        <p:nvSpPr>
+          <p:cNvPr id="2" name="Slide Image Placeholder 1"/>
+          <p:cNvSpPr>
+            <a:spLocks noGrp="1" noRot="1" noChangeAspect="1"/>
+          </p:cNvSpPr>
+          <p:nvPr>
+            <p:ph type="sldImg"/>
+          </p:nvPr>
+        </p:nvSpPr>
+        <p:spPr/>
+      </p:sp>
+      <p:sp>
+        <p:nvSpPr>
+          <p:cNvPr id="3" name="Notes Placeholder 2"/>
+          <p:cNvSpPr>
+            <a:spLocks noGrp="1"/>
+          </p:cNvSpPr>
+          <p:nvPr>
+            <p:ph type="body" idx="1"/>
+          </p:nvPr>
+        </p:nvSpPr>
+        <p:spPr/>
+        <p:txBody>
+          <a:bodyPr/>
+          <a:lstStyle/>
+          <a:p>
+            <a:endParaRPr lang="en-US" dirty="0"/>
+          </a:p>
+        </p:txBody>
+      </p:sp>
+      <p:sp>
+        <p:nvSpPr>
+          <p:cNvPr id="4" name="Slide Number Placeholder 3"/>
+          <p:cNvSpPr>
+            <a:spLocks noGrp="1"/>
+          </p:cNvSpPr>
+          <p:nvPr>
+            <p:ph type="sldNum" sz="quarter" idx="10"/>
+          </p:nvPr>
+        </p:nvSpPr>
+        <p:spPr/>
+        <p:txBody>
+          <a:bodyPr/>
+          <a:lstStyle/>
+          <a:p>
+            <a:fld id="{F7021451-1387-4CA6-816F-3879F97B5CBC}" type="slidenum">
+              <a:rPr lang="en-US"/>
+              <a:t>18</a:t>
+            </a:fld>
+            <a:endParaRPr lang="en-US"/>
+          </a:p>
+        </p:txBody>
+      </p:sp>
+    </p:spTree>
+    <p:extLst>
+      <p:ext uri="{BB962C8B-B14F-4D97-AF65-F5344CB8AC3E}">
+        <p14:creationId xmlns:p14="http://schemas.microsoft.com/office/powerpoint/2010/main" val="4110181957"/>
+      </p:ext>
+    </p:extLst>
+  </p:cSld>
+  <p:clrMapOvr>
+    <a:masterClrMapping/>
+  </p:clrMapOvr>
+</p:notes>
+</file>
+
 <file path=ppt/notesSlides/notesSlide2.xml><?xml version="1.0" encoding="utf-8"?>
 <p:notes xmlns:a="http://schemas.openxmlformats.org/drawingml/2006/main" xmlns:r="http://schemas.openxmlformats.org/officeDocument/2006/relationships" xmlns:p="http://schemas.openxmlformats.org/presentationml/2006/main">
   <p:cSld>
@@ -997,7 +1252,7 @@
     </p:spTree>
     <p:extLst>
       <p:ext uri="{BB962C8B-B14F-4D97-AF65-F5344CB8AC3E}">
-        <p14:creationId xmlns:p14="http://schemas.microsoft.com/office/powerpoint/2010/main" val="1024086991"/>
+        <p14:creationId xmlns:p14="http://schemas.microsoft.com/office/powerpoint/2010/main" val="3793973465"/>
       </p:ext>
     </p:extLst>
   </p:cSld>
@@ -1873,7 +2128,233 @@
 
 <file path=ppt/slides/slide1.xml><?xml version="1.0" encoding="utf-8"?>
 <p:sld xmlns:a="http://schemas.openxmlformats.org/drawingml/2006/main" xmlns:r="http://schemas.openxmlformats.org/officeDocument/2006/relationships" xmlns:p="http://schemas.openxmlformats.org/presentationml/2006/main">
-  <p:cSld name="Slide 1">
+  <p:cSld>
+    <p:bg>
+      <p:bgPr>
+        <a:solidFill>
+          <a:schemeClr val="bg2"/>
+        </a:solidFill>
+        <a:effectLst/>
+      </p:bgPr>
+    </p:bg>
+    <p:spTree>
+      <p:nvGrpSpPr>
+        <p:cNvPr id="1" name=""/>
+        <p:cNvGrpSpPr/>
+        <p:nvPr/>
+      </p:nvGrpSpPr>
+      <p:grpSpPr>
+        <a:xfrm>
+          <a:off x="0" y="0"/>
+          <a:ext cx="0" cy="0"/>
+          <a:chOff x="0" y="0"/>
+          <a:chExt cx="0" cy="0"/>
+        </a:xfrm>
+      </p:grpSpPr>
+      <p:sp>
+        <p:nvSpPr>
+          <p:cNvPr id="3" name="Shape 0"/>
+          <p:cNvSpPr/>
+          <p:nvPr/>
+        </p:nvSpPr>
+        <p:spPr>
+          <a:xfrm>
+            <a:off x="0" y="0"/>
+            <a:ext cx="2000250" cy="5143500"/>
+          </a:xfrm>
+          <a:prstGeom prst="rect">
+            <a:avLst/>
+          </a:prstGeom>
+          <a:solidFill>
+            <a:srgbClr val="111111"/>
+          </a:solidFill>
+          <a:ln/>
+        </p:spPr>
+        <p:txBody>
+          <a:bodyPr/>
+          <a:lstStyle/>
+          <a:p>
+            <a:endParaRPr lang="es-CL"/>
+          </a:p>
+        </p:txBody>
+      </p:sp>
+      <p:sp>
+        <p:nvSpPr>
+          <p:cNvPr id="4" name="Shape 1"/>
+          <p:cNvSpPr/>
+          <p:nvPr/>
+        </p:nvSpPr>
+        <p:spPr>
+          <a:xfrm>
+            <a:off x="1971675" y="0"/>
+            <a:ext cx="28575" cy="5143500"/>
+          </a:xfrm>
+          <a:prstGeom prst="rect">
+            <a:avLst/>
+          </a:prstGeom>
+          <a:solidFill>
+            <a:srgbClr val="111111"/>
+          </a:solidFill>
+          <a:ln/>
+        </p:spPr>
+        <p:txBody>
+          <a:bodyPr/>
+          <a:lstStyle/>
+          <a:p>
+            <a:endParaRPr lang="es-CL"/>
+          </a:p>
+        </p:txBody>
+      </p:sp>
+      <p:sp>
+        <p:nvSpPr>
+          <p:cNvPr id="7" name="Text 4"/>
+          <p:cNvSpPr/>
+          <p:nvPr/>
+        </p:nvSpPr>
+        <p:spPr>
+          <a:xfrm>
+            <a:off x="4378178" y="870486"/>
+            <a:ext cx="3411943" cy="560090"/>
+          </a:xfrm>
+          <a:prstGeom prst="rect">
+            <a:avLst/>
+          </a:prstGeom>
+          <a:noFill/>
+          <a:ln/>
+        </p:spPr>
+        <p:txBody>
+          <a:bodyPr wrap="square" lIns="0" tIns="0" rIns="0" bIns="0" rtlCol="0" anchor="t">
+            <a:spAutoFit/>
+          </a:bodyPr>
+          <a:lstStyle/>
+          <a:p>
+            <a:pPr marL="0" indent="0" algn="l">
+              <a:lnSpc>
+                <a:spcPts val="3500"/>
+              </a:lnSpc>
+              <a:buNone/>
+            </a:pPr>
+            <a:r>
+              <a:rPr lang="en-US" sz="6600" b="1" kern="0" spc="-1">
+                <a:solidFill>
+                  <a:schemeClr val="accent2">
+                    <a:lumMod val="75000"/>
+                  </a:schemeClr>
+                </a:solidFill>
+              </a:rPr>
+              <a:t>Pinning</a:t>
+            </a:r>
+            <a:endParaRPr lang="en-US" sz="6600" dirty="0">
+              <a:solidFill>
+                <a:schemeClr val="accent2">
+                  <a:lumMod val="75000"/>
+                </a:schemeClr>
+              </a:solidFill>
+            </a:endParaRPr>
+          </a:p>
+        </p:txBody>
+      </p:sp>
+      <p:pic>
+        <p:nvPicPr>
+          <p:cNvPr id="8" name="Imagen 7">
+            <a:extLst>
+              <a:ext uri="{FF2B5EF4-FFF2-40B4-BE49-F238E27FC236}">
+                <a16:creationId xmlns:a16="http://schemas.microsoft.com/office/drawing/2014/main" id="{94B56CD5-E967-C695-1A00-50C72C52DF60}"/>
+              </a:ext>
+            </a:extLst>
+          </p:cNvPr>
+          <p:cNvPicPr>
+            <a:picLocks noChangeAspect="1"/>
+          </p:cNvPicPr>
+          <p:nvPr/>
+        </p:nvPicPr>
+        <p:blipFill>
+          <a:blip r:embed="rId3"/>
+          <a:stretch>
+            <a:fillRect/>
+          </a:stretch>
+        </p:blipFill>
+        <p:spPr>
+          <a:xfrm>
+            <a:off x="2401034" y="1509823"/>
+            <a:ext cx="6287375" cy="2501459"/>
+          </a:xfrm>
+          <a:prstGeom prst="rect">
+            <a:avLst/>
+          </a:prstGeom>
+        </p:spPr>
+      </p:pic>
+      <p:sp>
+        <p:nvSpPr>
+          <p:cNvPr id="9" name="Text 4">
+            <a:extLst>
+              <a:ext uri="{FF2B5EF4-FFF2-40B4-BE49-F238E27FC236}">
+                <a16:creationId xmlns:a16="http://schemas.microsoft.com/office/drawing/2014/main" id="{B1951048-EFB6-3EAE-5685-077461A60E95}"/>
+              </a:ext>
+            </a:extLst>
+          </p:cNvPr>
+          <p:cNvSpPr/>
+          <p:nvPr/>
+        </p:nvSpPr>
+        <p:spPr>
+          <a:xfrm>
+            <a:off x="4736140" y="4611762"/>
+            <a:ext cx="2529441" cy="404341"/>
+          </a:xfrm>
+          <a:prstGeom prst="rect">
+            <a:avLst/>
+          </a:prstGeom>
+          <a:noFill/>
+          <a:ln/>
+        </p:spPr>
+        <p:txBody>
+          <a:bodyPr wrap="square" lIns="0" tIns="0" rIns="0" bIns="0" rtlCol="0" anchor="t">
+            <a:spAutoFit/>
+          </a:bodyPr>
+          <a:lstStyle/>
+          <a:p>
+            <a:pPr marL="0" indent="0" algn="l">
+              <a:lnSpc>
+                <a:spcPts val="3500"/>
+              </a:lnSpc>
+              <a:buNone/>
+            </a:pPr>
+            <a:r>
+              <a:rPr lang="en-US" sz="2000" b="1" kern="0" spc="-1">
+                <a:solidFill>
+                  <a:schemeClr val="accent2">
+                    <a:lumMod val="75000"/>
+                  </a:schemeClr>
+                </a:solidFill>
+              </a:rPr>
+              <a:t>Banco Estado 2026</a:t>
+            </a:r>
+            <a:endParaRPr lang="en-US" sz="2000" dirty="0">
+              <a:solidFill>
+                <a:schemeClr val="accent2">
+                  <a:lumMod val="75000"/>
+                </a:schemeClr>
+              </a:solidFill>
+            </a:endParaRPr>
+          </a:p>
+        </p:txBody>
+      </p:sp>
+    </p:spTree>
+    <p:extLst>
+      <p:ext uri="{BB962C8B-B14F-4D97-AF65-F5344CB8AC3E}">
+        <p14:creationId xmlns:p14="http://schemas.microsoft.com/office/powerpoint/2010/main" val="436076676"/>
+      </p:ext>
+    </p:extLst>
+  </p:cSld>
+  <p:clrMapOvr>
+    <a:masterClrMapping/>
+  </p:clrMapOvr>
+</p:sld>
+</file>
+
+<file path=ppt/slides/slide10.xml><?xml version="1.0" encoding="utf-8"?>
+<p:sld xmlns:a="http://schemas.openxmlformats.org/drawingml/2006/main" xmlns:r="http://schemas.openxmlformats.org/officeDocument/2006/relationships" xmlns:p="http://schemas.openxmlformats.org/presentationml/2006/main">
+  <p:cSld name="Slide 8">
     <p:spTree>
       <p:nvGrpSpPr>
         <p:cNvPr id="1" name=""/>
@@ -1904,7 +2385,7 @@
         </p:blipFill>
         <p:spPr>
           <a:xfrm>
-            <a:off x="0" y="0"/>
+            <a:off x="0" y="-47414"/>
             <a:ext cx="9144000" cy="5143500"/>
           </a:xfrm>
           <a:prstGeom prst="rect">
@@ -1974,8 +2455,8 @@
         </p:nvSpPr>
         <p:spPr>
           <a:xfrm>
-            <a:off x="214313" y="285750"/>
-            <a:ext cx="1571625" cy="685800"/>
+            <a:off x="142875" y="285750"/>
+            <a:ext cx="806888" cy="729880"/>
           </a:xfrm>
           <a:prstGeom prst="rect">
             <a:avLst/>
@@ -1996,14 +2477,22 @@
               <a:buNone/>
             </a:pPr>
             <a:r>
-              <a:rPr lang="en-US" sz="6218" b="1" kern="0" spc="-4" dirty="0">
-                <a:solidFill>
-                  <a:srgbClr val="F5F5F5"/>
-                </a:solidFill>
-              </a:rPr>
-              <a:t>01</a:t>
-            </a:r>
-            <a:endParaRPr lang="en-US" sz="6218" dirty="0"/>
+              <a:rPr lang="en-US" sz="6218" b="1" kern="0" spc="-4">
+                <a:solidFill>
+                  <a:schemeClr val="accent2">
+                    <a:lumMod val="75000"/>
+                  </a:schemeClr>
+                </a:solidFill>
+              </a:rPr>
+              <a:t>09</a:t>
+            </a:r>
+            <a:endParaRPr lang="en-US" sz="6218" dirty="0">
+              <a:solidFill>
+                <a:schemeClr val="accent2">
+                  <a:lumMod val="75000"/>
+                </a:schemeClr>
+              </a:solidFill>
+            </a:endParaRPr>
           </a:p>
         </p:txBody>
       </p:sp>
@@ -2015,17 +2504,17 @@
         </p:nvSpPr>
         <p:spPr>
           <a:xfrm>
-            <a:off x="214313" y="4507706"/>
-            <a:ext cx="1571625" cy="350044"/>
-          </a:xfrm>
-          <a:prstGeom prst="rect">
-            <a:avLst/>
-          </a:prstGeom>
-          <a:noFill/>
-          <a:ln/>
-        </p:spPr>
-        <p:txBody>
-          <a:bodyPr wrap="square" lIns="0" tIns="0" rIns="0" bIns="0" rtlCol="0" anchor="t">
+            <a:off x="142875" y="4825603"/>
+            <a:ext cx="1714500" cy="175022"/>
+          </a:xfrm>
+          <a:prstGeom prst="rect">
+            <a:avLst/>
+          </a:prstGeom>
+          <a:noFill/>
+          <a:ln/>
+        </p:spPr>
+        <p:txBody>
+          <a:bodyPr wrap="none" lIns="0" tIns="0" rIns="0" bIns="0" rtlCol="0" anchor="t">
             <a:spAutoFit/>
           </a:bodyPr>
           <a:lstStyle/>
@@ -2044,7 +2533,7 @@
                   </a:srgbClr>
                 </a:solidFill>
               </a:rPr>
-              <a:t>Contexto y Objetivo</a:t>
+              <a:t>Android NSC</a:t>
             </a:r>
             <a:endParaRPr lang="en-US" sz="942" dirty="0"/>
           </a:p>
@@ -2058,36 +2547,36 @@
         </p:nvSpPr>
         <p:spPr>
           <a:xfrm>
-            <a:off x="2571750" y="428625"/>
-            <a:ext cx="6000750" cy="1131559"/>
-          </a:xfrm>
-          <a:prstGeom prst="rect">
-            <a:avLst/>
-          </a:prstGeom>
-          <a:noFill/>
-          <a:ln/>
-        </p:spPr>
-        <p:txBody>
-          <a:bodyPr wrap="square" lIns="0" tIns="0" rIns="0" bIns="0" rtlCol="0" anchor="t">
-            <a:spAutoFit/>
-          </a:bodyPr>
-          <a:lstStyle/>
-          <a:p>
-            <a:pPr marL="0" indent="0" algn="l">
-              <a:lnSpc>
-                <a:spcPts val="4500"/>
-              </a:lnSpc>
-              <a:buNone/>
-            </a:pPr>
-            <a:r>
-              <a:rPr lang="en-US" sz="3731" b="1" kern="0" spc="-2" dirty="0">
+            <a:off x="2428875" y="285750"/>
+            <a:ext cx="6286500" cy="377168"/>
+          </a:xfrm>
+          <a:prstGeom prst="rect">
+            <a:avLst/>
+          </a:prstGeom>
+          <a:noFill/>
+          <a:ln/>
+        </p:spPr>
+        <p:txBody>
+          <a:bodyPr wrap="none" lIns="0" tIns="0" rIns="0" bIns="0" rtlCol="0" anchor="t">
+            <a:spAutoFit/>
+          </a:bodyPr>
+          <a:lstStyle/>
+          <a:p>
+            <a:pPr marL="0" indent="0" algn="l">
+              <a:lnSpc>
+                <a:spcPts val="3000"/>
+              </a:lnSpc>
+              <a:buNone/>
+            </a:pPr>
+            <a:r>
+              <a:rPr lang="en-US" sz="2436" b="1" kern="0" spc="-1" dirty="0">
                 <a:solidFill>
                   <a:srgbClr val="111111"/>
                 </a:solidFill>
               </a:rPr>
-              <a:t>Certificate Pinning en Banca</a:t>
-            </a:r>
-            <a:endParaRPr lang="en-US" sz="3731" dirty="0"/>
+              <a:t>Android: Enfoque Recomendado</a:t>
+            </a:r>
+            <a:endParaRPr lang="en-US" sz="2436" dirty="0"/>
           </a:p>
         </p:txBody>
       </p:sp>
@@ -2099,8 +2588,8 @@
         </p:nvSpPr>
         <p:spPr>
           <a:xfrm>
-            <a:off x="2571750" y="1703059"/>
-            <a:ext cx="6000750" cy="233958"/>
+            <a:off x="2428875" y="734355"/>
+            <a:ext cx="6286500" cy="194667"/>
           </a:xfrm>
           <a:prstGeom prst="rect">
             <a:avLst/>
@@ -2116,19 +2605,19 @@
           <a:p>
             <a:pPr marL="0" indent="0" algn="l">
               <a:lnSpc>
-                <a:spcPts val="1600"/>
-              </a:lnSpc>
-              <a:buNone/>
-            </a:pPr>
-            <a:r>
-              <a:rPr lang="en-US" sz="1193" b="1" dirty="0">
+                <a:spcPts val="1400"/>
+              </a:lnSpc>
+              <a:buNone/>
+            </a:pPr>
+            <a:r>
+              <a:rPr lang="en-US" sz="987" b="1" dirty="0">
                 <a:solidFill>
                   <a:srgbClr val="0044CC"/>
                 </a:solidFill>
               </a:rPr>
-              <a:t>Arquitectura y Operación 2026</a:t>
-            </a:r>
-            <a:endParaRPr lang="en-US" sz="1193" dirty="0"/>
+              <a:t>Network Security Configuration (NSC)</a:t>
+            </a:r>
+            <a:endParaRPr lang="en-US" sz="987" dirty="0"/>
           </a:p>
         </p:txBody>
       </p:sp>
@@ -2148,8 +2637,8 @@
         </p:blipFill>
         <p:spPr>
           <a:xfrm>
-            <a:off x="2728913" y="2282596"/>
-            <a:ext cx="171450" cy="171450"/>
+            <a:off x="2428875" y="1214772"/>
+            <a:ext cx="96441" cy="128588"/>
           </a:xfrm>
           <a:prstGeom prst="rect">
             <a:avLst/>
@@ -2164,49 +2653,8 @@
         </p:nvSpPr>
         <p:spPr>
           <a:xfrm>
-            <a:off x="2971800" y="2251342"/>
-            <a:ext cx="1998771" cy="233958"/>
-          </a:xfrm>
-          <a:prstGeom prst="rect">
-            <a:avLst/>
-          </a:prstGeom>
-          <a:noFill/>
-          <a:ln/>
-        </p:spPr>
-        <p:txBody>
-          <a:bodyPr wrap="none" lIns="0" tIns="0" rIns="0" bIns="0" rtlCol="0" anchor="t">
-            <a:spAutoFit/>
-          </a:bodyPr>
-          <a:lstStyle/>
-          <a:p>
-            <a:pPr marL="0" indent="0" algn="l">
-              <a:lnSpc>
-                <a:spcPts val="1600"/>
-              </a:lnSpc>
-              <a:buNone/>
-            </a:pPr>
-            <a:r>
-              <a:rPr lang="en-US" sz="1193" b="1" dirty="0">
-                <a:solidFill>
-                  <a:srgbClr val="333333"/>
-                </a:solidFill>
-              </a:rPr>
-              <a:t>Problema que Resuelve</a:t>
-            </a:r>
-            <a:endParaRPr lang="en-US" sz="1193" dirty="0"/>
-          </a:p>
-        </p:txBody>
-      </p:sp>
-      <p:sp>
-        <p:nvSpPr>
-          <p:cNvPr id="11" name="Text 7"/>
-          <p:cNvSpPr/>
-          <p:nvPr/>
-        </p:nvSpPr>
-        <p:spPr>
-          <a:xfrm>
-            <a:off x="2728913" y="2592456"/>
-            <a:ext cx="2757488" cy="771525"/>
+            <a:off x="2611041" y="1186197"/>
+            <a:ext cx="2875359" cy="540051"/>
           </a:xfrm>
           <a:prstGeom prst="rect">
             <a:avLst/>
@@ -2222,25 +2670,34 @@
           <a:p>
             <a:pPr marL="0" indent="0" algn="l">
               <a:lnSpc>
-                <a:spcPts val="1500"/>
-              </a:lnSpc>
-              <a:buNone/>
-            </a:pPr>
+                <a:spcPts val="1400"/>
+              </a:lnSpc>
+              <a:buNone/>
+            </a:pPr>
+            <a:r>
+              <a:rPr lang="en-US" sz="885" b="1" dirty="0">
+                <a:solidFill>
+                  <a:srgbClr val="111111"/>
+                </a:solidFill>
+              </a:rPr>
+              <a:t>Declarativo (XML)</a:t>
+            </a:r>
             <a:r>
               <a:rPr lang="en-US" sz="942" dirty="0">
                 <a:solidFill>
-                  <a:srgbClr val="333333"/>
-                </a:solidFill>
-              </a:rPr>
-              <a:t>Mitigación efectiva de ataques MITM, incluso con CAs raíz instaladas en dispositivo, emisión indebida o inspección TLS no autorizada.</a:t>
-            </a:r>
-            <a:endParaRPr lang="en-US" sz="942" dirty="0"/>
+                  <a:srgbClr val="111111"/>
+                </a:solidFill>
+              </a:rPr>
+              <a:t>
+Configuración separada del código, reduciendo errores de implementación.</a:t>
+            </a:r>
+            <a:endParaRPr lang="en-US" sz="885" dirty="0"/>
           </a:p>
         </p:txBody>
       </p:sp>
       <p:pic>
         <p:nvPicPr>
-          <p:cNvPr id="12" name="Image 2" descr="preencoded.png"/>
+          <p:cNvPr id="11" name="Image 2" descr="preencoded.png"/>
           <p:cNvPicPr>
             <a:picLocks noChangeAspect="1"/>
           </p:cNvPicPr>
@@ -2254,8 +2711,8 @@
         </p:blipFill>
         <p:spPr>
           <a:xfrm>
-            <a:off x="5815013" y="2282596"/>
-            <a:ext cx="171450" cy="171450"/>
+            <a:off x="2428875" y="1840548"/>
+            <a:ext cx="128588" cy="128588"/>
           </a:xfrm>
           <a:prstGeom prst="rect">
             <a:avLst/>
@@ -2264,55 +2721,14 @@
       </p:pic>
       <p:sp>
         <p:nvSpPr>
-          <p:cNvPr id="13" name="Text 8"/>
-          <p:cNvSpPr/>
-          <p:nvPr/>
-        </p:nvSpPr>
-        <p:spPr>
-          <a:xfrm>
-            <a:off x="6057900" y="2251342"/>
-            <a:ext cx="1699933" cy="233958"/>
-          </a:xfrm>
-          <a:prstGeom prst="rect">
-            <a:avLst/>
-          </a:prstGeom>
-          <a:noFill/>
-          <a:ln/>
-        </p:spPr>
-        <p:txBody>
-          <a:bodyPr wrap="none" lIns="0" tIns="0" rIns="0" bIns="0" rtlCol="0" anchor="t">
-            <a:spAutoFit/>
-          </a:bodyPr>
-          <a:lstStyle/>
-          <a:p>
-            <a:pPr marL="0" indent="0" algn="l">
-              <a:lnSpc>
-                <a:spcPts val="1600"/>
-              </a:lnSpc>
-              <a:buNone/>
-            </a:pPr>
-            <a:r>
-              <a:rPr lang="en-US" sz="1193" b="1" dirty="0">
-                <a:solidFill>
-                  <a:srgbClr val="333333"/>
-                </a:solidFill>
-              </a:rPr>
-              <a:t>Lo que NO Resuelve</a:t>
-            </a:r>
-            <a:endParaRPr lang="en-US" sz="1193" dirty="0"/>
-          </a:p>
-        </p:txBody>
-      </p:sp>
-      <p:sp>
-        <p:nvSpPr>
-          <p:cNvPr id="14" name="Text 9"/>
-          <p:cNvSpPr/>
-          <p:nvPr/>
-        </p:nvSpPr>
-        <p:spPr>
-          <a:xfrm>
-            <a:off x="5815013" y="2592456"/>
-            <a:ext cx="2757488" cy="771525"/>
+          <p:cNvPr id="12" name="Text 7"/>
+          <p:cNvSpPr/>
+          <p:nvPr/>
+        </p:nvSpPr>
+        <p:spPr>
+          <a:xfrm>
+            <a:off x="2643188" y="1811973"/>
+            <a:ext cx="2843213" cy="540051"/>
           </a:xfrm>
           <a:prstGeom prst="rect">
             <a:avLst/>
@@ -2328,79 +2744,34 @@
           <a:p>
             <a:pPr marL="0" indent="0" algn="l">
               <a:lnSpc>
-                <a:spcPts val="1500"/>
-              </a:lnSpc>
-              <a:buNone/>
-            </a:pPr>
+                <a:spcPts val="1400"/>
+              </a:lnSpc>
+              <a:buNone/>
+            </a:pPr>
+            <a:r>
+              <a:rPr lang="en-US" sz="885" b="1" dirty="0">
+                <a:solidFill>
+                  <a:srgbClr val="111111"/>
+                </a:solidFill>
+              </a:rPr>
+              <a:t>Soporte Multi-Pin</a:t>
+            </a:r>
             <a:r>
               <a:rPr lang="en-US" sz="942" dirty="0">
                 <a:solidFill>
-                  <a:srgbClr val="333333"/>
-                </a:solidFill>
-              </a:rPr>
-              <a:t>No protege contra dispositivos comprometidos (root/jailbreak), hooking en runtime, patching de binarios o ingeniería inversa.</a:t>
-            </a:r>
-            <a:endParaRPr lang="en-US" sz="942" dirty="0"/>
-          </a:p>
-        </p:txBody>
-      </p:sp>
-      <p:sp>
-        <p:nvSpPr>
-          <p:cNvPr id="15" name="Shape 10"/>
-          <p:cNvSpPr/>
-          <p:nvPr/>
-        </p:nvSpPr>
-        <p:spPr>
-          <a:xfrm>
-            <a:off x="2728913" y="3884051"/>
-            <a:ext cx="5843588" cy="482203"/>
-          </a:xfrm>
-          <a:prstGeom prst="rect">
-            <a:avLst/>
-          </a:prstGeom>
-          <a:solidFill>
-            <a:srgbClr val="111111"/>
-          </a:solidFill>
-          <a:ln/>
-        </p:spPr>
-        <p:txBody>
-          <a:bodyPr/>
-          <a:lstStyle/>
-          <a:p>
-            <a:endParaRPr lang="es-CL"/>
-          </a:p>
-        </p:txBody>
-      </p:sp>
-      <p:sp>
-        <p:nvSpPr>
-          <p:cNvPr id="16" name="Shape 11"/>
-          <p:cNvSpPr/>
-          <p:nvPr/>
-        </p:nvSpPr>
-        <p:spPr>
-          <a:xfrm>
-            <a:off x="2728913" y="3884051"/>
-            <a:ext cx="71438" cy="482203"/>
-          </a:xfrm>
-          <a:prstGeom prst="rect">
-            <a:avLst/>
-          </a:prstGeom>
-          <a:solidFill>
-            <a:srgbClr val="FF3300"/>
-          </a:solidFill>
-          <a:ln/>
-        </p:spPr>
-        <p:txBody>
-          <a:bodyPr/>
-          <a:lstStyle/>
-          <a:p>
-            <a:endParaRPr lang="es-CL"/>
+                  <a:srgbClr val="111111"/>
+                </a:solidFill>
+              </a:rPr>
+              <a:t>
+Nativo para definir PinA (Activo) y PinB (Backup).</a:t>
+            </a:r>
+            <a:endParaRPr lang="en-US" sz="885" dirty="0"/>
           </a:p>
         </p:txBody>
       </p:sp>
       <p:pic>
         <p:nvPicPr>
-          <p:cNvPr id="17" name="Image 3" descr="preencoded.png"/>
+          <p:cNvPr id="13" name="Image 3" descr="preencoded.png"/>
           <p:cNvPicPr>
             <a:picLocks noChangeAspect="1"/>
           </p:cNvPicPr>
@@ -2414,8 +2785,8 @@
         </p:blipFill>
         <p:spPr>
           <a:xfrm>
-            <a:off x="2814638" y="3991208"/>
-            <a:ext cx="114300" cy="114300"/>
+            <a:off x="2428875" y="2466324"/>
+            <a:ext cx="96441" cy="128588"/>
           </a:xfrm>
           <a:prstGeom prst="rect">
             <a:avLst/>
@@ -2424,23 +2795,331 @@
       </p:pic>
       <p:sp>
         <p:nvSpPr>
+          <p:cNvPr id="14" name="Text 8"/>
+          <p:cNvSpPr/>
+          <p:nvPr/>
+        </p:nvSpPr>
+        <p:spPr>
+          <a:xfrm>
+            <a:off x="2611041" y="2437749"/>
+            <a:ext cx="2875359" cy="540051"/>
+          </a:xfrm>
+          <a:prstGeom prst="rect">
+            <a:avLst/>
+          </a:prstGeom>
+          <a:noFill/>
+          <a:ln/>
+        </p:spPr>
+        <p:txBody>
+          <a:bodyPr wrap="square" lIns="0" tIns="0" rIns="0" bIns="0" rtlCol="0" anchor="t">
+            <a:spAutoFit/>
+          </a:bodyPr>
+          <a:lstStyle/>
+          <a:p>
+            <a:pPr marL="0" indent="0" algn="l">
+              <a:lnSpc>
+                <a:spcPts val="1400"/>
+              </a:lnSpc>
+              <a:buNone/>
+            </a:pPr>
+            <a:r>
+              <a:rPr lang="en-US" sz="885" b="1" dirty="0">
+                <a:solidFill>
+                  <a:srgbClr val="111111"/>
+                </a:solidFill>
+              </a:rPr>
+              <a:t>Expiración de Pin-Set</a:t>
+            </a:r>
+            <a:r>
+              <a:rPr lang="en-US" sz="942" dirty="0">
+                <a:solidFill>
+                  <a:srgbClr val="111111"/>
+                </a:solidFill>
+              </a:rPr>
+              <a:t>
+Fuerza la revisión periódica y evita bloqueos eternos.</a:t>
+            </a:r>
+            <a:endParaRPr lang="en-US" sz="885" dirty="0"/>
+          </a:p>
+        </p:txBody>
+      </p:sp>
+      <p:sp>
+        <p:nvSpPr>
+          <p:cNvPr id="15" name="Shape 9"/>
+          <p:cNvSpPr/>
+          <p:nvPr/>
+        </p:nvSpPr>
+        <p:spPr>
+          <a:xfrm>
+            <a:off x="2428875" y="3192474"/>
+            <a:ext cx="3057525" cy="1343807"/>
+          </a:xfrm>
+          <a:prstGeom prst="rect">
+            <a:avLst/>
+          </a:prstGeom>
+          <a:solidFill>
+            <a:srgbClr val="111111"/>
+          </a:solidFill>
+          <a:ln/>
+        </p:spPr>
+        <p:txBody>
+          <a:bodyPr/>
+          <a:lstStyle/>
+          <a:p>
+            <a:r>
+              <a:rPr lang="es-CL" sz="700">
+                <a:solidFill>
+                  <a:schemeClr val="accent2">
+                    <a:lumMod val="75000"/>
+                  </a:schemeClr>
+                </a:solidFill>
+              </a:rPr>
+              <a:t>&lt;?xml version="1.0" encoding="utf-8"?&gt;</a:t>
+            </a:r>
+          </a:p>
+          <a:p>
+            <a:r>
+              <a:rPr lang="es-CL" sz="700">
+                <a:solidFill>
+                  <a:schemeClr val="accent2">
+                    <a:lumMod val="75000"/>
+                  </a:schemeClr>
+                </a:solidFill>
+              </a:rPr>
+              <a:t>&lt;network-security-config&gt;</a:t>
+            </a:r>
+          </a:p>
+          <a:p>
+            <a:r>
+              <a:rPr lang="es-CL" sz="700">
+                <a:solidFill>
+                  <a:schemeClr val="accent2">
+                    <a:lumMod val="75000"/>
+                  </a:schemeClr>
+                </a:solidFill>
+              </a:rPr>
+              <a:t>  &lt;domain-config cleartextTrafficPermitted="false"&gt;</a:t>
+            </a:r>
+          </a:p>
+          <a:p>
+            <a:r>
+              <a:rPr lang="es-CL" sz="700">
+                <a:solidFill>
+                  <a:schemeClr val="accent2">
+                    <a:lumMod val="75000"/>
+                  </a:schemeClr>
+                </a:solidFill>
+              </a:rPr>
+              <a:t>    &lt;domain includeSubdomains="true"&gt;api.banco.com&lt;/domain&gt;</a:t>
+            </a:r>
+          </a:p>
+          <a:p>
+            <a:r>
+              <a:rPr lang="es-CL" sz="700">
+                <a:solidFill>
+                  <a:schemeClr val="accent2">
+                    <a:lumMod val="75000"/>
+                  </a:schemeClr>
+                </a:solidFill>
+              </a:rPr>
+              <a:t>    &lt;pin-set expiration="2026-12-31"&gt;</a:t>
+            </a:r>
+          </a:p>
+          <a:p>
+            <a:r>
+              <a:rPr lang="es-CL" sz="700">
+                <a:solidFill>
+                  <a:schemeClr val="accent2">
+                    <a:lumMod val="75000"/>
+                  </a:schemeClr>
+                </a:solidFill>
+              </a:rPr>
+              <a:t>      &lt;!-- Pin A: Activo --&gt;</a:t>
+            </a:r>
+          </a:p>
+          <a:p>
+            <a:r>
+              <a:rPr lang="es-CL" sz="700">
+                <a:solidFill>
+                  <a:schemeClr val="accent2">
+                    <a:lumMod val="75000"/>
+                  </a:schemeClr>
+                </a:solidFill>
+              </a:rPr>
+              <a:t>      &lt;pin digest="</a:t>
+            </a:r>
+            <a:r>
+              <a:rPr lang="es-CL" sz="700">
+                <a:solidFill>
+                  <a:srgbClr val="00B050"/>
+                </a:solidFill>
+              </a:rPr>
+              <a:t>SHA-256</a:t>
+            </a:r>
+            <a:r>
+              <a:rPr lang="es-CL" sz="700">
+                <a:solidFill>
+                  <a:schemeClr val="accent2">
+                    <a:lumMod val="75000"/>
+                  </a:schemeClr>
+                </a:solidFill>
+              </a:rPr>
+              <a:t>"&gt;7HlpUjXmFgq...&lt;/pin&gt;</a:t>
+            </a:r>
+          </a:p>
+          <a:p>
+            <a:r>
+              <a:rPr lang="es-CL" sz="700">
+                <a:solidFill>
+                  <a:schemeClr val="accent2">
+                    <a:lumMod val="75000"/>
+                  </a:schemeClr>
+                </a:solidFill>
+              </a:rPr>
+              <a:t>      &lt;!-- Pin B: Backup --&gt;</a:t>
+            </a:r>
+          </a:p>
+          <a:p>
+            <a:r>
+              <a:rPr lang="es-CL" sz="700">
+                <a:solidFill>
+                  <a:schemeClr val="accent2">
+                    <a:lumMod val="75000"/>
+                  </a:schemeClr>
+                </a:solidFill>
+              </a:rPr>
+              <a:t>      &lt;pin digest="</a:t>
+            </a:r>
+            <a:r>
+              <a:rPr lang="es-CL" sz="700">
+                <a:solidFill>
+                  <a:srgbClr val="00B050"/>
+                </a:solidFill>
+              </a:rPr>
+              <a:t>SHA-256</a:t>
+            </a:r>
+            <a:r>
+              <a:rPr lang="es-CL" sz="700">
+                <a:solidFill>
+                  <a:schemeClr val="accent2">
+                    <a:lumMod val="75000"/>
+                  </a:schemeClr>
+                </a:solidFill>
+              </a:rPr>
+              <a:t>"&gt;9JKLOpQvTrs...&lt;/pin&gt;</a:t>
+            </a:r>
+          </a:p>
+          <a:p>
+            <a:r>
+              <a:rPr lang="es-CL" sz="700">
+                <a:solidFill>
+                  <a:schemeClr val="accent2">
+                    <a:lumMod val="75000"/>
+                  </a:schemeClr>
+                </a:solidFill>
+              </a:rPr>
+              <a:t>    &lt;/pin-set&gt;</a:t>
+            </a:r>
+          </a:p>
+          <a:p>
+            <a:r>
+              <a:rPr lang="es-CL" sz="700">
+                <a:solidFill>
+                  <a:schemeClr val="accent2">
+                    <a:lumMod val="75000"/>
+                  </a:schemeClr>
+                </a:solidFill>
+              </a:rPr>
+              <a:t>  &lt;/domain-config&gt;</a:t>
+            </a:r>
+          </a:p>
+          <a:p>
+            <a:r>
+              <a:rPr lang="es-CL" sz="700">
+                <a:solidFill>
+                  <a:schemeClr val="accent2">
+                    <a:lumMod val="75000"/>
+                  </a:schemeClr>
+                </a:solidFill>
+              </a:rPr>
+              <a:t>&lt;/network-security-config&gt;</a:t>
+            </a:r>
+          </a:p>
+        </p:txBody>
+      </p:sp>
+      <p:sp>
+        <p:nvSpPr>
+          <p:cNvPr id="16" name="Shape 10"/>
+          <p:cNvSpPr/>
+          <p:nvPr/>
+        </p:nvSpPr>
+        <p:spPr>
+          <a:xfrm>
+            <a:off x="2428875" y="3192112"/>
+            <a:ext cx="96441" cy="1344169"/>
+          </a:xfrm>
+          <a:prstGeom prst="rect">
+            <a:avLst/>
+          </a:prstGeom>
+          <a:solidFill>
+            <a:srgbClr val="0044CC"/>
+          </a:solidFill>
+          <a:ln/>
+        </p:spPr>
+        <p:txBody>
+          <a:bodyPr/>
+          <a:lstStyle/>
+          <a:p>
+            <a:endParaRPr lang="es-CL"/>
+          </a:p>
+        </p:txBody>
+      </p:sp>
+      <p:sp>
+        <p:nvSpPr>
+          <p:cNvPr id="17" name="Shape 11"/>
+          <p:cNvSpPr/>
+          <p:nvPr/>
+        </p:nvSpPr>
+        <p:spPr>
+          <a:xfrm>
+            <a:off x="3938946" y="3109247"/>
+            <a:ext cx="1492633" cy="165729"/>
+          </a:xfrm>
+          <a:prstGeom prst="rect">
+            <a:avLst/>
+          </a:prstGeom>
+          <a:solidFill>
+            <a:srgbClr val="0044CC"/>
+          </a:solidFill>
+          <a:ln/>
+        </p:spPr>
+        <p:txBody>
+          <a:bodyPr/>
+          <a:lstStyle/>
+          <a:p>
+            <a:endParaRPr lang="es-CL"/>
+          </a:p>
+        </p:txBody>
+      </p:sp>
+      <p:sp>
+        <p:nvSpPr>
           <p:cNvPr id="18" name="Text 12"/>
           <p:cNvSpPr/>
           <p:nvPr/>
         </p:nvSpPr>
         <p:spPr>
           <a:xfrm>
-            <a:off x="2958657" y="3969776"/>
-            <a:ext cx="576997" cy="155377"/>
-          </a:xfrm>
-          <a:prstGeom prst="rect">
-            <a:avLst/>
-          </a:prstGeom>
-          <a:noFill/>
-          <a:ln/>
-        </p:spPr>
-        <p:txBody>
-          <a:bodyPr wrap="none" lIns="0" tIns="0" rIns="0" bIns="0" rtlCol="0" anchor="t">
+            <a:off x="3938946" y="3095987"/>
+            <a:ext cx="1718904" cy="165729"/>
+          </a:xfrm>
+          <a:prstGeom prst="rect">
+            <a:avLst/>
+          </a:prstGeom>
+          <a:noFill/>
+          <a:ln/>
+        </p:spPr>
+        <p:txBody>
+          <a:bodyPr wrap="square" lIns="85090" tIns="17018" rIns="85090" bIns="17018" rtlCol="0" anchor="t">
             <a:spAutoFit/>
           </a:bodyPr>
           <a:lstStyle/>
@@ -2452,96 +3131,111 @@
               <a:buNone/>
             </a:pPr>
             <a:r>
-              <a:rPr lang="en-US" sz="784" b="1" dirty="0">
-                <a:solidFill>
-                  <a:srgbClr val="F5F5F5"/>
-                </a:solidFill>
-              </a:rPr>
-              <a:t>OBJETIVO:</a:t>
-            </a:r>
-            <a:endParaRPr lang="en-US" sz="784" dirty="0"/>
-          </a:p>
-        </p:txBody>
-      </p:sp>
-      <p:sp>
-        <p:nvSpPr>
-          <p:cNvPr id="19" name="Text 13"/>
-          <p:cNvSpPr/>
-          <p:nvPr/>
-        </p:nvSpPr>
-        <p:spPr>
-          <a:xfrm>
-            <a:off x="3535654" y="3969776"/>
-            <a:ext cx="4458174" cy="155377"/>
-          </a:xfrm>
-          <a:prstGeom prst="rect">
-            <a:avLst/>
-          </a:prstGeom>
-          <a:noFill/>
-          <a:ln/>
-        </p:spPr>
-        <p:txBody>
-          <a:bodyPr wrap="none" lIns="0" tIns="0" rIns="0" bIns="0" rtlCol="0" anchor="t">
-            <a:spAutoFit/>
-          </a:bodyPr>
-          <a:lstStyle/>
-          <a:p>
-            <a:pPr marL="0" indent="0" algn="l">
-              <a:lnSpc>
-                <a:spcPts val="1100"/>
-              </a:lnSpc>
-              <a:buNone/>
-            </a:pPr>
-            <a:r>
-              <a:rPr lang="en-US" sz="834" dirty="0">
-                <a:solidFill>
-                  <a:srgbClr val="F5F5F5"/>
-                </a:solidFill>
-              </a:rPr>
-              <a:t>Entender SPKI pinning desde una perspectiva de arquitectura y operación robusta,</a:t>
-            </a:r>
-            <a:endParaRPr lang="en-US" sz="834" dirty="0"/>
-          </a:p>
-        </p:txBody>
-      </p:sp>
-      <p:sp>
-        <p:nvSpPr>
-          <p:cNvPr id="20" name="Text 14"/>
-          <p:cNvSpPr/>
-          <p:nvPr/>
-        </p:nvSpPr>
-        <p:spPr>
-          <a:xfrm>
-            <a:off x="2814638" y="4125153"/>
-            <a:ext cx="2660461" cy="155377"/>
-          </a:xfrm>
-          <a:prstGeom prst="rect">
-            <a:avLst/>
-          </a:prstGeom>
-          <a:noFill/>
-          <a:ln/>
-        </p:spPr>
-        <p:txBody>
-          <a:bodyPr wrap="none" lIns="0" tIns="0" rIns="0" bIns="0" rtlCol="0" anchor="t">
-            <a:spAutoFit/>
-          </a:bodyPr>
-          <a:lstStyle/>
-          <a:p>
-            <a:pPr marL="0" indent="0" algn="l">
-              <a:lnSpc>
-                <a:spcPts val="1100"/>
-              </a:lnSpc>
-              <a:buNone/>
-            </a:pPr>
-            <a:r>
-              <a:rPr lang="en-US" sz="834" dirty="0">
-                <a:solidFill>
-                  <a:srgbClr val="F5F5F5"/>
-                </a:solidFill>
-              </a:rPr>
-              <a:t>superando la visión de "solo una línea de código".</a:t>
-            </a:r>
-            <a:endParaRPr lang="en-US" sz="834" dirty="0"/>
+              <a:rPr lang="en-US" sz="800" b="1" dirty="0">
+                <a:solidFill>
+                  <a:srgbClr val="FFFFFF"/>
+                </a:solidFill>
+              </a:rPr>
+              <a:t>network_security_config.xml</a:t>
+            </a:r>
+            <a:endParaRPr lang="en-US" sz="800" dirty="0"/>
+          </a:p>
+        </p:txBody>
+      </p:sp>
+      <p:sp>
+        <p:nvSpPr>
+          <p:cNvPr id="25" name="Shape 19"/>
+          <p:cNvSpPr/>
+          <p:nvPr/>
+        </p:nvSpPr>
+        <p:spPr>
+          <a:xfrm>
+            <a:off x="5657850" y="1186197"/>
+            <a:ext cx="3057525" cy="3814428"/>
+          </a:xfrm>
+          <a:prstGeom prst="rect">
+            <a:avLst/>
+          </a:prstGeom>
+          <a:solidFill>
+            <a:srgbClr val="FFFFFF"/>
+          </a:solidFill>
+          <a:ln w="18288">
+            <a:solidFill>
+              <a:srgbClr val="111111"/>
+            </a:solidFill>
+            <a:prstDash val="solid"/>
+          </a:ln>
+        </p:spPr>
+        <p:txBody>
+          <a:bodyPr/>
+          <a:lstStyle/>
+          <a:p>
+            <a:endParaRPr lang="es-CL"/>
+          </a:p>
+        </p:txBody>
+      </p:sp>
+      <p:pic>
+        <p:nvPicPr>
+          <p:cNvPr id="26" name="Image 4" descr="preencoded.png"/>
+          <p:cNvPicPr>
+            <a:picLocks noChangeAspect="1"/>
+          </p:cNvPicPr>
+          <p:nvPr/>
+        </p:nvPicPr>
+        <p:blipFill>
+          <a:blip r:embed="rId7"/>
+          <a:stretch>
+            <a:fillRect/>
+          </a:stretch>
+        </p:blipFill>
+        <p:spPr>
+          <a:xfrm>
+            <a:off x="5715000" y="1243347"/>
+            <a:ext cx="2943225" cy="3292934"/>
+          </a:xfrm>
+          <a:prstGeom prst="rect">
+            <a:avLst/>
+          </a:prstGeom>
+        </p:spPr>
+      </p:pic>
+      <p:sp>
+        <p:nvSpPr>
+          <p:cNvPr id="27" name="Text 20"/>
+          <p:cNvSpPr/>
+          <p:nvPr/>
+        </p:nvSpPr>
+        <p:spPr>
+          <a:xfrm>
+            <a:off x="5715000" y="4622006"/>
+            <a:ext cx="2943225" cy="321469"/>
+          </a:xfrm>
+          <a:prstGeom prst="rect">
+            <a:avLst/>
+          </a:prstGeom>
+          <a:noFill/>
+          <a:ln/>
+        </p:spPr>
+        <p:txBody>
+          <a:bodyPr wrap="square" lIns="0" tIns="51054" rIns="0" bIns="0" rtlCol="0" anchor="t">
+            <a:spAutoFit/>
+          </a:bodyPr>
+          <a:lstStyle/>
+          <a:p>
+            <a:pPr marL="0" indent="0" algn="l">
+              <a:lnSpc>
+                <a:spcPts val="900"/>
+              </a:lnSpc>
+              <a:buNone/>
+            </a:pPr>
+            <a:r>
+              <a:rPr lang="en-US" sz="727" dirty="0">
+                <a:solidFill>
+                  <a:srgbClr val="666666"/>
+                </a:solidFill>
+              </a:rPr>
+              <a:t>&gt; NOTA: Usar OkHttp CertificatePinner solo para casos avanzados (multi-stack).</a:t>
+            </a:r>
+            <a:endParaRPr lang="en-US" sz="727" dirty="0"/>
           </a:p>
         </p:txBody>
       </p:sp>
@@ -2553,7 +3247,1052 @@
 </p:sld>
 </file>
 
-<file path=ppt/slides/slide10.xml><?xml version="1.0" encoding="utf-8"?>
+<file path=ppt/slides/slide11.xml><?xml version="1.0" encoding="utf-8"?>
+<p:sld xmlns:a="http://schemas.openxmlformats.org/drawingml/2006/main" xmlns:r="http://schemas.openxmlformats.org/officeDocument/2006/relationships" xmlns:p="http://schemas.openxmlformats.org/presentationml/2006/main">
+  <p:cSld name="Slide 9">
+    <p:spTree>
+      <p:nvGrpSpPr>
+        <p:cNvPr id="1" name=""/>
+        <p:cNvGrpSpPr/>
+        <p:nvPr/>
+      </p:nvGrpSpPr>
+      <p:grpSpPr>
+        <a:xfrm>
+          <a:off x="0" y="0"/>
+          <a:ext cx="0" cy="0"/>
+          <a:chOff x="0" y="0"/>
+          <a:chExt cx="0" cy="0"/>
+        </a:xfrm>
+      </p:grpSpPr>
+      <p:pic>
+        <p:nvPicPr>
+          <p:cNvPr id="2" name="Image 0" descr="preencoded.png"/>
+          <p:cNvPicPr>
+            <a:picLocks noChangeAspect="1"/>
+          </p:cNvPicPr>
+          <p:nvPr/>
+        </p:nvPicPr>
+        <p:blipFill>
+          <a:blip r:embed="rId3"/>
+          <a:stretch>
+            <a:fillRect/>
+          </a:stretch>
+        </p:blipFill>
+        <p:spPr>
+          <a:xfrm>
+            <a:off x="0" y="0"/>
+            <a:ext cx="9144000" cy="5143500"/>
+          </a:xfrm>
+          <a:prstGeom prst="rect">
+            <a:avLst/>
+          </a:prstGeom>
+        </p:spPr>
+      </p:pic>
+      <p:sp>
+        <p:nvSpPr>
+          <p:cNvPr id="3" name="Shape 0"/>
+          <p:cNvSpPr/>
+          <p:nvPr/>
+        </p:nvSpPr>
+        <p:spPr>
+          <a:xfrm>
+            <a:off x="0" y="0"/>
+            <a:ext cx="2000250" cy="5143500"/>
+          </a:xfrm>
+          <a:prstGeom prst="rect">
+            <a:avLst/>
+          </a:prstGeom>
+          <a:solidFill>
+            <a:srgbClr val="111111"/>
+          </a:solidFill>
+          <a:ln/>
+        </p:spPr>
+        <p:txBody>
+          <a:bodyPr/>
+          <a:lstStyle/>
+          <a:p>
+            <a:endParaRPr lang="es-CL"/>
+          </a:p>
+        </p:txBody>
+      </p:sp>
+      <p:sp>
+        <p:nvSpPr>
+          <p:cNvPr id="4" name="Shape 1"/>
+          <p:cNvSpPr/>
+          <p:nvPr/>
+        </p:nvSpPr>
+        <p:spPr>
+          <a:xfrm>
+            <a:off x="1971675" y="0"/>
+            <a:ext cx="28575" cy="5143500"/>
+          </a:xfrm>
+          <a:prstGeom prst="rect">
+            <a:avLst/>
+          </a:prstGeom>
+          <a:solidFill>
+            <a:srgbClr val="111111"/>
+          </a:solidFill>
+          <a:ln/>
+        </p:spPr>
+        <p:txBody>
+          <a:bodyPr/>
+          <a:lstStyle/>
+          <a:p>
+            <a:endParaRPr lang="es-CL"/>
+          </a:p>
+        </p:txBody>
+      </p:sp>
+      <p:sp>
+        <p:nvSpPr>
+          <p:cNvPr id="5" name="Text 2"/>
+          <p:cNvSpPr/>
+          <p:nvPr/>
+        </p:nvSpPr>
+        <p:spPr>
+          <a:xfrm>
+            <a:off x="214313" y="285750"/>
+            <a:ext cx="806888" cy="729880"/>
+          </a:xfrm>
+          <a:prstGeom prst="rect">
+            <a:avLst/>
+          </a:prstGeom>
+          <a:noFill/>
+          <a:ln/>
+        </p:spPr>
+        <p:txBody>
+          <a:bodyPr wrap="none" lIns="0" tIns="0" rIns="0" bIns="0" rtlCol="0" anchor="t">
+            <a:spAutoFit/>
+          </a:bodyPr>
+          <a:lstStyle/>
+          <a:p>
+            <a:pPr marL="0" indent="0" algn="l">
+              <a:lnSpc>
+                <a:spcPts val="5400"/>
+              </a:lnSpc>
+              <a:buNone/>
+            </a:pPr>
+            <a:r>
+              <a:rPr lang="en-US" sz="6218" b="1" kern="0" spc="-4">
+                <a:solidFill>
+                  <a:schemeClr val="accent2">
+                    <a:lumMod val="75000"/>
+                  </a:schemeClr>
+                </a:solidFill>
+              </a:rPr>
+              <a:t>10</a:t>
+            </a:r>
+            <a:endParaRPr lang="en-US" sz="6218" b="1" kern="0" spc="-4" dirty="0">
+              <a:solidFill>
+                <a:schemeClr val="accent2">
+                  <a:lumMod val="75000"/>
+                </a:schemeClr>
+              </a:solidFill>
+            </a:endParaRPr>
+          </a:p>
+        </p:txBody>
+      </p:sp>
+      <p:sp>
+        <p:nvSpPr>
+          <p:cNvPr id="6" name="Text 3"/>
+          <p:cNvSpPr/>
+          <p:nvPr/>
+        </p:nvSpPr>
+        <p:spPr>
+          <a:xfrm>
+            <a:off x="214313" y="1057275"/>
+            <a:ext cx="671530" cy="147284"/>
+          </a:xfrm>
+          <a:prstGeom prst="rect">
+            <a:avLst/>
+          </a:prstGeom>
+          <a:noFill/>
+          <a:ln/>
+        </p:spPr>
+        <p:txBody>
+          <a:bodyPr wrap="none" lIns="0" tIns="0" rIns="0" bIns="0" rtlCol="0" anchor="t">
+            <a:spAutoFit/>
+          </a:bodyPr>
+          <a:lstStyle/>
+          <a:p>
+            <a:pPr marL="0" indent="0" algn="l">
+              <a:lnSpc>
+                <a:spcPts val="1200"/>
+              </a:lnSpc>
+              <a:buNone/>
+            </a:pPr>
+            <a:r>
+              <a:rPr lang="en-US" sz="942" kern="0" spc="2" dirty="0">
+                <a:solidFill>
+                  <a:schemeClr val="accent2">
+                    <a:lumMod val="75000"/>
+                  </a:schemeClr>
+                </a:solidFill>
+              </a:rPr>
+              <a:t>iOS Approach</a:t>
+            </a:r>
+            <a:endParaRPr lang="en-US" sz="942" dirty="0">
+              <a:solidFill>
+                <a:schemeClr val="accent2">
+                  <a:lumMod val="75000"/>
+                </a:schemeClr>
+              </a:solidFill>
+            </a:endParaRPr>
+          </a:p>
+        </p:txBody>
+      </p:sp>
+      <p:sp>
+        <p:nvSpPr>
+          <p:cNvPr id="7" name="Text 4"/>
+          <p:cNvSpPr/>
+          <p:nvPr/>
+        </p:nvSpPr>
+        <p:spPr>
+          <a:xfrm>
+            <a:off x="2428875" y="285750"/>
+            <a:ext cx="6286500" cy="440038"/>
+          </a:xfrm>
+          <a:prstGeom prst="rect">
+            <a:avLst/>
+          </a:prstGeom>
+          <a:noFill/>
+          <a:ln/>
+        </p:spPr>
+        <p:txBody>
+          <a:bodyPr wrap="none" lIns="0" tIns="0" rIns="0" bIns="0" rtlCol="0" anchor="t">
+            <a:spAutoFit/>
+          </a:bodyPr>
+          <a:lstStyle/>
+          <a:p>
+            <a:pPr marL="0" indent="0" algn="l">
+              <a:lnSpc>
+                <a:spcPts val="3500"/>
+              </a:lnSpc>
+              <a:buNone/>
+            </a:pPr>
+            <a:r>
+              <a:rPr lang="en-US" sz="2862" b="1" kern="0" spc="-1" dirty="0">
+                <a:solidFill>
+                  <a:srgbClr val="111111"/>
+                </a:solidFill>
+              </a:rPr>
+              <a:t>iOS: Enfoque Recomendado</a:t>
+            </a:r>
+            <a:endParaRPr lang="en-US" sz="2862" dirty="0"/>
+          </a:p>
+        </p:txBody>
+      </p:sp>
+      <p:sp>
+        <p:nvSpPr>
+          <p:cNvPr id="8" name="Text 5"/>
+          <p:cNvSpPr/>
+          <p:nvPr/>
+        </p:nvSpPr>
+        <p:spPr>
+          <a:xfrm>
+            <a:off x="2428875" y="797226"/>
+            <a:ext cx="6286500" cy="233958"/>
+          </a:xfrm>
+          <a:prstGeom prst="rect">
+            <a:avLst/>
+          </a:prstGeom>
+          <a:noFill/>
+          <a:ln/>
+        </p:spPr>
+        <p:txBody>
+          <a:bodyPr wrap="none" lIns="0" tIns="0" rIns="0" bIns="0" rtlCol="0" anchor="t">
+            <a:spAutoFit/>
+          </a:bodyPr>
+          <a:lstStyle/>
+          <a:p>
+            <a:pPr marL="0" indent="0" algn="l">
+              <a:lnSpc>
+                <a:spcPts val="1600"/>
+              </a:lnSpc>
+              <a:buNone/>
+            </a:pPr>
+            <a:r>
+              <a:rPr lang="en-US" sz="1193" b="1" dirty="0">
+                <a:solidFill>
+                  <a:srgbClr val="0044CC"/>
+                </a:solidFill>
+              </a:rPr>
+              <a:t>Validación Explícita en URLSession</a:t>
+            </a:r>
+            <a:endParaRPr lang="en-US" sz="1193" dirty="0"/>
+          </a:p>
+        </p:txBody>
+      </p:sp>
+      <p:sp>
+        <p:nvSpPr>
+          <p:cNvPr id="10" name="Text 7"/>
+          <p:cNvSpPr/>
+          <p:nvPr/>
+        </p:nvSpPr>
+        <p:spPr>
+          <a:xfrm>
+            <a:off x="2786063" y="1202634"/>
+            <a:ext cx="3311826" cy="194667"/>
+          </a:xfrm>
+          <a:prstGeom prst="rect">
+            <a:avLst/>
+          </a:prstGeom>
+          <a:noFill/>
+          <a:ln/>
+        </p:spPr>
+        <p:txBody>
+          <a:bodyPr wrap="none" lIns="0" tIns="0" rIns="0" bIns="0" rtlCol="0" anchor="t">
+            <a:spAutoFit/>
+          </a:bodyPr>
+          <a:lstStyle/>
+          <a:p>
+            <a:pPr marL="0" indent="0" algn="l">
+              <a:lnSpc>
+                <a:spcPts val="1400"/>
+              </a:lnSpc>
+              <a:buNone/>
+            </a:pPr>
+            <a:r>
+              <a:rPr lang="en-US" sz="987" b="1" dirty="0">
+                <a:solidFill>
+                  <a:srgbClr val="111111"/>
+                </a:solidFill>
+              </a:rPr>
+              <a:t>Interceptar Desafío</a:t>
+            </a:r>
+            <a:endParaRPr lang="en-US" sz="987" dirty="0"/>
+          </a:p>
+        </p:txBody>
+      </p:sp>
+      <p:sp>
+        <p:nvSpPr>
+          <p:cNvPr id="11" name="Text 8"/>
+          <p:cNvSpPr/>
+          <p:nvPr/>
+        </p:nvSpPr>
+        <p:spPr>
+          <a:xfrm>
+            <a:off x="2786063" y="1433020"/>
+            <a:ext cx="3311826" cy="320018"/>
+          </a:xfrm>
+          <a:prstGeom prst="rect">
+            <a:avLst/>
+          </a:prstGeom>
+          <a:noFill/>
+          <a:ln/>
+        </p:spPr>
+        <p:txBody>
+          <a:bodyPr wrap="square" lIns="0" tIns="0" rIns="0" bIns="0" rtlCol="0" anchor="t">
+            <a:spAutoFit/>
+          </a:bodyPr>
+          <a:lstStyle/>
+          <a:p>
+            <a:pPr marL="0" indent="0" algn="l">
+              <a:lnSpc>
+                <a:spcPts val="1300"/>
+              </a:lnSpc>
+              <a:buNone/>
+            </a:pPr>
+            <a:r>
+              <a:rPr lang="en-US" sz="834" dirty="0">
+                <a:solidFill>
+                  <a:srgbClr val="333333"/>
+                </a:solidFill>
+              </a:rPr>
+              <a:t>Implementar URLSessionDelegate para capturar el desafío de autenticación del servidor.</a:t>
+            </a:r>
+            <a:endParaRPr lang="en-US" sz="834" dirty="0"/>
+          </a:p>
+        </p:txBody>
+      </p:sp>
+      <p:sp>
+        <p:nvSpPr>
+          <p:cNvPr id="13" name="Text 10"/>
+          <p:cNvSpPr/>
+          <p:nvPr/>
+        </p:nvSpPr>
+        <p:spPr>
+          <a:xfrm>
+            <a:off x="2786063" y="1838762"/>
+            <a:ext cx="3311826" cy="194667"/>
+          </a:xfrm>
+          <a:prstGeom prst="rect">
+            <a:avLst/>
+          </a:prstGeom>
+          <a:noFill/>
+          <a:ln/>
+        </p:spPr>
+        <p:txBody>
+          <a:bodyPr wrap="none" lIns="0" tIns="0" rIns="0" bIns="0" rtlCol="0" anchor="t">
+            <a:spAutoFit/>
+          </a:bodyPr>
+          <a:lstStyle/>
+          <a:p>
+            <a:pPr marL="0" indent="0" algn="l">
+              <a:lnSpc>
+                <a:spcPts val="1400"/>
+              </a:lnSpc>
+              <a:buNone/>
+            </a:pPr>
+            <a:r>
+              <a:rPr lang="en-US" sz="987" b="1" dirty="0">
+                <a:solidFill>
+                  <a:srgbClr val="111111"/>
+                </a:solidFill>
+              </a:rPr>
+              <a:t>Evaluar Trust Estándar</a:t>
+            </a:r>
+            <a:endParaRPr lang="en-US" sz="987" dirty="0"/>
+          </a:p>
+        </p:txBody>
+      </p:sp>
+      <p:sp>
+        <p:nvSpPr>
+          <p:cNvPr id="14" name="Text 11"/>
+          <p:cNvSpPr/>
+          <p:nvPr/>
+        </p:nvSpPr>
+        <p:spPr>
+          <a:xfrm>
+            <a:off x="2786063" y="2069148"/>
+            <a:ext cx="3311826" cy="320018"/>
+          </a:xfrm>
+          <a:prstGeom prst="rect">
+            <a:avLst/>
+          </a:prstGeom>
+          <a:noFill/>
+          <a:ln/>
+        </p:spPr>
+        <p:txBody>
+          <a:bodyPr wrap="square" lIns="0" tIns="0" rIns="0" bIns="0" rtlCol="0" anchor="t">
+            <a:spAutoFit/>
+          </a:bodyPr>
+          <a:lstStyle/>
+          <a:p>
+            <a:pPr marL="0" indent="0" algn="l">
+              <a:lnSpc>
+                <a:spcPts val="1300"/>
+              </a:lnSpc>
+              <a:buNone/>
+            </a:pPr>
+            <a:r>
+              <a:rPr lang="en-US" sz="834" dirty="0">
+                <a:solidFill>
+                  <a:srgbClr val="333333"/>
+                </a:solidFill>
+              </a:rPr>
+              <a:t>Validar la cadena de certificados normalmente usando las APIs del sistema. No inventar un trust alternativo.</a:t>
+            </a:r>
+            <a:endParaRPr lang="en-US" sz="834" dirty="0"/>
+          </a:p>
+        </p:txBody>
+      </p:sp>
+      <p:sp>
+        <p:nvSpPr>
+          <p:cNvPr id="16" name="Text 13"/>
+          <p:cNvSpPr/>
+          <p:nvPr/>
+        </p:nvSpPr>
+        <p:spPr>
+          <a:xfrm>
+            <a:off x="2786063" y="2474891"/>
+            <a:ext cx="3311826" cy="194667"/>
+          </a:xfrm>
+          <a:prstGeom prst="rect">
+            <a:avLst/>
+          </a:prstGeom>
+          <a:noFill/>
+          <a:ln/>
+        </p:spPr>
+        <p:txBody>
+          <a:bodyPr wrap="none" lIns="0" tIns="0" rIns="0" bIns="0" rtlCol="0" anchor="t">
+            <a:spAutoFit/>
+          </a:bodyPr>
+          <a:lstStyle/>
+          <a:p>
+            <a:pPr marL="0" indent="0" algn="l">
+              <a:lnSpc>
+                <a:spcPts val="1400"/>
+              </a:lnSpc>
+              <a:buNone/>
+            </a:pPr>
+            <a:r>
+              <a:rPr lang="en-US" sz="987" b="1" dirty="0">
+                <a:solidFill>
+                  <a:srgbClr val="111111"/>
+                </a:solidFill>
+              </a:rPr>
+              <a:t>Extraer Public Key</a:t>
+            </a:r>
+            <a:endParaRPr lang="en-US" sz="987" dirty="0"/>
+          </a:p>
+        </p:txBody>
+      </p:sp>
+      <p:sp>
+        <p:nvSpPr>
+          <p:cNvPr id="17" name="Text 14"/>
+          <p:cNvSpPr/>
+          <p:nvPr/>
+        </p:nvSpPr>
+        <p:spPr>
+          <a:xfrm>
+            <a:off x="2786063" y="2705277"/>
+            <a:ext cx="3311826" cy="320018"/>
+          </a:xfrm>
+          <a:prstGeom prst="rect">
+            <a:avLst/>
+          </a:prstGeom>
+          <a:noFill/>
+          <a:ln/>
+        </p:spPr>
+        <p:txBody>
+          <a:bodyPr wrap="square" lIns="0" tIns="0" rIns="0" bIns="0" rtlCol="0" anchor="t">
+            <a:spAutoFit/>
+          </a:bodyPr>
+          <a:lstStyle/>
+          <a:p>
+            <a:pPr marL="0" indent="0" algn="l">
+              <a:lnSpc>
+                <a:spcPts val="1300"/>
+              </a:lnSpc>
+              <a:buNone/>
+            </a:pPr>
+            <a:r>
+              <a:rPr lang="en-US" sz="834" dirty="0">
+                <a:solidFill>
+                  <a:srgbClr val="333333"/>
+                </a:solidFill>
+              </a:rPr>
+              <a:t>Obtener la clave pública del certificado leaf (o intermedio si aplica).</a:t>
+            </a:r>
+            <a:endParaRPr lang="en-US" sz="834" dirty="0"/>
+          </a:p>
+        </p:txBody>
+      </p:sp>
+      <p:sp>
+        <p:nvSpPr>
+          <p:cNvPr id="19" name="Text 16"/>
+          <p:cNvSpPr/>
+          <p:nvPr/>
+        </p:nvSpPr>
+        <p:spPr>
+          <a:xfrm>
+            <a:off x="2786063" y="3111019"/>
+            <a:ext cx="3311826" cy="194667"/>
+          </a:xfrm>
+          <a:prstGeom prst="rect">
+            <a:avLst/>
+          </a:prstGeom>
+          <a:noFill/>
+          <a:ln/>
+        </p:spPr>
+        <p:txBody>
+          <a:bodyPr wrap="none" lIns="0" tIns="0" rIns="0" bIns="0" rtlCol="0" anchor="t">
+            <a:spAutoFit/>
+          </a:bodyPr>
+          <a:lstStyle/>
+          <a:p>
+            <a:pPr marL="0" indent="0" algn="l">
+              <a:lnSpc>
+                <a:spcPts val="1400"/>
+              </a:lnSpc>
+              <a:buNone/>
+            </a:pPr>
+            <a:r>
+              <a:rPr lang="en-US" sz="987" b="1" dirty="0">
+                <a:solidFill>
+                  <a:srgbClr val="111111"/>
+                </a:solidFill>
+              </a:rPr>
+              <a:t>Comparar SPKI Hash</a:t>
+            </a:r>
+            <a:endParaRPr lang="en-US" sz="987" dirty="0"/>
+          </a:p>
+        </p:txBody>
+      </p:sp>
+      <p:sp>
+        <p:nvSpPr>
+          <p:cNvPr id="20" name="Text 17"/>
+          <p:cNvSpPr/>
+          <p:nvPr/>
+        </p:nvSpPr>
+        <p:spPr>
+          <a:xfrm>
+            <a:off x="2786063" y="3341405"/>
+            <a:ext cx="3311826" cy="320018"/>
+          </a:xfrm>
+          <a:prstGeom prst="rect">
+            <a:avLst/>
+          </a:prstGeom>
+          <a:noFill/>
+          <a:ln/>
+        </p:spPr>
+        <p:txBody>
+          <a:bodyPr wrap="square" lIns="0" tIns="0" rIns="0" bIns="0" rtlCol="0" anchor="t">
+            <a:spAutoFit/>
+          </a:bodyPr>
+          <a:lstStyle/>
+          <a:p>
+            <a:pPr marL="0" indent="0" algn="l">
+              <a:lnSpc>
+                <a:spcPts val="1300"/>
+              </a:lnSpc>
+              <a:buNone/>
+            </a:pPr>
+            <a:r>
+              <a:rPr lang="en-US" sz="834" dirty="0">
+                <a:solidFill>
+                  <a:srgbClr val="333333"/>
+                </a:solidFill>
+              </a:rPr>
+              <a:t>Calcular SHA-256 de la clave pública y comparar contra los pins permitidos (A y B).</a:t>
+            </a:r>
+            <a:endParaRPr lang="en-US" sz="834" dirty="0"/>
+          </a:p>
+        </p:txBody>
+      </p:sp>
+      <p:sp>
+        <p:nvSpPr>
+          <p:cNvPr id="22" name="Text 19"/>
+          <p:cNvSpPr/>
+          <p:nvPr/>
+        </p:nvSpPr>
+        <p:spPr>
+          <a:xfrm>
+            <a:off x="2786063" y="3747148"/>
+            <a:ext cx="3311826" cy="194667"/>
+          </a:xfrm>
+          <a:prstGeom prst="rect">
+            <a:avLst/>
+          </a:prstGeom>
+          <a:noFill/>
+          <a:ln/>
+        </p:spPr>
+        <p:txBody>
+          <a:bodyPr wrap="none" lIns="0" tIns="0" rIns="0" bIns="0" rtlCol="0" anchor="t">
+            <a:spAutoFit/>
+          </a:bodyPr>
+          <a:lstStyle/>
+          <a:p>
+            <a:pPr marL="0" indent="0" algn="l">
+              <a:lnSpc>
+                <a:spcPts val="1400"/>
+              </a:lnSpc>
+              <a:buNone/>
+            </a:pPr>
+            <a:r>
+              <a:rPr lang="en-US" sz="987" b="1" dirty="0">
+                <a:solidFill>
+                  <a:srgbClr val="111111"/>
+                </a:solidFill>
+              </a:rPr>
+              <a:t>Decisión Final</a:t>
+            </a:r>
+            <a:endParaRPr lang="en-US" sz="987" dirty="0"/>
+          </a:p>
+        </p:txBody>
+      </p:sp>
+      <p:sp>
+        <p:nvSpPr>
+          <p:cNvPr id="23" name="Text 20"/>
+          <p:cNvSpPr/>
+          <p:nvPr/>
+        </p:nvSpPr>
+        <p:spPr>
+          <a:xfrm>
+            <a:off x="2786063" y="3977534"/>
+            <a:ext cx="3311826" cy="320018"/>
+          </a:xfrm>
+          <a:prstGeom prst="rect">
+            <a:avLst/>
+          </a:prstGeom>
+          <a:noFill/>
+          <a:ln/>
+        </p:spPr>
+        <p:txBody>
+          <a:bodyPr wrap="square" lIns="0" tIns="0" rIns="0" bIns="0" rtlCol="0" anchor="t">
+            <a:spAutoFit/>
+          </a:bodyPr>
+          <a:lstStyle/>
+          <a:p>
+            <a:pPr marL="0" indent="0" algn="l">
+              <a:lnSpc>
+                <a:spcPts val="1300"/>
+              </a:lnSpc>
+              <a:buNone/>
+            </a:pPr>
+            <a:r>
+              <a:rPr lang="en-US" sz="834" dirty="0">
+                <a:solidFill>
+                  <a:srgbClr val="333333"/>
+                </a:solidFill>
+              </a:rPr>
+              <a:t>Rechazar explícitamente la conexión si no hay coincidencia de pin.</a:t>
+            </a:r>
+            <a:endParaRPr lang="en-US" sz="834" dirty="0"/>
+          </a:p>
+        </p:txBody>
+      </p:sp>
+      <p:sp>
+        <p:nvSpPr>
+          <p:cNvPr id="24" name="Shape 21"/>
+          <p:cNvSpPr/>
+          <p:nvPr/>
+        </p:nvSpPr>
+        <p:spPr>
+          <a:xfrm>
+            <a:off x="6269338" y="1202633"/>
+            <a:ext cx="2446037" cy="1019019"/>
+          </a:xfrm>
+          <a:prstGeom prst="rect">
+            <a:avLst/>
+          </a:prstGeom>
+          <a:solidFill>
+            <a:srgbClr val="111111"/>
+          </a:solidFill>
+          <a:ln/>
+        </p:spPr>
+        <p:txBody>
+          <a:bodyPr/>
+          <a:lstStyle/>
+          <a:p>
+            <a:endParaRPr lang="es-CL"/>
+          </a:p>
+        </p:txBody>
+      </p:sp>
+      <p:sp>
+        <p:nvSpPr>
+          <p:cNvPr id="25" name="Shape 22"/>
+          <p:cNvSpPr/>
+          <p:nvPr/>
+        </p:nvSpPr>
+        <p:spPr>
+          <a:xfrm>
+            <a:off x="6269338" y="1202634"/>
+            <a:ext cx="42863" cy="787598"/>
+          </a:xfrm>
+          <a:prstGeom prst="rect">
+            <a:avLst/>
+          </a:prstGeom>
+          <a:solidFill>
+            <a:srgbClr val="0044CC"/>
+          </a:solidFill>
+          <a:ln/>
+        </p:spPr>
+        <p:txBody>
+          <a:bodyPr/>
+          <a:lstStyle/>
+          <a:p>
+            <a:endParaRPr lang="es-CL"/>
+          </a:p>
+        </p:txBody>
+      </p:sp>
+      <p:sp>
+        <p:nvSpPr>
+          <p:cNvPr id="26" name="Text 23"/>
+          <p:cNvSpPr/>
+          <p:nvPr/>
+        </p:nvSpPr>
+        <p:spPr>
+          <a:xfrm>
+            <a:off x="6397926" y="1331221"/>
+            <a:ext cx="1049967" cy="104067"/>
+          </a:xfrm>
+          <a:prstGeom prst="rect">
+            <a:avLst/>
+          </a:prstGeom>
+          <a:noFill/>
+          <a:ln/>
+        </p:spPr>
+        <p:txBody>
+          <a:bodyPr wrap="none" lIns="0" tIns="0" rIns="0" bIns="0" rtlCol="0" anchor="t">
+            <a:spAutoFit/>
+          </a:bodyPr>
+          <a:lstStyle/>
+          <a:p>
+            <a:pPr marL="0" indent="0" algn="l">
+              <a:lnSpc>
+                <a:spcPts val="800"/>
+              </a:lnSpc>
+              <a:buNone/>
+            </a:pPr>
+            <a:r>
+              <a:rPr lang="en-US" sz="800" dirty="0">
+                <a:solidFill>
+                  <a:schemeClr val="accent4">
+                    <a:lumMod val="20000"/>
+                    <a:lumOff val="80000"/>
+                  </a:schemeClr>
+                </a:solidFill>
+              </a:rPr>
+              <a:t>API Recomendada (2026)</a:t>
+            </a:r>
+          </a:p>
+        </p:txBody>
+      </p:sp>
+      <p:sp>
+        <p:nvSpPr>
+          <p:cNvPr id="27" name="Text 24"/>
+          <p:cNvSpPr/>
+          <p:nvPr/>
+        </p:nvSpPr>
+        <p:spPr>
+          <a:xfrm>
+            <a:off x="6397926" y="1518745"/>
+            <a:ext cx="2188862" cy="155377"/>
+          </a:xfrm>
+          <a:prstGeom prst="rect">
+            <a:avLst/>
+          </a:prstGeom>
+          <a:noFill/>
+          <a:ln/>
+        </p:spPr>
+        <p:txBody>
+          <a:bodyPr wrap="none" lIns="0" tIns="0" rIns="0" bIns="0" rtlCol="0" anchor="t">
+            <a:spAutoFit/>
+          </a:bodyPr>
+          <a:lstStyle/>
+          <a:p>
+            <a:pPr marL="0" indent="0" algn="l">
+              <a:lnSpc>
+                <a:spcPts val="1100"/>
+              </a:lnSpc>
+              <a:buNone/>
+            </a:pPr>
+            <a:r>
+              <a:rPr lang="en-US" sz="834" dirty="0">
+                <a:solidFill>
+                  <a:srgbClr val="00FF00"/>
+                </a:solidFill>
+              </a:rPr>
+              <a:t>SecTrustEvaluateWithError</a:t>
+            </a:r>
+            <a:endParaRPr lang="en-US" sz="834" dirty="0"/>
+          </a:p>
+        </p:txBody>
+      </p:sp>
+      <p:sp>
+        <p:nvSpPr>
+          <p:cNvPr id="28" name="Text 25"/>
+          <p:cNvSpPr/>
+          <p:nvPr/>
+        </p:nvSpPr>
+        <p:spPr>
+          <a:xfrm>
+            <a:off x="6397926" y="1745559"/>
+            <a:ext cx="1809791" cy="104067"/>
+          </a:xfrm>
+          <a:prstGeom prst="rect">
+            <a:avLst/>
+          </a:prstGeom>
+          <a:noFill/>
+          <a:ln/>
+        </p:spPr>
+        <p:txBody>
+          <a:bodyPr wrap="none" lIns="0" tIns="0" rIns="0" bIns="0" rtlCol="0" anchor="t">
+            <a:spAutoFit/>
+          </a:bodyPr>
+          <a:lstStyle/>
+          <a:p>
+            <a:pPr marL="0" indent="0" algn="l">
+              <a:lnSpc>
+                <a:spcPts val="800"/>
+              </a:lnSpc>
+              <a:buNone/>
+            </a:pPr>
+            <a:r>
+              <a:rPr lang="en-US" sz="621" dirty="0">
+                <a:solidFill>
+                  <a:srgbClr val="888888"/>
+                </a:solidFill>
+              </a:rPr>
+              <a:t>(</a:t>
+            </a:r>
+            <a:r>
+              <a:rPr lang="en-US" sz="800" dirty="0">
+                <a:solidFill>
+                  <a:schemeClr val="accent4">
+                    <a:lumMod val="20000"/>
+                    <a:lumOff val="80000"/>
+                  </a:schemeClr>
+                </a:solidFill>
+              </a:rPr>
+              <a:t>Reemplaza al deprecado SecTrustEvaluate</a:t>
+            </a:r>
+            <a:r>
+              <a:rPr lang="en-US" sz="621" dirty="0">
+                <a:solidFill>
+                  <a:srgbClr val="888888"/>
+                </a:solidFill>
+              </a:rPr>
+              <a:t>)</a:t>
+            </a:r>
+            <a:endParaRPr lang="en-US" sz="621" dirty="0"/>
+          </a:p>
+        </p:txBody>
+      </p:sp>
+      <p:sp>
+        <p:nvSpPr>
+          <p:cNvPr id="29" name="Shape 26"/>
+          <p:cNvSpPr/>
+          <p:nvPr/>
+        </p:nvSpPr>
+        <p:spPr>
+          <a:xfrm>
+            <a:off x="6269338" y="3124972"/>
+            <a:ext cx="2446037" cy="1163315"/>
+          </a:xfrm>
+          <a:prstGeom prst="rect">
+            <a:avLst/>
+          </a:prstGeom>
+          <a:solidFill>
+            <a:srgbClr val="FFFFFF"/>
+          </a:solidFill>
+          <a:ln w="27432">
+            <a:solidFill>
+              <a:srgbClr val="FF3300"/>
+            </a:solidFill>
+            <a:prstDash val="solid"/>
+          </a:ln>
+        </p:spPr>
+        <p:txBody>
+          <a:bodyPr/>
+          <a:lstStyle/>
+          <a:p>
+            <a:endParaRPr lang="es-CL"/>
+          </a:p>
+        </p:txBody>
+      </p:sp>
+      <p:pic>
+        <p:nvPicPr>
+          <p:cNvPr id="30" name="Image 1" descr="preencoded.png"/>
+          <p:cNvPicPr>
+            <a:picLocks noChangeAspect="1"/>
+          </p:cNvPicPr>
+          <p:nvPr/>
+        </p:nvPicPr>
+        <p:blipFill>
+          <a:blip r:embed="rId4"/>
+          <a:stretch>
+            <a:fillRect/>
+          </a:stretch>
+        </p:blipFill>
+        <p:spPr>
+          <a:xfrm>
+            <a:off x="6407752" y="3234248"/>
+            <a:ext cx="142875" cy="142875"/>
+          </a:xfrm>
+          <a:prstGeom prst="rect">
+            <a:avLst/>
+          </a:prstGeom>
+        </p:spPr>
+      </p:pic>
+      <p:sp>
+        <p:nvSpPr>
+          <p:cNvPr id="31" name="Text 27"/>
+          <p:cNvSpPr/>
+          <p:nvPr/>
+        </p:nvSpPr>
+        <p:spPr>
+          <a:xfrm>
+            <a:off x="6752997" y="3208352"/>
+            <a:ext cx="1125727" cy="194667"/>
+          </a:xfrm>
+          <a:prstGeom prst="rect">
+            <a:avLst/>
+          </a:prstGeom>
+          <a:noFill/>
+          <a:ln/>
+        </p:spPr>
+        <p:txBody>
+          <a:bodyPr wrap="none" lIns="0" tIns="0" rIns="0" bIns="0" rtlCol="0" anchor="t">
+            <a:spAutoFit/>
+          </a:bodyPr>
+          <a:lstStyle/>
+          <a:p>
+            <a:pPr marL="0" indent="0" algn="l">
+              <a:lnSpc>
+                <a:spcPts val="1400"/>
+              </a:lnSpc>
+              <a:buNone/>
+            </a:pPr>
+            <a:r>
+              <a:rPr lang="en-US" sz="987" b="1" dirty="0">
+                <a:solidFill>
+                  <a:srgbClr val="FF3300"/>
+                </a:solidFill>
+              </a:rPr>
+              <a:t>Punto Crítico</a:t>
+            </a:r>
+            <a:endParaRPr lang="en-US" sz="987" dirty="0"/>
+          </a:p>
+        </p:txBody>
+      </p:sp>
+      <p:sp>
+        <p:nvSpPr>
+          <p:cNvPr id="32" name="Text 28"/>
+          <p:cNvSpPr/>
+          <p:nvPr/>
+        </p:nvSpPr>
+        <p:spPr>
+          <a:xfrm>
+            <a:off x="6369351" y="3514484"/>
+            <a:ext cx="2246012" cy="640035"/>
+          </a:xfrm>
+          <a:prstGeom prst="rect">
+            <a:avLst/>
+          </a:prstGeom>
+          <a:noFill/>
+          <a:ln/>
+        </p:spPr>
+        <p:txBody>
+          <a:bodyPr wrap="square" lIns="0" tIns="0" rIns="0" bIns="0" rtlCol="0" anchor="t">
+            <a:spAutoFit/>
+          </a:bodyPr>
+          <a:lstStyle/>
+          <a:p>
+            <a:pPr marL="0" indent="0" algn="l">
+              <a:lnSpc>
+                <a:spcPts val="1300"/>
+              </a:lnSpc>
+              <a:buNone/>
+            </a:pPr>
+            <a:r>
+              <a:rPr lang="en-US" sz="834" dirty="0">
+                <a:solidFill>
+                  <a:srgbClr val="111111"/>
+                </a:solidFill>
+              </a:rPr>
+              <a:t>No saltarse la validación de trust de Apple. El Pinning es una capa </a:t>
+            </a:r>
+            <a:r>
+              <a:rPr lang="en-US" sz="784" b="1" dirty="0">
+                <a:solidFill>
+                  <a:srgbClr val="111111"/>
+                </a:solidFill>
+              </a:rPr>
+              <a:t>adicional</a:t>
+            </a:r>
+            <a:r>
+              <a:rPr lang="en-US" sz="834" dirty="0">
+                <a:solidFill>
+                  <a:srgbClr val="111111"/>
+                </a:solidFill>
+              </a:rPr>
+              <a:t>, no un reemplazo de la validación CA estándar.</a:t>
+            </a:r>
+            <a:endParaRPr lang="en-US" sz="834" dirty="0"/>
+          </a:p>
+        </p:txBody>
+      </p:sp>
+    </p:spTree>
+  </p:cSld>
+  <p:clrMapOvr>
+    <a:masterClrMapping/>
+  </p:clrMapOvr>
+</p:sld>
+</file>
+
+<file path=ppt/slides/slide12.xml><?xml version="1.0" encoding="utf-8"?>
 <p:sld xmlns:a="http://schemas.openxmlformats.org/drawingml/2006/main" xmlns:r="http://schemas.openxmlformats.org/officeDocument/2006/relationships" xmlns:p="http://schemas.openxmlformats.org/presentationml/2006/main">
   <p:cSld name="Slide 10">
     <p:spTree>
@@ -2657,7 +4396,7 @@
         <p:spPr>
           <a:xfrm>
             <a:off x="142875" y="285750"/>
-            <a:ext cx="1714500" cy="685800"/>
+            <a:ext cx="806888" cy="729880"/>
           </a:xfrm>
           <a:prstGeom prst="rect">
             <a:avLst/>
@@ -2678,14 +4417,22 @@
               <a:buNone/>
             </a:pPr>
             <a:r>
-              <a:rPr lang="en-US" sz="6218" b="1" kern="0" spc="-4" dirty="0">
-                <a:solidFill>
-                  <a:srgbClr val="F5F5F5"/>
-                </a:solidFill>
-              </a:rPr>
-              <a:t>10</a:t>
-            </a:r>
-            <a:endParaRPr lang="en-US" sz="6218" dirty="0"/>
+              <a:rPr lang="en-US" sz="6218" b="1" kern="0" spc="-4">
+                <a:solidFill>
+                  <a:schemeClr val="accent2">
+                    <a:lumMod val="75000"/>
+                  </a:schemeClr>
+                </a:solidFill>
+              </a:rPr>
+              <a:t>11</a:t>
+            </a:r>
+            <a:endParaRPr lang="en-US" sz="6218" b="1" kern="0" spc="-4" dirty="0">
+              <a:solidFill>
+                <a:schemeClr val="accent2">
+                  <a:lumMod val="75000"/>
+                </a:schemeClr>
+              </a:solidFill>
+            </a:endParaRPr>
           </a:p>
         </p:txBody>
       </p:sp>
@@ -3343,7 +5090,7 @@
         <p:spPr>
           <a:xfrm>
             <a:off x="5779294" y="2768175"/>
-            <a:ext cx="2978944" cy="180017"/>
+            <a:ext cx="1558119" cy="166520"/>
           </a:xfrm>
           <a:prstGeom prst="rect">
             <a:avLst/>
@@ -3369,7 +5116,23 @@
                   <a:srgbClr val="111111"/>
                 </a:solidFill>
               </a:rPr>
-              <a:t>"¿Es ESTE el servidor correcto?"</a:t>
+              <a:t>"¿Es </a:t>
+            </a:r>
+            <a:r>
+              <a:rPr lang="en-US" sz="942" b="1" dirty="0">
+                <a:solidFill>
+                  <a:srgbClr val="111111"/>
+                </a:solidFill>
+              </a:rPr>
+              <a:t>ESTE</a:t>
+            </a:r>
+            <a:r>
+              <a:rPr lang="en-US" sz="942" dirty="0">
+                <a:solidFill>
+                  <a:srgbClr val="111111"/>
+                </a:solidFill>
+              </a:rPr>
+              <a:t> el servidor correcto?"</a:t>
             </a:r>
             <a:endParaRPr lang="en-US" sz="942" dirty="0"/>
           </a:p>
@@ -3432,7 +5195,7 @@
         </p:nvSpPr>
         <p:spPr>
           <a:xfrm>
-            <a:off x="2286000" y="3809014"/>
+            <a:off x="2271713" y="3809014"/>
             <a:ext cx="6572250" cy="735806"/>
           </a:xfrm>
           <a:prstGeom prst="rect">
@@ -3487,7 +5250,7 @@
         <p:spPr>
           <a:xfrm>
             <a:off x="2371725" y="3894739"/>
-            <a:ext cx="6400800" cy="135731"/>
+            <a:ext cx="1681551" cy="120418"/>
           </a:xfrm>
           <a:prstGeom prst="rect">
             <a:avLst/>
@@ -3508,14 +5271,14 @@
               <a:buNone/>
             </a:pPr>
             <a:r>
-              <a:rPr lang="en-US" sz="683" b="1" dirty="0">
+              <a:rPr lang="en-US" sz="1000" b="1" dirty="0">
                 <a:solidFill>
                   <a:srgbClr val="0044CC"/>
                 </a:solidFill>
               </a:rPr>
               <a:t>Arquitectura Bancaria Moderna</a:t>
             </a:r>
-            <a:endParaRPr lang="en-US" sz="683" dirty="0"/>
+            <a:endParaRPr lang="en-US" sz="1000" dirty="0"/>
           </a:p>
         </p:txBody>
       </p:sp>
@@ -3528,7 +5291,7 @@
         <p:spPr>
           <a:xfrm>
             <a:off x="2371725" y="4087620"/>
-            <a:ext cx="6400800" cy="371475"/>
+            <a:ext cx="6400800" cy="373885"/>
           </a:xfrm>
           <a:prstGeom prst="rect">
             <a:avLst/>
@@ -3549,14 +5312,22 @@
               <a:buNone/>
             </a:pPr>
             <a:r>
-              <a:rPr lang="en-US" sz="987" b="1" dirty="0">
-                <a:solidFill>
-                  <a:srgbClr val="111111"/>
+              <a:rPr lang="en-US" sz="1100" b="1" dirty="0">
+                <a:solidFill>
+                  <a:schemeClr val="accent2">
+                    <a:lumMod val="75000"/>
+                  </a:schemeClr>
                 </a:solidFill>
               </a:rPr>
               <a:t>Combinar ambos eleva el costo del ataque: Pinning en la App Móvil + mTLS entre Backend y Servicios Internos.</a:t>
             </a:r>
-            <a:endParaRPr lang="en-US" sz="987" dirty="0"/>
+            <a:endParaRPr lang="en-US" sz="1100" dirty="0">
+              <a:solidFill>
+                <a:schemeClr val="accent2">
+                  <a:lumMod val="75000"/>
+                </a:schemeClr>
+              </a:solidFill>
+            </a:endParaRPr>
           </a:p>
         </p:txBody>
       </p:sp>
@@ -3568,7 +5339,7 @@
 </p:sld>
 </file>
 
-<file path=ppt/slides/slide11.xml><?xml version="1.0" encoding="utf-8"?>
+<file path=ppt/slides/slide13.xml><?xml version="1.0" encoding="utf-8"?>
 <p:sld xmlns:a="http://schemas.openxmlformats.org/drawingml/2006/main" xmlns:r="http://schemas.openxmlformats.org/officeDocument/2006/relationships" xmlns:p="http://schemas.openxmlformats.org/presentationml/2006/main">
   <p:cSld name="Slide 11">
     <p:spTree>
@@ -3672,7 +5443,7 @@
         <p:spPr>
           <a:xfrm>
             <a:off x="171450" y="142875"/>
-            <a:ext cx="1657350" cy="685800"/>
+            <a:ext cx="806888" cy="729880"/>
           </a:xfrm>
           <a:prstGeom prst="rect">
             <a:avLst/>
@@ -3693,14 +5464,22 @@
               <a:buNone/>
             </a:pPr>
             <a:r>
-              <a:rPr lang="en-US" sz="6218" b="1" kern="0" spc="-4" dirty="0">
-                <a:solidFill>
-                  <a:srgbClr val="F5F5F5"/>
-                </a:solidFill>
-              </a:rPr>
-              <a:t>11</a:t>
-            </a:r>
-            <a:endParaRPr lang="en-US" sz="6218" dirty="0"/>
+              <a:rPr lang="en-US" sz="6218" b="1" kern="0" spc="-4">
+                <a:solidFill>
+                  <a:schemeClr val="accent2">
+                    <a:lumMod val="75000"/>
+                  </a:schemeClr>
+                </a:solidFill>
+              </a:rPr>
+              <a:t>12</a:t>
+            </a:r>
+            <a:endParaRPr lang="en-US" sz="6218" b="1" kern="0" spc="-4" dirty="0">
+              <a:solidFill>
+                <a:schemeClr val="accent2">
+                  <a:lumMod val="75000"/>
+                </a:schemeClr>
+              </a:solidFill>
+            </a:endParaRPr>
           </a:p>
         </p:txBody>
       </p:sp>
@@ -3713,7 +5492,7 @@
         <p:spPr>
           <a:xfrm>
             <a:off x="171450" y="942975"/>
-            <a:ext cx="1657350" cy="175022"/>
+            <a:ext cx="868636" cy="147284"/>
           </a:xfrm>
           <a:prstGeom prst="rect">
             <a:avLst/>
@@ -3736,14 +5515,20 @@
             <a:r>
               <a:rPr lang="en-US" sz="942" kern="0" spc="2" dirty="0">
                 <a:solidFill>
-                  <a:srgbClr val="F5F5F5">
-                    <a:alpha val="80000"/>
-                  </a:srgbClr>
+                  <a:schemeClr val="accent2">
+                    <a:lumMod val="75000"/>
+                  </a:schemeClr>
                 </a:solidFill>
               </a:rPr>
               <a:t>Análisis de Riesgo</a:t>
             </a:r>
-            <a:endParaRPr lang="en-US" sz="942" dirty="0"/>
+            <a:endParaRPr lang="en-US" sz="942" dirty="0">
+              <a:solidFill>
+                <a:schemeClr val="accent2">
+                  <a:lumMod val="75000"/>
+                </a:schemeClr>
+              </a:solidFill>
+            </a:endParaRPr>
           </a:p>
         </p:txBody>
       </p:sp>
@@ -4491,7 +6276,7 @@
         <p:spPr>
           <a:xfrm>
             <a:off x="2214563" y="3969051"/>
-            <a:ext cx="6715125" cy="414338"/>
+            <a:ext cx="6715125" cy="407676"/>
           </a:xfrm>
           <a:prstGeom prst="rect">
             <a:avLst/>
@@ -4512,12 +6297,22 @@
               <a:buNone/>
             </a:pPr>
             <a:r>
+              <a:rPr lang="en-US" sz="1000" b="1" dirty="0">
+                <a:solidFill>
+                  <a:schemeClr val="accent2">
+                    <a:lumMod val="75000"/>
+                  </a:schemeClr>
+                </a:solidFill>
+              </a:rPr>
+              <a:t>&gt; CONCLUSIÓN: Pinning no es infalible, pero eleva masivamente el costo del ataque. Se debe complementar con Root Detection y Anti-Tampering</a:t>
+            </a:r>
+            <a:r>
               <a:rPr lang="en-US" sz="727" dirty="0">
                 <a:solidFill>
                   <a:srgbClr val="111111"/>
                 </a:solidFill>
               </a:rPr>
-              <a:t>&gt; CONCLUSIÓN: Pinning no es infalible, pero eleva masivamente el costo del ataque. Se debe complementar con Root Detection y Anti-Tampering.</a:t>
+              <a:t>.</a:t>
             </a:r>
             <a:endParaRPr lang="en-US" sz="727" dirty="0"/>
           </a:p>
@@ -4531,7 +6326,7 @@
 </p:sld>
 </file>
 
-<file path=ppt/slides/slide12.xml><?xml version="1.0" encoding="utf-8"?>
+<file path=ppt/slides/slide14.xml><?xml version="1.0" encoding="utf-8"?>
 <p:sld xmlns:a="http://schemas.openxmlformats.org/drawingml/2006/main" xmlns:r="http://schemas.openxmlformats.org/officeDocument/2006/relationships" xmlns:p="http://schemas.openxmlformats.org/presentationml/2006/main">
   <p:cSld name="Slide 12">
     <p:spTree>
@@ -4635,7 +6430,7 @@
         <p:spPr>
           <a:xfrm>
             <a:off x="214313" y="285750"/>
-            <a:ext cx="1571625" cy="685800"/>
+            <a:ext cx="806888" cy="729880"/>
           </a:xfrm>
           <a:prstGeom prst="rect">
             <a:avLst/>
@@ -4656,14 +6451,22 @@
               <a:buNone/>
             </a:pPr>
             <a:r>
-              <a:rPr lang="en-US" sz="6218" b="1" kern="0" spc="-4" dirty="0">
-                <a:solidFill>
-                  <a:srgbClr val="F5F5F5"/>
-                </a:solidFill>
-              </a:rPr>
-              <a:t>12</a:t>
-            </a:r>
-            <a:endParaRPr lang="en-US" sz="6218" dirty="0"/>
+              <a:rPr lang="en-US" sz="6218" b="1" kern="0" spc="-4">
+                <a:solidFill>
+                  <a:schemeClr val="accent2">
+                    <a:lumMod val="75000"/>
+                  </a:schemeClr>
+                </a:solidFill>
+              </a:rPr>
+              <a:t>13</a:t>
+            </a:r>
+            <a:endParaRPr lang="en-US" sz="6218" b="1" kern="0" spc="-4" dirty="0">
+              <a:solidFill>
+                <a:schemeClr val="accent2">
+                  <a:lumMod val="75000"/>
+                </a:schemeClr>
+              </a:solidFill>
+            </a:endParaRPr>
           </a:p>
         </p:txBody>
       </p:sp>
@@ -4676,7 +6479,7 @@
         <p:spPr>
           <a:xfrm>
             <a:off x="214313" y="4682728"/>
-            <a:ext cx="1571625" cy="175022"/>
+            <a:ext cx="850489" cy="147284"/>
           </a:xfrm>
           <a:prstGeom prst="rect">
             <a:avLst/>
@@ -4699,14 +6502,20 @@
             <a:r>
               <a:rPr lang="en-US" sz="942" kern="0" spc="2" dirty="0">
                 <a:solidFill>
-                  <a:srgbClr val="F5F5F5">
-                    <a:alpha val="80000"/>
-                  </a:srgbClr>
+                  <a:schemeClr val="accent2">
+                    <a:lumMod val="75000"/>
+                  </a:schemeClr>
                 </a:solidFill>
               </a:rPr>
               <a:t>Defense in Depth</a:t>
             </a:r>
-            <a:endParaRPr lang="en-US" sz="942" dirty="0"/>
+            <a:endParaRPr lang="en-US" sz="942" dirty="0">
+              <a:solidFill>
+                <a:schemeClr val="accent2">
+                  <a:lumMod val="75000"/>
+                </a:schemeClr>
+              </a:solidFill>
+            </a:endParaRPr>
           </a:p>
         </p:txBody>
       </p:sp>
@@ -5526,7 +7335,7 @@
         <p:spPr>
           <a:xfrm>
             <a:off x="2428875" y="4507706"/>
-            <a:ext cx="6286500" cy="350044"/>
+            <a:ext cx="6286500" cy="377924"/>
           </a:xfrm>
           <a:prstGeom prst="rect">
             <a:avLst/>
@@ -5547,12 +7356,22 @@
               <a:buNone/>
             </a:pPr>
             <a:r>
+              <a:rPr lang="en-US" sz="1000" b="1" dirty="0">
+                <a:solidFill>
+                  <a:schemeClr val="accent2">
+                    <a:lumMod val="75000"/>
+                  </a:schemeClr>
+                </a:solidFill>
+              </a:rPr>
+              <a:t>&gt; CONCLUSIÓN: Pinning es necesario pero no suficiente. La seguridad móvil es Arquitectura + Operación</a:t>
+            </a:r>
+            <a:r>
               <a:rPr lang="en-US" sz="727" dirty="0">
                 <a:solidFill>
                   <a:srgbClr val="F5F5F5"/>
                 </a:solidFill>
               </a:rPr>
-              <a:t>&gt; CONCLUSIÓN: Pinning es necesario pero no suficiente. La seguridad móvil es Arquitectura + Operación.</a:t>
+              <a:t>.</a:t>
             </a:r>
             <a:endParaRPr lang="en-US" sz="727" dirty="0"/>
           </a:p>
@@ -5566,7 +7385,7 @@
 </p:sld>
 </file>
 
-<file path=ppt/slides/slide13.xml><?xml version="1.0" encoding="utf-8"?>
+<file path=ppt/slides/slide15.xml><?xml version="1.0" encoding="utf-8"?>
 <p:sld xmlns:a="http://schemas.openxmlformats.org/drawingml/2006/main" xmlns:r="http://schemas.openxmlformats.org/officeDocument/2006/relationships" xmlns:p="http://schemas.openxmlformats.org/presentationml/2006/main">
   <p:cSld name="Slide 13">
     <p:spTree>
@@ -5670,7 +7489,7 @@
         <p:spPr>
           <a:xfrm>
             <a:off x="214313" y="285750"/>
-            <a:ext cx="1571625" cy="685800"/>
+            <a:ext cx="806888" cy="729880"/>
           </a:xfrm>
           <a:prstGeom prst="rect">
             <a:avLst/>
@@ -5691,14 +7510,22 @@
               <a:buNone/>
             </a:pPr>
             <a:r>
-              <a:rPr lang="en-US" sz="6218" b="1" kern="0" spc="-4" dirty="0">
-                <a:solidFill>
-                  <a:srgbClr val="F5F5F5"/>
-                </a:solidFill>
-              </a:rPr>
-              <a:t>13</a:t>
-            </a:r>
-            <a:endParaRPr lang="en-US" sz="6218" dirty="0"/>
+              <a:rPr lang="en-US" sz="6218" b="1" kern="0" spc="-4">
+                <a:solidFill>
+                  <a:schemeClr val="accent2">
+                    <a:lumMod val="75000"/>
+                  </a:schemeClr>
+                </a:solidFill>
+              </a:rPr>
+              <a:t>14</a:t>
+            </a:r>
+            <a:endParaRPr lang="en-US" sz="6218" b="1" kern="0" spc="-4" dirty="0">
+              <a:solidFill>
+                <a:schemeClr val="accent2">
+                  <a:lumMod val="75000"/>
+                </a:schemeClr>
+              </a:solidFill>
+            </a:endParaRPr>
           </a:p>
         </p:txBody>
       </p:sp>
@@ -6828,7 +8655,7 @@
 </p:sld>
 </file>
 
-<file path=ppt/slides/slide14.xml><?xml version="1.0" encoding="utf-8"?>
+<file path=ppt/slides/slide16.xml><?xml version="1.0" encoding="utf-8"?>
 <p:sld xmlns:a="http://schemas.openxmlformats.org/drawingml/2006/main" xmlns:r="http://schemas.openxmlformats.org/officeDocument/2006/relationships" xmlns:p="http://schemas.openxmlformats.org/presentationml/2006/main">
   <p:cSld name="Slide 14">
     <p:spTree>
@@ -6932,7 +8759,7 @@
         <p:spPr>
           <a:xfrm>
             <a:off x="214313" y="285750"/>
-            <a:ext cx="1571625" cy="685800"/>
+            <a:ext cx="806888" cy="729880"/>
           </a:xfrm>
           <a:prstGeom prst="rect">
             <a:avLst/>
@@ -6953,14 +8780,22 @@
               <a:buNone/>
             </a:pPr>
             <a:r>
-              <a:rPr lang="en-US" sz="6218" b="1" kern="0" spc="-4" dirty="0">
-                <a:solidFill>
-                  <a:srgbClr val="F5F5F5"/>
-                </a:solidFill>
-              </a:rPr>
-              <a:t>14</a:t>
-            </a:r>
-            <a:endParaRPr lang="en-US" sz="6218" dirty="0"/>
+              <a:rPr lang="en-US" sz="6218" b="1" kern="0" spc="-4">
+                <a:solidFill>
+                  <a:schemeClr val="accent2">
+                    <a:lumMod val="75000"/>
+                  </a:schemeClr>
+                </a:solidFill>
+              </a:rPr>
+              <a:t>15</a:t>
+            </a:r>
+            <a:endParaRPr lang="en-US" sz="6218" b="1" kern="0" spc="-4" dirty="0">
+              <a:solidFill>
+                <a:schemeClr val="accent2">
+                  <a:lumMod val="75000"/>
+                </a:schemeClr>
+              </a:solidFill>
+            </a:endParaRPr>
           </a:p>
         </p:txBody>
       </p:sp>
@@ -7399,8 +9234,8 @@
         </p:nvSpPr>
         <p:spPr>
           <a:xfrm>
-            <a:off x="6315075" y="3884805"/>
-            <a:ext cx="2400300" cy="972945"/>
+            <a:off x="6252989" y="3804139"/>
+            <a:ext cx="2497032" cy="1105323"/>
           </a:xfrm>
           <a:prstGeom prst="rect">
             <a:avLst/>
@@ -7427,7 +9262,7 @@
         <p:spPr>
           <a:xfrm>
             <a:off x="6457950" y="4027680"/>
-            <a:ext cx="2114550" cy="135731"/>
+            <a:ext cx="1043555" cy="123816"/>
           </a:xfrm>
           <a:prstGeom prst="rect">
             <a:avLst/>
@@ -7448,14 +9283,22 @@
               <a:buNone/>
             </a:pPr>
             <a:r>
-              <a:rPr lang="en-US" sz="683" b="1" dirty="0">
-                <a:solidFill>
-                  <a:srgbClr val="0044CC"/>
+              <a:rPr lang="en-US" sz="1100" b="1" dirty="0">
+                <a:solidFill>
+                  <a:schemeClr val="accent2">
+                    <a:lumMod val="75000"/>
+                  </a:schemeClr>
                 </a:solidFill>
               </a:rPr>
               <a:t>Stack Tecnológico</a:t>
             </a:r>
-            <a:endParaRPr lang="en-US" sz="683" dirty="0"/>
+            <a:endParaRPr lang="en-US" sz="1100" dirty="0">
+              <a:solidFill>
+                <a:schemeClr val="accent2">
+                  <a:lumMod val="75000"/>
+                </a:schemeClr>
+              </a:solidFill>
+            </a:endParaRPr>
           </a:p>
         </p:txBody>
       </p:sp>
@@ -7491,12 +9334,23 @@
             <a:r>
               <a:rPr lang="en-US" sz="727" dirty="0">
                 <a:solidFill>
-                  <a:srgbClr val="F5F5F5"/>
+                  <a:schemeClr val="accent2">
+                    <a:lumMod val="60000"/>
+                    <a:lumOff val="40000"/>
+                  </a:schemeClr>
                 </a:solidFill>
               </a:rPr>
               <a:t>&gt; OpenSSL (CA Local + 3 Certs)
  &gt; Node.js HTTPS Server (Rotation)
- &gt; Node.js Client (Manual SPKI Check)</a:t>
+ &gt; Node.js Client (Manual SPKI Check</a:t>
+            </a:r>
+            <a:r>
+              <a:rPr lang="en-US" sz="727" dirty="0">
+                <a:solidFill>
+                  <a:srgbClr val="F5F5F5"/>
+                </a:solidFill>
+              </a:rPr>
+              <a:t>)</a:t>
             </a:r>
             <a:endParaRPr lang="en-US" sz="727" dirty="0"/>
           </a:p>
@@ -7510,7 +9364,7 @@
 </p:sld>
 </file>
 
-<file path=ppt/slides/slide15.xml><?xml version="1.0" encoding="utf-8"?>
+<file path=ppt/slides/slide17.xml><?xml version="1.0" encoding="utf-8"?>
 <p:sld xmlns:a="http://schemas.openxmlformats.org/drawingml/2006/main" xmlns:r="http://schemas.openxmlformats.org/officeDocument/2006/relationships" xmlns:p="http://schemas.openxmlformats.org/presentationml/2006/main">
   <p:cSld name="Slide 15">
     <p:spTree>
@@ -7543,7 +9397,7 @@
         </p:blipFill>
         <p:spPr>
           <a:xfrm>
-            <a:off x="0" y="0"/>
+            <a:off x="0" y="-196311"/>
             <a:ext cx="9144000" cy="5573883"/>
           </a:xfrm>
           <a:prstGeom prst="rect">
@@ -7600,7 +9454,7 @@
         </p:nvSpPr>
         <p:spPr>
           <a:xfrm>
-            <a:off x="0" y="155377"/>
+            <a:off x="0" y="0"/>
             <a:ext cx="2000250" cy="5418506"/>
           </a:xfrm>
           <a:prstGeom prst="rect">
@@ -7655,7 +9509,7 @@
         <p:spPr>
           <a:xfrm>
             <a:off x="214313" y="441127"/>
-            <a:ext cx="1571625" cy="685800"/>
+            <a:ext cx="806888" cy="729880"/>
           </a:xfrm>
           <a:prstGeom prst="rect">
             <a:avLst/>
@@ -7676,14 +9530,22 @@
               <a:buNone/>
             </a:pPr>
             <a:r>
-              <a:rPr lang="en-US" sz="6218" b="1" kern="0" spc="-4" dirty="0">
-                <a:solidFill>
-                  <a:srgbClr val="F5F5F5"/>
-                </a:solidFill>
-              </a:rPr>
-              <a:t>15</a:t>
-            </a:r>
-            <a:endParaRPr lang="en-US" sz="6218" dirty="0"/>
+              <a:rPr lang="en-US" sz="6218" b="1" kern="0" spc="-4">
+                <a:solidFill>
+                  <a:schemeClr val="accent2">
+                    <a:lumMod val="75000"/>
+                  </a:schemeClr>
+                </a:solidFill>
+              </a:rPr>
+              <a:t>16</a:t>
+            </a:r>
+            <a:endParaRPr lang="en-US" sz="6218" b="1" kern="0" spc="-4" dirty="0">
+              <a:solidFill>
+                <a:schemeClr val="accent2">
+                  <a:lumMod val="75000"/>
+                </a:schemeClr>
+              </a:solidFill>
+            </a:endParaRPr>
           </a:p>
         </p:txBody>
       </p:sp>
@@ -7779,7 +9641,7 @@
         </p:nvSpPr>
         <p:spPr>
           <a:xfrm>
-            <a:off x="2571750" y="1095477"/>
+            <a:off x="2571750" y="1024040"/>
             <a:ext cx="6000750" cy="233958"/>
           </a:xfrm>
           <a:prstGeom prst="rect">
@@ -7821,7 +9683,7 @@
         <p:spPr>
           <a:xfrm>
             <a:off x="2571750" y="1643760"/>
-            <a:ext cx="500063" cy="342900"/>
+            <a:ext cx="317395" cy="346249"/>
           </a:xfrm>
           <a:prstGeom prst="rect">
             <a:avLst/>
@@ -7844,14 +9706,20 @@
             <a:r>
               <a:rPr lang="en-US" sz="2436" b="1" dirty="0">
                 <a:solidFill>
-                  <a:srgbClr val="111111">
-                    <a:alpha val="20000"/>
-                  </a:srgbClr>
+                  <a:schemeClr val="accent2">
+                    <a:lumMod val="75000"/>
+                  </a:schemeClr>
                 </a:solidFill>
               </a:rPr>
               <a:t>01</a:t>
             </a:r>
-            <a:endParaRPr lang="en-US" sz="2436" dirty="0"/>
+            <a:endParaRPr lang="en-US" sz="2436" dirty="0">
+              <a:solidFill>
+                <a:schemeClr val="accent2">
+                  <a:lumMod val="75000"/>
+                </a:schemeClr>
+              </a:solidFill>
+            </a:endParaRPr>
           </a:p>
         </p:txBody>
       </p:sp>
@@ -7946,7 +9814,7 @@
         <p:spPr>
           <a:xfrm>
             <a:off x="5679281" y="1643760"/>
-            <a:ext cx="500063" cy="342900"/>
+            <a:ext cx="317395" cy="346249"/>
           </a:xfrm>
           <a:prstGeom prst="rect">
             <a:avLst/>
@@ -7969,14 +9837,20 @@
             <a:r>
               <a:rPr lang="en-US" sz="2436" b="1" dirty="0">
                 <a:solidFill>
-                  <a:srgbClr val="111111">
-                    <a:alpha val="20000"/>
-                  </a:srgbClr>
+                  <a:schemeClr val="accent2">
+                    <a:lumMod val="75000"/>
+                  </a:schemeClr>
                 </a:solidFill>
               </a:rPr>
               <a:t>02</a:t>
             </a:r>
-            <a:endParaRPr lang="en-US" sz="2436" dirty="0"/>
+            <a:endParaRPr lang="en-US" sz="2436" dirty="0">
+              <a:solidFill>
+                <a:schemeClr val="accent2">
+                  <a:lumMod val="75000"/>
+                </a:schemeClr>
+              </a:solidFill>
+            </a:endParaRPr>
           </a:p>
         </p:txBody>
       </p:sp>
@@ -8087,7 +9961,7 @@
         <p:spPr>
           <a:xfrm>
             <a:off x="2571750" y="3368976"/>
-            <a:ext cx="500063" cy="342900"/>
+            <a:ext cx="317395" cy="346249"/>
           </a:xfrm>
           <a:prstGeom prst="rect">
             <a:avLst/>
@@ -8110,14 +9984,20 @@
             <a:r>
               <a:rPr lang="en-US" sz="2436" b="1" dirty="0">
                 <a:solidFill>
-                  <a:srgbClr val="111111">
-                    <a:alpha val="20000"/>
-                  </a:srgbClr>
+                  <a:schemeClr val="accent2">
+                    <a:lumMod val="75000"/>
+                  </a:schemeClr>
                 </a:solidFill>
               </a:rPr>
               <a:t>03</a:t>
             </a:r>
-            <a:endParaRPr lang="en-US" sz="2436" dirty="0"/>
+            <a:endParaRPr lang="en-US" sz="2436" dirty="0">
+              <a:solidFill>
+                <a:schemeClr val="accent2">
+                  <a:lumMod val="75000"/>
+                </a:schemeClr>
+              </a:solidFill>
+            </a:endParaRPr>
           </a:p>
         </p:txBody>
       </p:sp>
@@ -8331,7 +10211,7 @@
         <p:spPr>
           <a:xfrm>
             <a:off x="3143250" y="4866652"/>
-            <a:ext cx="5286375" cy="135731"/>
+            <a:ext cx="1917192" cy="120418"/>
           </a:xfrm>
           <a:prstGeom prst="rect">
             <a:avLst/>
@@ -8352,14 +10232,35 @@
               <a:buNone/>
             </a:pPr>
             <a:r>
-              <a:rPr lang="en-US" sz="727" dirty="0">
-                <a:solidFill>
-                  <a:srgbClr val="888888"/>
-                </a:solidFill>
-              </a:rPr>
-              <a:t>Evitar el Auto-DoS es la prioridad #1</a:t>
-            </a:r>
-            <a:endParaRPr lang="en-US" sz="727" dirty="0"/>
+              <a:rPr lang="en-US" sz="1000" b="1" dirty="0">
+                <a:solidFill>
+                  <a:schemeClr val="accent2">
+                    <a:lumMod val="75000"/>
+                  </a:schemeClr>
+                </a:solidFill>
+              </a:rPr>
+              <a:t>Evitar el Auto-DoS </a:t>
+            </a:r>
+            <a:r>
+              <a:rPr lang="en-US" sz="1000" b="1">
+                <a:solidFill>
+                  <a:schemeClr val="accent2">
+                    <a:lumMod val="75000"/>
+                  </a:schemeClr>
+                </a:solidFill>
+              </a:rPr>
+              <a:t>es la </a:t>
+            </a:r>
+            <a:r>
+              <a:rPr lang="en-US" sz="1000" b="1" dirty="0">
+                <a:solidFill>
+                  <a:schemeClr val="accent2">
+                    <a:lumMod val="75000"/>
+                  </a:schemeClr>
+                </a:solidFill>
+              </a:rPr>
+              <a:t>prioridad #1</a:t>
+            </a:r>
           </a:p>
         </p:txBody>
       </p:sp>
@@ -8371,7 +10272,1524 @@
 </p:sld>
 </file>
 
+<file path=ppt/slides/slide18.xml><?xml version="1.0" encoding="utf-8"?>
+<p:sld xmlns:a="http://schemas.openxmlformats.org/drawingml/2006/main" xmlns:r="http://schemas.openxmlformats.org/officeDocument/2006/relationships" xmlns:p="http://schemas.openxmlformats.org/presentationml/2006/main">
+  <p:cSld>
+    <p:bg>
+      <p:bgPr>
+        <a:solidFill>
+          <a:schemeClr val="bg2">
+            <a:lumMod val="90000"/>
+          </a:schemeClr>
+        </a:solidFill>
+        <a:effectLst/>
+      </p:bgPr>
+    </p:bg>
+    <p:spTree>
+      <p:nvGrpSpPr>
+        <p:cNvPr id="1" name=""/>
+        <p:cNvGrpSpPr/>
+        <p:nvPr/>
+      </p:nvGrpSpPr>
+      <p:grpSpPr>
+        <a:xfrm>
+          <a:off x="0" y="0"/>
+          <a:ext cx="0" cy="0"/>
+          <a:chOff x="0" y="0"/>
+          <a:chExt cx="0" cy="0"/>
+        </a:xfrm>
+      </p:grpSpPr>
+      <p:sp>
+        <p:nvSpPr>
+          <p:cNvPr id="3" name="Shape 0"/>
+          <p:cNvSpPr/>
+          <p:nvPr/>
+        </p:nvSpPr>
+        <p:spPr>
+          <a:xfrm>
+            <a:off x="0" y="0"/>
+            <a:ext cx="2000250" cy="5143500"/>
+          </a:xfrm>
+          <a:prstGeom prst="rect">
+            <a:avLst/>
+          </a:prstGeom>
+          <a:solidFill>
+            <a:srgbClr val="111111"/>
+          </a:solidFill>
+          <a:ln/>
+        </p:spPr>
+        <p:txBody>
+          <a:bodyPr/>
+          <a:lstStyle/>
+          <a:p>
+            <a:endParaRPr lang="es-CL"/>
+          </a:p>
+        </p:txBody>
+      </p:sp>
+      <p:sp>
+        <p:nvSpPr>
+          <p:cNvPr id="4" name="Shape 1"/>
+          <p:cNvSpPr/>
+          <p:nvPr/>
+        </p:nvSpPr>
+        <p:spPr>
+          <a:xfrm>
+            <a:off x="1971675" y="0"/>
+            <a:ext cx="28575" cy="5143500"/>
+          </a:xfrm>
+          <a:prstGeom prst="rect">
+            <a:avLst/>
+          </a:prstGeom>
+          <a:solidFill>
+            <a:srgbClr val="111111"/>
+          </a:solidFill>
+          <a:ln/>
+        </p:spPr>
+        <p:txBody>
+          <a:bodyPr/>
+          <a:lstStyle/>
+          <a:p>
+            <a:endParaRPr lang="es-CL"/>
+          </a:p>
+        </p:txBody>
+      </p:sp>
+      <p:sp>
+        <p:nvSpPr>
+          <p:cNvPr id="5" name="Text 2"/>
+          <p:cNvSpPr/>
+          <p:nvPr/>
+        </p:nvSpPr>
+        <p:spPr>
+          <a:xfrm>
+            <a:off x="214313" y="285750"/>
+            <a:ext cx="806888" cy="729880"/>
+          </a:xfrm>
+          <a:prstGeom prst="rect">
+            <a:avLst/>
+          </a:prstGeom>
+          <a:noFill/>
+          <a:ln/>
+        </p:spPr>
+        <p:txBody>
+          <a:bodyPr wrap="none" lIns="0" tIns="0" rIns="0" bIns="0" rtlCol="0" anchor="t">
+            <a:spAutoFit/>
+          </a:bodyPr>
+          <a:lstStyle/>
+          <a:p>
+            <a:pPr marL="0" indent="0" algn="l">
+              <a:lnSpc>
+                <a:spcPts val="5400"/>
+              </a:lnSpc>
+              <a:buNone/>
+            </a:pPr>
+            <a:r>
+              <a:rPr lang="en-US" sz="6218" b="1" kern="0" spc="-4">
+                <a:solidFill>
+                  <a:schemeClr val="accent2">
+                    <a:lumMod val="75000"/>
+                  </a:schemeClr>
+                </a:solidFill>
+              </a:rPr>
+              <a:t>17</a:t>
+            </a:r>
+            <a:endParaRPr lang="en-US" sz="6218" b="1" kern="0" spc="-4" dirty="0">
+              <a:solidFill>
+                <a:schemeClr val="accent2">
+                  <a:lumMod val="75000"/>
+                </a:schemeClr>
+              </a:solidFill>
+            </a:endParaRPr>
+          </a:p>
+        </p:txBody>
+      </p:sp>
+      <p:sp>
+        <p:nvSpPr>
+          <p:cNvPr id="6" name="Text 3"/>
+          <p:cNvSpPr/>
+          <p:nvPr/>
+        </p:nvSpPr>
+        <p:spPr>
+          <a:xfrm>
+            <a:off x="550077" y="2209742"/>
+            <a:ext cx="605327" cy="210186"/>
+          </a:xfrm>
+          <a:prstGeom prst="rect">
+            <a:avLst/>
+          </a:prstGeom>
+          <a:noFill/>
+          <a:ln/>
+        </p:spPr>
+        <p:txBody>
+          <a:bodyPr wrap="square" lIns="0" tIns="0" rIns="0" bIns="0" rtlCol="0" anchor="t">
+            <a:spAutoFit/>
+          </a:bodyPr>
+          <a:lstStyle/>
+          <a:p>
+            <a:pPr marL="0" indent="0" algn="l">
+              <a:lnSpc>
+                <a:spcPts val="1200"/>
+              </a:lnSpc>
+              <a:buNone/>
+            </a:pPr>
+            <a:r>
+              <a:rPr lang="en-US" sz="2800" kern="0" spc="2">
+                <a:solidFill>
+                  <a:schemeClr val="accent2">
+                    <a:lumMod val="75000"/>
+                  </a:schemeClr>
+                </a:solidFill>
+              </a:rPr>
+              <a:t>FIN </a:t>
+            </a:r>
+            <a:endParaRPr lang="en-US" sz="2800" dirty="0">
+              <a:solidFill>
+                <a:schemeClr val="accent2">
+                  <a:lumMod val="75000"/>
+                </a:schemeClr>
+              </a:solidFill>
+            </a:endParaRPr>
+          </a:p>
+        </p:txBody>
+      </p:sp>
+      <p:sp>
+        <p:nvSpPr>
+          <p:cNvPr id="7" name="Text 4"/>
+          <p:cNvSpPr/>
+          <p:nvPr/>
+        </p:nvSpPr>
+        <p:spPr>
+          <a:xfrm>
+            <a:off x="2428875" y="285750"/>
+            <a:ext cx="6259534" cy="433517"/>
+          </a:xfrm>
+          <a:prstGeom prst="rect">
+            <a:avLst/>
+          </a:prstGeom>
+          <a:noFill/>
+          <a:ln/>
+        </p:spPr>
+        <p:txBody>
+          <a:bodyPr wrap="none" lIns="0" tIns="0" rIns="0" bIns="0" rtlCol="0" anchor="t">
+            <a:spAutoFit/>
+          </a:bodyPr>
+          <a:lstStyle/>
+          <a:p>
+            <a:pPr marL="0" indent="0" algn="l">
+              <a:lnSpc>
+                <a:spcPts val="3500"/>
+              </a:lnSpc>
+              <a:buNone/>
+            </a:pPr>
+            <a:r>
+              <a:rPr lang="en-US" sz="2862" b="1" kern="0" spc="-1">
+                <a:solidFill>
+                  <a:srgbClr val="111111"/>
+                </a:solidFill>
+              </a:rPr>
+              <a:t>Buena página para entenderlo con React </a:t>
+            </a:r>
+            <a:endParaRPr lang="en-US" sz="2862" dirty="0"/>
+          </a:p>
+        </p:txBody>
+      </p:sp>
+      <p:sp>
+        <p:nvSpPr>
+          <p:cNvPr id="12" name="CuadroTexto 11">
+            <a:extLst>
+              <a:ext uri="{FF2B5EF4-FFF2-40B4-BE49-F238E27FC236}">
+                <a16:creationId xmlns:a16="http://schemas.microsoft.com/office/drawing/2014/main" id="{71F78C9C-9BC3-63E9-165F-9625C310853A}"/>
+              </a:ext>
+            </a:extLst>
+          </p:cNvPr>
+          <p:cNvSpPr txBox="1"/>
+          <p:nvPr/>
+        </p:nvSpPr>
+        <p:spPr>
+          <a:xfrm>
+            <a:off x="2428874" y="1080838"/>
+            <a:ext cx="6367795" cy="923330"/>
+          </a:xfrm>
+          <a:prstGeom prst="rect">
+            <a:avLst/>
+          </a:prstGeom>
+          <a:noFill/>
+        </p:spPr>
+        <p:txBody>
+          <a:bodyPr wrap="square">
+            <a:spAutoFit/>
+          </a:bodyPr>
+          <a:lstStyle/>
+          <a:p>
+            <a:r>
+              <a:rPr lang="es-CL">
+                <a:hlinkClick r:id="rId3"/>
+              </a:rPr>
+              <a:t>https://dev.to/ajmal_hasan/guide-to-implementing-ssl-pinning-in-react-native-for-ios-and-android-4coo</a:t>
+            </a:r>
+            <a:endParaRPr lang="es-CL"/>
+          </a:p>
+          <a:p>
+            <a:endParaRPr lang="es-CL"/>
+          </a:p>
+        </p:txBody>
+      </p:sp>
+    </p:spTree>
+    <p:extLst>
+      <p:ext uri="{BB962C8B-B14F-4D97-AF65-F5344CB8AC3E}">
+        <p14:creationId xmlns:p14="http://schemas.microsoft.com/office/powerpoint/2010/main" val="2646055255"/>
+      </p:ext>
+    </p:extLst>
+  </p:cSld>
+  <p:clrMapOvr>
+    <a:masterClrMapping/>
+  </p:clrMapOvr>
+</p:sld>
+</file>
+
 <file path=ppt/slides/slide2.xml><?xml version="1.0" encoding="utf-8"?>
+<p:sld xmlns:a="http://schemas.openxmlformats.org/drawingml/2006/main" xmlns:r="http://schemas.openxmlformats.org/officeDocument/2006/relationships" xmlns:p="http://schemas.openxmlformats.org/presentationml/2006/main">
+  <p:cSld name="Slide 1">
+    <p:spTree>
+      <p:nvGrpSpPr>
+        <p:cNvPr id="1" name=""/>
+        <p:cNvGrpSpPr/>
+        <p:nvPr/>
+      </p:nvGrpSpPr>
+      <p:grpSpPr>
+        <a:xfrm>
+          <a:off x="0" y="0"/>
+          <a:ext cx="0" cy="0"/>
+          <a:chOff x="0" y="0"/>
+          <a:chExt cx="0" cy="0"/>
+        </a:xfrm>
+      </p:grpSpPr>
+      <p:pic>
+        <p:nvPicPr>
+          <p:cNvPr id="2" name="Image 0" descr="preencoded.png"/>
+          <p:cNvPicPr>
+            <a:picLocks noChangeAspect="1"/>
+          </p:cNvPicPr>
+          <p:nvPr/>
+        </p:nvPicPr>
+        <p:blipFill>
+          <a:blip r:embed="rId3"/>
+          <a:stretch>
+            <a:fillRect/>
+          </a:stretch>
+        </p:blipFill>
+        <p:spPr>
+          <a:xfrm>
+            <a:off x="0" y="0"/>
+            <a:ext cx="9144000" cy="5143500"/>
+          </a:xfrm>
+          <a:prstGeom prst="rect">
+            <a:avLst/>
+          </a:prstGeom>
+        </p:spPr>
+      </p:pic>
+      <p:sp>
+        <p:nvSpPr>
+          <p:cNvPr id="3" name="Shape 0"/>
+          <p:cNvSpPr/>
+          <p:nvPr/>
+        </p:nvSpPr>
+        <p:spPr>
+          <a:xfrm>
+            <a:off x="0" y="0"/>
+            <a:ext cx="2000250" cy="5143500"/>
+          </a:xfrm>
+          <a:prstGeom prst="rect">
+            <a:avLst/>
+          </a:prstGeom>
+          <a:solidFill>
+            <a:srgbClr val="111111"/>
+          </a:solidFill>
+          <a:ln/>
+        </p:spPr>
+        <p:txBody>
+          <a:bodyPr/>
+          <a:lstStyle/>
+          <a:p>
+            <a:endParaRPr lang="es-CL"/>
+          </a:p>
+        </p:txBody>
+      </p:sp>
+      <p:sp>
+        <p:nvSpPr>
+          <p:cNvPr id="4" name="Shape 1"/>
+          <p:cNvSpPr/>
+          <p:nvPr/>
+        </p:nvSpPr>
+        <p:spPr>
+          <a:xfrm>
+            <a:off x="1971675" y="0"/>
+            <a:ext cx="28575" cy="5143500"/>
+          </a:xfrm>
+          <a:prstGeom prst="rect">
+            <a:avLst/>
+          </a:prstGeom>
+          <a:solidFill>
+            <a:srgbClr val="111111"/>
+          </a:solidFill>
+          <a:ln/>
+        </p:spPr>
+        <p:txBody>
+          <a:bodyPr/>
+          <a:lstStyle/>
+          <a:p>
+            <a:endParaRPr lang="es-CL"/>
+          </a:p>
+        </p:txBody>
+      </p:sp>
+      <p:sp>
+        <p:nvSpPr>
+          <p:cNvPr id="5" name="Text 2"/>
+          <p:cNvSpPr/>
+          <p:nvPr/>
+        </p:nvSpPr>
+        <p:spPr>
+          <a:xfrm>
+            <a:off x="214313" y="285750"/>
+            <a:ext cx="806888" cy="729880"/>
+          </a:xfrm>
+          <a:prstGeom prst="rect">
+            <a:avLst/>
+          </a:prstGeom>
+          <a:noFill/>
+          <a:ln/>
+        </p:spPr>
+        <p:txBody>
+          <a:bodyPr wrap="none" lIns="0" tIns="0" rIns="0" bIns="0" rtlCol="0" anchor="t">
+            <a:spAutoFit/>
+          </a:bodyPr>
+          <a:lstStyle/>
+          <a:p>
+            <a:pPr marL="0" indent="0" algn="l">
+              <a:lnSpc>
+                <a:spcPts val="5400"/>
+              </a:lnSpc>
+              <a:buNone/>
+            </a:pPr>
+            <a:r>
+              <a:rPr lang="en-US" sz="6218" b="1" kern="0" spc="-4">
+                <a:solidFill>
+                  <a:schemeClr val="accent2">
+                    <a:lumMod val="75000"/>
+                  </a:schemeClr>
+                </a:solidFill>
+              </a:rPr>
+              <a:t>01</a:t>
+            </a:r>
+            <a:endParaRPr lang="en-US" sz="6218" b="1" kern="0" spc="-4" dirty="0">
+              <a:solidFill>
+                <a:schemeClr val="accent2">
+                  <a:lumMod val="75000"/>
+                </a:schemeClr>
+              </a:solidFill>
+            </a:endParaRPr>
+          </a:p>
+        </p:txBody>
+      </p:sp>
+      <p:sp>
+        <p:nvSpPr>
+          <p:cNvPr id="6" name="Text 3"/>
+          <p:cNvSpPr/>
+          <p:nvPr/>
+        </p:nvSpPr>
+        <p:spPr>
+          <a:xfrm>
+            <a:off x="214313" y="4507706"/>
+            <a:ext cx="1571625" cy="147284"/>
+          </a:xfrm>
+          <a:prstGeom prst="rect">
+            <a:avLst/>
+          </a:prstGeom>
+          <a:noFill/>
+          <a:ln/>
+        </p:spPr>
+        <p:txBody>
+          <a:bodyPr wrap="square" lIns="0" tIns="0" rIns="0" bIns="0" rtlCol="0" anchor="t">
+            <a:spAutoFit/>
+          </a:bodyPr>
+          <a:lstStyle/>
+          <a:p>
+            <a:pPr marL="0" indent="0">
+              <a:lnSpc>
+                <a:spcPts val="1200"/>
+              </a:lnSpc>
+              <a:buNone/>
+            </a:pPr>
+            <a:r>
+              <a:rPr lang="en-US" sz="942" kern="0" spc="2">
+                <a:solidFill>
+                  <a:schemeClr val="accent2">
+                    <a:lumMod val="75000"/>
+                  </a:schemeClr>
+                </a:solidFill>
+              </a:rPr>
+              <a:t>Definición</a:t>
+            </a:r>
+            <a:endParaRPr lang="en-US" sz="942" dirty="0">
+              <a:solidFill>
+                <a:schemeClr val="accent2">
+                  <a:lumMod val="75000"/>
+                </a:schemeClr>
+              </a:solidFill>
+            </a:endParaRPr>
+          </a:p>
+        </p:txBody>
+      </p:sp>
+      <p:sp>
+        <p:nvSpPr>
+          <p:cNvPr id="7" name="Text 4"/>
+          <p:cNvSpPr/>
+          <p:nvPr/>
+        </p:nvSpPr>
+        <p:spPr>
+          <a:xfrm>
+            <a:off x="2571750" y="428625"/>
+            <a:ext cx="6490970" cy="555473"/>
+          </a:xfrm>
+          <a:prstGeom prst="rect">
+            <a:avLst/>
+          </a:prstGeom>
+          <a:noFill/>
+          <a:ln/>
+        </p:spPr>
+        <p:txBody>
+          <a:bodyPr wrap="square" lIns="0" tIns="0" rIns="0" bIns="0" rtlCol="0" anchor="t">
+            <a:spAutoFit/>
+          </a:bodyPr>
+          <a:lstStyle/>
+          <a:p>
+            <a:pPr marL="0" indent="0" algn="l">
+              <a:lnSpc>
+                <a:spcPts val="4500"/>
+              </a:lnSpc>
+              <a:buNone/>
+            </a:pPr>
+            <a:r>
+              <a:rPr lang="en-US" sz="3731" b="1" kern="0" spc="-2">
+                <a:solidFill>
+                  <a:srgbClr val="111111"/>
+                </a:solidFill>
+              </a:rPr>
+              <a:t>SSL Pinning </a:t>
+            </a:r>
+            <a:r>
+              <a:rPr lang="en-US" sz="3731" b="1" kern="0" spc="-2">
+                <a:solidFill>
+                  <a:srgbClr val="111111"/>
+                </a:solidFill>
+                <a:sym typeface="Wingdings" panose="05000000000000000000" pitchFamily="2" charset="2"/>
+              </a:rPr>
+              <a:t></a:t>
+            </a:r>
+            <a:r>
+              <a:rPr lang="en-US" sz="3731" b="1" kern="0" spc="-2">
+                <a:solidFill>
+                  <a:srgbClr val="111111"/>
+                </a:solidFill>
+              </a:rPr>
+              <a:t>Certificate Pinning</a:t>
+            </a:r>
+            <a:endParaRPr lang="en-US" sz="3731" dirty="0"/>
+          </a:p>
+        </p:txBody>
+      </p:sp>
+      <p:sp>
+        <p:nvSpPr>
+          <p:cNvPr id="15" name="Shape 10"/>
+          <p:cNvSpPr/>
+          <p:nvPr/>
+        </p:nvSpPr>
+        <p:spPr>
+          <a:xfrm>
+            <a:off x="2516293" y="3884051"/>
+            <a:ext cx="5529303" cy="570185"/>
+          </a:xfrm>
+          <a:prstGeom prst="rect">
+            <a:avLst/>
+          </a:prstGeom>
+          <a:solidFill>
+            <a:srgbClr val="111111"/>
+          </a:solidFill>
+          <a:ln/>
+        </p:spPr>
+        <p:txBody>
+          <a:bodyPr/>
+          <a:lstStyle/>
+          <a:p>
+            <a:r>
+              <a:rPr lang="es-CL" sz="1000">
+                <a:solidFill>
+                  <a:schemeClr val="accent2">
+                    <a:lumMod val="60000"/>
+                    <a:lumOff val="40000"/>
+                  </a:schemeClr>
+                </a:solidFill>
+              </a:rPr>
+              <a:t>     Su función principal es prevenir ataques de intermediario (Man-in-the-Middle), certificados fraudulentos o compromisos en la cadena de confianza, asegurando que la comunicación se realice únicamente con el servidor legítimo esperado.</a:t>
+            </a:r>
+          </a:p>
+        </p:txBody>
+      </p:sp>
+      <p:pic>
+        <p:nvPicPr>
+          <p:cNvPr id="17" name="Image 3" descr="preencoded.png"/>
+          <p:cNvPicPr>
+            <a:picLocks noChangeAspect="1"/>
+          </p:cNvPicPr>
+          <p:nvPr/>
+        </p:nvPicPr>
+        <p:blipFill>
+          <a:blip r:embed="rId4"/>
+          <a:stretch>
+            <a:fillRect/>
+          </a:stretch>
+        </p:blipFill>
+        <p:spPr>
+          <a:xfrm>
+            <a:off x="2571750" y="3934058"/>
+            <a:ext cx="114300" cy="114300"/>
+          </a:xfrm>
+          <a:prstGeom prst="rect">
+            <a:avLst/>
+          </a:prstGeom>
+          <a:solidFill>
+            <a:schemeClr val="accent2">
+              <a:lumMod val="75000"/>
+            </a:schemeClr>
+          </a:solidFill>
+        </p:spPr>
+      </p:pic>
+      <p:sp>
+        <p:nvSpPr>
+          <p:cNvPr id="24" name="CuadroTexto 23">
+            <a:extLst>
+              <a:ext uri="{FF2B5EF4-FFF2-40B4-BE49-F238E27FC236}">
+                <a16:creationId xmlns:a16="http://schemas.microsoft.com/office/drawing/2014/main" id="{0E50FF36-9199-FC20-E51C-654C5041FCAC}"/>
+              </a:ext>
+            </a:extLst>
+          </p:cNvPr>
+          <p:cNvSpPr txBox="1"/>
+          <p:nvPr/>
+        </p:nvSpPr>
+        <p:spPr>
+          <a:xfrm>
+            <a:off x="2516293" y="1231307"/>
+            <a:ext cx="6228079" cy="646331"/>
+          </a:xfrm>
+          <a:prstGeom prst="rect">
+            <a:avLst/>
+          </a:prstGeom>
+          <a:solidFill>
+            <a:schemeClr val="tx1">
+              <a:lumMod val="95000"/>
+              <a:lumOff val="5000"/>
+            </a:schemeClr>
+          </a:solidFill>
+        </p:spPr>
+        <p:txBody>
+          <a:bodyPr wrap="square">
+            <a:spAutoFit/>
+          </a:bodyPr>
+          <a:lstStyle/>
+          <a:p>
+            <a:pPr algn="just"/>
+            <a:r>
+              <a:rPr lang="es-CL" sz="1200">
+                <a:solidFill>
+                  <a:schemeClr val="accent2">
+                    <a:lumMod val="75000"/>
+                  </a:schemeClr>
+                </a:solidFill>
+              </a:rPr>
+              <a:t>Pinning / Certificate Pinning) es un mecanismo de seguridad que refuerza la validación TLS al restringir explícitamente qué </a:t>
+            </a:r>
+            <a:r>
+              <a:rPr lang="es-CL" sz="1200" b="1">
+                <a:solidFill>
+                  <a:schemeClr val="accent2">
+                    <a:lumMod val="60000"/>
+                    <a:lumOff val="40000"/>
+                  </a:schemeClr>
+                </a:solidFill>
+              </a:rPr>
+              <a:t>certificados, claves publicas o entidades certificadoras </a:t>
+            </a:r>
+            <a:r>
+              <a:rPr lang="es-CL" sz="1200">
+                <a:solidFill>
+                  <a:schemeClr val="accent2">
+                    <a:lumMod val="75000"/>
+                  </a:schemeClr>
+                </a:solidFill>
+              </a:rPr>
+              <a:t>son consideradas confiables por una aplicación.</a:t>
+            </a:r>
+          </a:p>
+        </p:txBody>
+      </p:sp>
+      <p:sp>
+        <p:nvSpPr>
+          <p:cNvPr id="22" name="CuadroTexto 21">
+            <a:extLst>
+              <a:ext uri="{FF2B5EF4-FFF2-40B4-BE49-F238E27FC236}">
+                <a16:creationId xmlns:a16="http://schemas.microsoft.com/office/drawing/2014/main" id="{53E34656-3537-0201-4516-7DA45DD44AC7}"/>
+              </a:ext>
+            </a:extLst>
+          </p:cNvPr>
+          <p:cNvSpPr txBox="1"/>
+          <p:nvPr/>
+        </p:nvSpPr>
+        <p:spPr>
+          <a:xfrm>
+            <a:off x="2571750" y="2118794"/>
+            <a:ext cx="2956685" cy="1754326"/>
+          </a:xfrm>
+          <a:prstGeom prst="rect">
+            <a:avLst/>
+          </a:prstGeom>
+          <a:noFill/>
+        </p:spPr>
+        <p:txBody>
+          <a:bodyPr wrap="square">
+            <a:spAutoFit/>
+          </a:bodyPr>
+          <a:lstStyle/>
+          <a:p>
+            <a:pPr algn="just"/>
+            <a:r>
+              <a:rPr lang="es-CL" sz="1200">
+                <a:solidFill>
+                  <a:schemeClr val="accent2">
+                    <a:lumMod val="75000"/>
+                  </a:schemeClr>
+                </a:solidFill>
+              </a:rPr>
+              <a:t>En lugar de confiar únicamente en el trust store del sistema operativo, la aplicación “ancla” (pinnea) uno o más identificadores criptográficos conocidos (por ejemplo, una clave pública o un certificado específico) y rechaza cualquier conexión TLS que no coincida con esos valores, incluso si el certificado presentado es técnicamente válido</a:t>
+            </a:r>
+            <a:r>
+              <a:rPr lang="es-CL" sz="1200"/>
+              <a:t>.</a:t>
+            </a:r>
+          </a:p>
+        </p:txBody>
+      </p:sp>
+      <p:sp>
+        <p:nvSpPr>
+          <p:cNvPr id="26" name="CuadroTexto 25">
+            <a:extLst>
+              <a:ext uri="{FF2B5EF4-FFF2-40B4-BE49-F238E27FC236}">
+                <a16:creationId xmlns:a16="http://schemas.microsoft.com/office/drawing/2014/main" id="{A27C62A9-D863-6B8C-C8B5-F1557CC09316}"/>
+              </a:ext>
+            </a:extLst>
+          </p:cNvPr>
+          <p:cNvSpPr txBox="1"/>
+          <p:nvPr/>
+        </p:nvSpPr>
+        <p:spPr>
+          <a:xfrm>
+            <a:off x="5706139" y="2107616"/>
+            <a:ext cx="3038233" cy="1631216"/>
+          </a:xfrm>
+          <a:prstGeom prst="rect">
+            <a:avLst/>
+          </a:prstGeom>
+          <a:noFill/>
+        </p:spPr>
+        <p:txBody>
+          <a:bodyPr wrap="square">
+            <a:spAutoFit/>
+          </a:bodyPr>
+          <a:lstStyle/>
+          <a:p>
+            <a:r>
+              <a:rPr lang="es-CL" sz="1200" b="1">
+                <a:solidFill>
+                  <a:schemeClr val="accent2">
+                    <a:lumMod val="75000"/>
+                  </a:schemeClr>
+                </a:solidFill>
+              </a:rPr>
+              <a:t>y mTLS ????</a:t>
+            </a:r>
+          </a:p>
+          <a:p>
+            <a:endParaRPr lang="es-CL" sz="1100"/>
+          </a:p>
+          <a:p>
+            <a:pPr marL="171450" indent="-171450">
+              <a:buFont typeface="Arial" panose="020B0604020202020204" pitchFamily="34" charset="0"/>
+              <a:buChar char="•"/>
+            </a:pPr>
+            <a:r>
+              <a:rPr lang="es-CL" sz="1100" b="1">
+                <a:solidFill>
+                  <a:schemeClr val="accent2">
+                    <a:lumMod val="50000"/>
+                  </a:schemeClr>
+                </a:solidFill>
+              </a:rPr>
+              <a:t>mTLS ≠ pinning.</a:t>
+            </a:r>
+          </a:p>
+          <a:p>
+            <a:pPr marL="171450" indent="-171450">
+              <a:buFont typeface="Arial" panose="020B0604020202020204" pitchFamily="34" charset="0"/>
+              <a:buChar char="•"/>
+            </a:pPr>
+            <a:r>
+              <a:rPr lang="es-CL" sz="1100" b="1">
+                <a:solidFill>
+                  <a:schemeClr val="accent2">
+                    <a:lumMod val="50000"/>
+                  </a:schemeClr>
+                </a:solidFill>
+              </a:rPr>
+              <a:t>mTLS autentica cliente y servidor con certificados (ideal para M2M y canales internos).</a:t>
+            </a:r>
+          </a:p>
+          <a:p>
+            <a:pPr marL="171450" indent="-171450">
+              <a:buFont typeface="Arial" panose="020B0604020202020204" pitchFamily="34" charset="0"/>
+              <a:buChar char="•"/>
+            </a:pPr>
+            <a:r>
+              <a:rPr lang="es-CL" sz="1100" b="1">
+                <a:solidFill>
+                  <a:schemeClr val="accent2">
+                    <a:lumMod val="50000"/>
+                  </a:schemeClr>
+                </a:solidFill>
+              </a:rPr>
+              <a:t>Pinning es una regla del cliente para restringir qué identidad del servidor acepta (aunque el trust store diga “ok”).</a:t>
+            </a:r>
+          </a:p>
+        </p:txBody>
+      </p:sp>
+    </p:spTree>
+  </p:cSld>
+  <p:clrMapOvr>
+    <a:masterClrMapping/>
+  </p:clrMapOvr>
+</p:sld>
+</file>
+
+<file path=ppt/slides/slide3.xml><?xml version="1.0" encoding="utf-8"?>
+<p:sld xmlns:a="http://schemas.openxmlformats.org/drawingml/2006/main" xmlns:r="http://schemas.openxmlformats.org/officeDocument/2006/relationships" xmlns:p="http://schemas.openxmlformats.org/presentationml/2006/main">
+  <p:cSld>
+    <p:spTree>
+      <p:nvGrpSpPr>
+        <p:cNvPr id="1" name=""/>
+        <p:cNvGrpSpPr/>
+        <p:nvPr/>
+      </p:nvGrpSpPr>
+      <p:grpSpPr>
+        <a:xfrm>
+          <a:off x="0" y="0"/>
+          <a:ext cx="0" cy="0"/>
+          <a:chOff x="0" y="0"/>
+          <a:chExt cx="0" cy="0"/>
+        </a:xfrm>
+      </p:grpSpPr>
+      <p:pic>
+        <p:nvPicPr>
+          <p:cNvPr id="2" name="Image 0" descr="preencoded.png"/>
+          <p:cNvPicPr>
+            <a:picLocks noChangeAspect="1"/>
+          </p:cNvPicPr>
+          <p:nvPr/>
+        </p:nvPicPr>
+        <p:blipFill>
+          <a:blip r:embed="rId3"/>
+          <a:stretch>
+            <a:fillRect/>
+          </a:stretch>
+        </p:blipFill>
+        <p:spPr>
+          <a:xfrm>
+            <a:off x="0" y="0"/>
+            <a:ext cx="9144000" cy="5143500"/>
+          </a:xfrm>
+          <a:prstGeom prst="rect">
+            <a:avLst/>
+          </a:prstGeom>
+        </p:spPr>
+      </p:pic>
+      <p:sp>
+        <p:nvSpPr>
+          <p:cNvPr id="3" name="Shape 0"/>
+          <p:cNvSpPr/>
+          <p:nvPr/>
+        </p:nvSpPr>
+        <p:spPr>
+          <a:xfrm>
+            <a:off x="0" y="0"/>
+            <a:ext cx="2000250" cy="5143500"/>
+          </a:xfrm>
+          <a:prstGeom prst="rect">
+            <a:avLst/>
+          </a:prstGeom>
+          <a:solidFill>
+            <a:srgbClr val="111111"/>
+          </a:solidFill>
+          <a:ln/>
+        </p:spPr>
+        <p:txBody>
+          <a:bodyPr/>
+          <a:lstStyle/>
+          <a:p>
+            <a:endParaRPr lang="es-CL"/>
+          </a:p>
+        </p:txBody>
+      </p:sp>
+      <p:sp>
+        <p:nvSpPr>
+          <p:cNvPr id="4" name="Shape 1"/>
+          <p:cNvSpPr/>
+          <p:nvPr/>
+        </p:nvSpPr>
+        <p:spPr>
+          <a:xfrm>
+            <a:off x="1971675" y="0"/>
+            <a:ext cx="28575" cy="5143500"/>
+          </a:xfrm>
+          <a:prstGeom prst="rect">
+            <a:avLst/>
+          </a:prstGeom>
+          <a:solidFill>
+            <a:srgbClr val="111111"/>
+          </a:solidFill>
+          <a:ln/>
+        </p:spPr>
+        <p:txBody>
+          <a:bodyPr/>
+          <a:lstStyle/>
+          <a:p>
+            <a:endParaRPr lang="es-CL"/>
+          </a:p>
+        </p:txBody>
+      </p:sp>
+      <p:sp>
+        <p:nvSpPr>
+          <p:cNvPr id="5" name="Text 2"/>
+          <p:cNvSpPr/>
+          <p:nvPr/>
+        </p:nvSpPr>
+        <p:spPr>
+          <a:xfrm>
+            <a:off x="214313" y="285750"/>
+            <a:ext cx="806888" cy="729880"/>
+          </a:xfrm>
+          <a:prstGeom prst="rect">
+            <a:avLst/>
+          </a:prstGeom>
+          <a:noFill/>
+          <a:ln/>
+        </p:spPr>
+        <p:txBody>
+          <a:bodyPr wrap="none" lIns="0" tIns="0" rIns="0" bIns="0" rtlCol="0" anchor="t">
+            <a:spAutoFit/>
+          </a:bodyPr>
+          <a:lstStyle/>
+          <a:p>
+            <a:pPr marL="0" indent="0" algn="l">
+              <a:lnSpc>
+                <a:spcPts val="5400"/>
+              </a:lnSpc>
+              <a:buNone/>
+            </a:pPr>
+            <a:r>
+              <a:rPr lang="en-US" sz="6218" b="1" kern="0" spc="-4">
+                <a:solidFill>
+                  <a:schemeClr val="accent2">
+                    <a:lumMod val="75000"/>
+                  </a:schemeClr>
+                </a:solidFill>
+              </a:rPr>
+              <a:t>02</a:t>
+            </a:r>
+            <a:endParaRPr lang="en-US" sz="6218" b="1" kern="0" spc="-4" dirty="0">
+              <a:solidFill>
+                <a:schemeClr val="accent2">
+                  <a:lumMod val="75000"/>
+                </a:schemeClr>
+              </a:solidFill>
+            </a:endParaRPr>
+          </a:p>
+        </p:txBody>
+      </p:sp>
+      <p:sp>
+        <p:nvSpPr>
+          <p:cNvPr id="6" name="Text 3"/>
+          <p:cNvSpPr/>
+          <p:nvPr/>
+        </p:nvSpPr>
+        <p:spPr>
+          <a:xfrm>
+            <a:off x="214313" y="4507706"/>
+            <a:ext cx="1571625" cy="147284"/>
+          </a:xfrm>
+          <a:prstGeom prst="rect">
+            <a:avLst/>
+          </a:prstGeom>
+          <a:noFill/>
+          <a:ln/>
+        </p:spPr>
+        <p:txBody>
+          <a:bodyPr wrap="square" lIns="0" tIns="0" rIns="0" bIns="0" rtlCol="0" anchor="t">
+            <a:spAutoFit/>
+          </a:bodyPr>
+          <a:lstStyle/>
+          <a:p>
+            <a:pPr marL="0" indent="0" algn="l">
+              <a:lnSpc>
+                <a:spcPts val="1200"/>
+              </a:lnSpc>
+              <a:buNone/>
+            </a:pPr>
+            <a:r>
+              <a:rPr lang="en-US" sz="942" kern="0" spc="2" dirty="0">
+                <a:solidFill>
+                  <a:schemeClr val="accent2">
+                    <a:lumMod val="75000"/>
+                  </a:schemeClr>
+                </a:solidFill>
+              </a:rPr>
+              <a:t>Contexto y Objetivo</a:t>
+            </a:r>
+            <a:endParaRPr lang="en-US" sz="942" dirty="0">
+              <a:solidFill>
+                <a:schemeClr val="accent2">
+                  <a:lumMod val="75000"/>
+                </a:schemeClr>
+              </a:solidFill>
+            </a:endParaRPr>
+          </a:p>
+        </p:txBody>
+      </p:sp>
+      <p:sp>
+        <p:nvSpPr>
+          <p:cNvPr id="7" name="Text 4"/>
+          <p:cNvSpPr/>
+          <p:nvPr/>
+        </p:nvSpPr>
+        <p:spPr>
+          <a:xfrm>
+            <a:off x="2571750" y="428625"/>
+            <a:ext cx="6000750" cy="1131559"/>
+          </a:xfrm>
+          <a:prstGeom prst="rect">
+            <a:avLst/>
+          </a:prstGeom>
+          <a:noFill/>
+          <a:ln/>
+        </p:spPr>
+        <p:txBody>
+          <a:bodyPr wrap="square" lIns="0" tIns="0" rIns="0" bIns="0" rtlCol="0" anchor="t">
+            <a:spAutoFit/>
+          </a:bodyPr>
+          <a:lstStyle/>
+          <a:p>
+            <a:pPr marL="0" indent="0" algn="l">
+              <a:lnSpc>
+                <a:spcPts val="4500"/>
+              </a:lnSpc>
+              <a:buNone/>
+            </a:pPr>
+            <a:r>
+              <a:rPr lang="en-US" sz="3731" b="1" kern="0" spc="-2" dirty="0">
+                <a:solidFill>
+                  <a:srgbClr val="111111"/>
+                </a:solidFill>
+              </a:rPr>
+              <a:t>Certificate Pinning en Banca</a:t>
+            </a:r>
+            <a:endParaRPr lang="en-US" sz="3731" dirty="0"/>
+          </a:p>
+        </p:txBody>
+      </p:sp>
+      <p:sp>
+        <p:nvSpPr>
+          <p:cNvPr id="8" name="Text 5"/>
+          <p:cNvSpPr/>
+          <p:nvPr/>
+        </p:nvSpPr>
+        <p:spPr>
+          <a:xfrm>
+            <a:off x="2571750" y="1703059"/>
+            <a:ext cx="6000750" cy="233958"/>
+          </a:xfrm>
+          <a:prstGeom prst="rect">
+            <a:avLst/>
+          </a:prstGeom>
+          <a:noFill/>
+          <a:ln/>
+        </p:spPr>
+        <p:txBody>
+          <a:bodyPr wrap="none" lIns="0" tIns="0" rIns="0" bIns="0" rtlCol="0" anchor="t">
+            <a:spAutoFit/>
+          </a:bodyPr>
+          <a:lstStyle/>
+          <a:p>
+            <a:pPr marL="0" indent="0" algn="l">
+              <a:lnSpc>
+                <a:spcPts val="1600"/>
+              </a:lnSpc>
+              <a:buNone/>
+            </a:pPr>
+            <a:r>
+              <a:rPr lang="en-US" sz="1193" b="1" dirty="0">
+                <a:solidFill>
+                  <a:srgbClr val="0044CC"/>
+                </a:solidFill>
+              </a:rPr>
+              <a:t>Arquitectura y Operación 2026</a:t>
+            </a:r>
+            <a:endParaRPr lang="en-US" sz="1193" dirty="0"/>
+          </a:p>
+        </p:txBody>
+      </p:sp>
+      <p:pic>
+        <p:nvPicPr>
+          <p:cNvPr id="9" name="Image 1" descr="preencoded.png"/>
+          <p:cNvPicPr>
+            <a:picLocks noChangeAspect="1"/>
+          </p:cNvPicPr>
+          <p:nvPr/>
+        </p:nvPicPr>
+        <p:blipFill>
+          <a:blip r:embed="rId4"/>
+          <a:stretch>
+            <a:fillRect/>
+          </a:stretch>
+        </p:blipFill>
+        <p:spPr>
+          <a:xfrm>
+            <a:off x="2728913" y="2282596"/>
+            <a:ext cx="171450" cy="171450"/>
+          </a:xfrm>
+          <a:prstGeom prst="rect">
+            <a:avLst/>
+          </a:prstGeom>
+        </p:spPr>
+      </p:pic>
+      <p:sp>
+        <p:nvSpPr>
+          <p:cNvPr id="10" name="Text 6"/>
+          <p:cNvSpPr/>
+          <p:nvPr/>
+        </p:nvSpPr>
+        <p:spPr>
+          <a:xfrm>
+            <a:off x="2971800" y="2251342"/>
+            <a:ext cx="1998771" cy="233958"/>
+          </a:xfrm>
+          <a:prstGeom prst="rect">
+            <a:avLst/>
+          </a:prstGeom>
+          <a:noFill/>
+          <a:ln/>
+        </p:spPr>
+        <p:txBody>
+          <a:bodyPr wrap="none" lIns="0" tIns="0" rIns="0" bIns="0" rtlCol="0" anchor="t">
+            <a:spAutoFit/>
+          </a:bodyPr>
+          <a:lstStyle/>
+          <a:p>
+            <a:pPr marL="0" indent="0" algn="l">
+              <a:lnSpc>
+                <a:spcPts val="1600"/>
+              </a:lnSpc>
+              <a:buNone/>
+            </a:pPr>
+            <a:r>
+              <a:rPr lang="en-US" sz="1193" b="1" dirty="0">
+                <a:solidFill>
+                  <a:srgbClr val="333333"/>
+                </a:solidFill>
+              </a:rPr>
+              <a:t>Problema que Resuelve</a:t>
+            </a:r>
+            <a:endParaRPr lang="en-US" sz="1193" dirty="0"/>
+          </a:p>
+        </p:txBody>
+      </p:sp>
+      <p:sp>
+        <p:nvSpPr>
+          <p:cNvPr id="11" name="Text 7"/>
+          <p:cNvSpPr/>
+          <p:nvPr/>
+        </p:nvSpPr>
+        <p:spPr>
+          <a:xfrm>
+            <a:off x="2728913" y="2592456"/>
+            <a:ext cx="2757488" cy="771525"/>
+          </a:xfrm>
+          <a:prstGeom prst="rect">
+            <a:avLst/>
+          </a:prstGeom>
+          <a:noFill/>
+          <a:ln/>
+        </p:spPr>
+        <p:txBody>
+          <a:bodyPr wrap="square" lIns="0" tIns="0" rIns="0" bIns="0" rtlCol="0" anchor="t">
+            <a:spAutoFit/>
+          </a:bodyPr>
+          <a:lstStyle/>
+          <a:p>
+            <a:pPr marL="0" indent="0" algn="l">
+              <a:lnSpc>
+                <a:spcPts val="1500"/>
+              </a:lnSpc>
+              <a:buNone/>
+            </a:pPr>
+            <a:r>
+              <a:rPr lang="en-US" sz="942" dirty="0">
+                <a:solidFill>
+                  <a:srgbClr val="333333"/>
+                </a:solidFill>
+              </a:rPr>
+              <a:t>Mitigación efectiva de ataques MITM, incluso con CAs raíz instaladas en dispositivo, emisión indebida o inspección TLS no autorizada.</a:t>
+            </a:r>
+            <a:endParaRPr lang="en-US" sz="942" dirty="0"/>
+          </a:p>
+        </p:txBody>
+      </p:sp>
+      <p:pic>
+        <p:nvPicPr>
+          <p:cNvPr id="12" name="Image 2" descr="preencoded.png"/>
+          <p:cNvPicPr>
+            <a:picLocks noChangeAspect="1"/>
+          </p:cNvPicPr>
+          <p:nvPr/>
+        </p:nvPicPr>
+        <p:blipFill>
+          <a:blip r:embed="rId5"/>
+          <a:stretch>
+            <a:fillRect/>
+          </a:stretch>
+        </p:blipFill>
+        <p:spPr>
+          <a:xfrm>
+            <a:off x="5815013" y="2282596"/>
+            <a:ext cx="171450" cy="171450"/>
+          </a:xfrm>
+          <a:prstGeom prst="rect">
+            <a:avLst/>
+          </a:prstGeom>
+        </p:spPr>
+      </p:pic>
+      <p:sp>
+        <p:nvSpPr>
+          <p:cNvPr id="13" name="Text 8"/>
+          <p:cNvSpPr/>
+          <p:nvPr/>
+        </p:nvSpPr>
+        <p:spPr>
+          <a:xfrm>
+            <a:off x="6057900" y="2251342"/>
+            <a:ext cx="1699933" cy="233958"/>
+          </a:xfrm>
+          <a:prstGeom prst="rect">
+            <a:avLst/>
+          </a:prstGeom>
+          <a:noFill/>
+          <a:ln/>
+        </p:spPr>
+        <p:txBody>
+          <a:bodyPr wrap="none" lIns="0" tIns="0" rIns="0" bIns="0" rtlCol="0" anchor="t">
+            <a:spAutoFit/>
+          </a:bodyPr>
+          <a:lstStyle/>
+          <a:p>
+            <a:pPr marL="0" indent="0" algn="l">
+              <a:lnSpc>
+                <a:spcPts val="1600"/>
+              </a:lnSpc>
+              <a:buNone/>
+            </a:pPr>
+            <a:r>
+              <a:rPr lang="en-US" sz="1193" b="1" dirty="0">
+                <a:solidFill>
+                  <a:srgbClr val="333333"/>
+                </a:solidFill>
+              </a:rPr>
+              <a:t>Lo que NO Resuelve</a:t>
+            </a:r>
+            <a:endParaRPr lang="en-US" sz="1193" dirty="0"/>
+          </a:p>
+        </p:txBody>
+      </p:sp>
+      <p:sp>
+        <p:nvSpPr>
+          <p:cNvPr id="14" name="Text 9"/>
+          <p:cNvSpPr/>
+          <p:nvPr/>
+        </p:nvSpPr>
+        <p:spPr>
+          <a:xfrm>
+            <a:off x="5815013" y="2592456"/>
+            <a:ext cx="2757488" cy="771525"/>
+          </a:xfrm>
+          <a:prstGeom prst="rect">
+            <a:avLst/>
+          </a:prstGeom>
+          <a:noFill/>
+          <a:ln/>
+        </p:spPr>
+        <p:txBody>
+          <a:bodyPr wrap="square" lIns="0" tIns="0" rIns="0" bIns="0" rtlCol="0" anchor="t">
+            <a:spAutoFit/>
+          </a:bodyPr>
+          <a:lstStyle/>
+          <a:p>
+            <a:pPr marL="0" indent="0" algn="l">
+              <a:lnSpc>
+                <a:spcPts val="1500"/>
+              </a:lnSpc>
+              <a:buNone/>
+            </a:pPr>
+            <a:r>
+              <a:rPr lang="en-US" sz="942" dirty="0">
+                <a:solidFill>
+                  <a:srgbClr val="333333"/>
+                </a:solidFill>
+              </a:rPr>
+              <a:t>No protege contra dispositivos comprometidos (root/jailbreak), hooking en runtime, patching de binarios o ingeniería inversa.</a:t>
+            </a:r>
+            <a:endParaRPr lang="en-US" sz="942" dirty="0"/>
+          </a:p>
+        </p:txBody>
+      </p:sp>
+      <p:sp>
+        <p:nvSpPr>
+          <p:cNvPr id="15" name="Shape 10"/>
+          <p:cNvSpPr/>
+          <p:nvPr/>
+        </p:nvSpPr>
+        <p:spPr>
+          <a:xfrm>
+            <a:off x="2728913" y="3884051"/>
+            <a:ext cx="5843588" cy="482203"/>
+          </a:xfrm>
+          <a:prstGeom prst="rect">
+            <a:avLst/>
+          </a:prstGeom>
+          <a:solidFill>
+            <a:srgbClr val="111111"/>
+          </a:solidFill>
+          <a:ln/>
+        </p:spPr>
+        <p:txBody>
+          <a:bodyPr/>
+          <a:lstStyle/>
+          <a:p>
+            <a:endParaRPr lang="es-CL"/>
+          </a:p>
+        </p:txBody>
+      </p:sp>
+      <p:sp>
+        <p:nvSpPr>
+          <p:cNvPr id="16" name="Shape 11"/>
+          <p:cNvSpPr/>
+          <p:nvPr/>
+        </p:nvSpPr>
+        <p:spPr>
+          <a:xfrm>
+            <a:off x="2728913" y="3884051"/>
+            <a:ext cx="71438" cy="482203"/>
+          </a:xfrm>
+          <a:prstGeom prst="rect">
+            <a:avLst/>
+          </a:prstGeom>
+          <a:solidFill>
+            <a:srgbClr val="FF3300"/>
+          </a:solidFill>
+          <a:ln/>
+        </p:spPr>
+        <p:txBody>
+          <a:bodyPr/>
+          <a:lstStyle/>
+          <a:p>
+            <a:endParaRPr lang="es-CL"/>
+          </a:p>
+        </p:txBody>
+      </p:sp>
+      <p:pic>
+        <p:nvPicPr>
+          <p:cNvPr id="17" name="Image 3" descr="preencoded.png"/>
+          <p:cNvPicPr>
+            <a:picLocks noChangeAspect="1"/>
+          </p:cNvPicPr>
+          <p:nvPr/>
+        </p:nvPicPr>
+        <p:blipFill>
+          <a:blip r:embed="rId6"/>
+          <a:stretch>
+            <a:fillRect/>
+          </a:stretch>
+        </p:blipFill>
+        <p:spPr>
+          <a:xfrm>
+            <a:off x="2814638" y="3991208"/>
+            <a:ext cx="114300" cy="114300"/>
+          </a:xfrm>
+          <a:prstGeom prst="rect">
+            <a:avLst/>
+          </a:prstGeom>
+          <a:solidFill>
+            <a:schemeClr val="accent2">
+              <a:lumMod val="75000"/>
+            </a:schemeClr>
+          </a:solidFill>
+        </p:spPr>
+      </p:pic>
+      <p:sp>
+        <p:nvSpPr>
+          <p:cNvPr id="18" name="Text 12"/>
+          <p:cNvSpPr/>
+          <p:nvPr/>
+        </p:nvSpPr>
+        <p:spPr>
+          <a:xfrm>
+            <a:off x="2958657" y="3969776"/>
+            <a:ext cx="557845" cy="141064"/>
+          </a:xfrm>
+          <a:prstGeom prst="rect">
+            <a:avLst/>
+          </a:prstGeom>
+          <a:noFill/>
+          <a:ln/>
+        </p:spPr>
+        <p:txBody>
+          <a:bodyPr wrap="none" lIns="0" tIns="0" rIns="0" bIns="0" rtlCol="0" anchor="t">
+            <a:spAutoFit/>
+          </a:bodyPr>
+          <a:lstStyle/>
+          <a:p>
+            <a:pPr marL="0" indent="0" algn="l">
+              <a:lnSpc>
+                <a:spcPts val="1100"/>
+              </a:lnSpc>
+              <a:buNone/>
+            </a:pPr>
+            <a:r>
+              <a:rPr lang="en-US" sz="1000" b="1" dirty="0">
+                <a:solidFill>
+                  <a:schemeClr val="accent2">
+                    <a:lumMod val="60000"/>
+                    <a:lumOff val="40000"/>
+                  </a:schemeClr>
+                </a:solidFill>
+              </a:rPr>
+              <a:t>OBJETIVO:</a:t>
+            </a:r>
+          </a:p>
+        </p:txBody>
+      </p:sp>
+      <p:sp>
+        <p:nvSpPr>
+          <p:cNvPr id="19" name="Text 13"/>
+          <p:cNvSpPr/>
+          <p:nvPr/>
+        </p:nvSpPr>
+        <p:spPr>
+          <a:xfrm>
+            <a:off x="3535654" y="3969776"/>
+            <a:ext cx="4284827" cy="141064"/>
+          </a:xfrm>
+          <a:prstGeom prst="rect">
+            <a:avLst/>
+          </a:prstGeom>
+          <a:noFill/>
+          <a:ln/>
+        </p:spPr>
+        <p:txBody>
+          <a:bodyPr wrap="none" lIns="0" tIns="0" rIns="0" bIns="0" rtlCol="0" anchor="t">
+            <a:spAutoFit/>
+          </a:bodyPr>
+          <a:lstStyle/>
+          <a:p>
+            <a:pPr marL="0" indent="0" algn="l">
+              <a:lnSpc>
+                <a:spcPts val="1100"/>
+              </a:lnSpc>
+              <a:buNone/>
+            </a:pPr>
+            <a:r>
+              <a:rPr lang="en-US" sz="1000" dirty="0">
+                <a:solidFill>
+                  <a:schemeClr val="accent2">
+                    <a:lumMod val="60000"/>
+                    <a:lumOff val="40000"/>
+                  </a:schemeClr>
+                </a:solidFill>
+              </a:rPr>
+              <a:t>Entender SPKI pinning desde una perspectiva de arquitectura y operación robusta,</a:t>
+            </a:r>
+          </a:p>
+        </p:txBody>
+      </p:sp>
+      <p:sp>
+        <p:nvSpPr>
+          <p:cNvPr id="20" name="Text 14"/>
+          <p:cNvSpPr/>
+          <p:nvPr/>
+        </p:nvSpPr>
+        <p:spPr>
+          <a:xfrm>
+            <a:off x="3535654" y="4125153"/>
+            <a:ext cx="2579232" cy="141064"/>
+          </a:xfrm>
+          <a:prstGeom prst="rect">
+            <a:avLst/>
+          </a:prstGeom>
+          <a:noFill/>
+          <a:ln/>
+        </p:spPr>
+        <p:txBody>
+          <a:bodyPr wrap="none" lIns="0" tIns="0" rIns="0" bIns="0" rtlCol="0" anchor="t">
+            <a:spAutoFit/>
+          </a:bodyPr>
+          <a:lstStyle/>
+          <a:p>
+            <a:pPr marL="0" indent="0" algn="l">
+              <a:lnSpc>
+                <a:spcPts val="1100"/>
+              </a:lnSpc>
+              <a:buNone/>
+            </a:pPr>
+            <a:r>
+              <a:rPr lang="en-US" sz="1000" dirty="0">
+                <a:solidFill>
+                  <a:schemeClr val="accent2">
+                    <a:lumMod val="60000"/>
+                    <a:lumOff val="40000"/>
+                  </a:schemeClr>
+                </a:solidFill>
+              </a:rPr>
+              <a:t>superando la visión de "solo una línea de código".</a:t>
+            </a:r>
+          </a:p>
+        </p:txBody>
+      </p:sp>
+    </p:spTree>
+    <p:extLst>
+      <p:ext uri="{BB962C8B-B14F-4D97-AF65-F5344CB8AC3E}">
+        <p14:creationId xmlns:p14="http://schemas.microsoft.com/office/powerpoint/2010/main" val="2668753546"/>
+      </p:ext>
+    </p:extLst>
+  </p:cSld>
+  <p:clrMapOvr>
+    <a:masterClrMapping/>
+  </p:clrMapOvr>
+</p:sld>
+</file>
+
+<file path=ppt/slides/slide4.xml><?xml version="1.0" encoding="utf-8"?>
 <p:sld xmlns:a="http://schemas.openxmlformats.org/drawingml/2006/main" xmlns:r="http://schemas.openxmlformats.org/officeDocument/2006/relationships" xmlns:p="http://schemas.openxmlformats.org/presentationml/2006/main">
   <p:cSld name="Slide 2">
     <p:spTree>
@@ -8475,7 +11893,7 @@
         <p:spPr>
           <a:xfrm>
             <a:off x="214313" y="285750"/>
-            <a:ext cx="1571625" cy="685800"/>
+            <a:ext cx="806888" cy="729880"/>
           </a:xfrm>
           <a:prstGeom prst="rect">
             <a:avLst/>
@@ -8496,14 +11914,22 @@
               <a:buNone/>
             </a:pPr>
             <a:r>
-              <a:rPr lang="en-US" sz="6218" b="1" kern="0" spc="-4" dirty="0">
-                <a:solidFill>
-                  <a:srgbClr val="F5F5F5"/>
-                </a:solidFill>
-              </a:rPr>
-              <a:t>02</a:t>
-            </a:r>
-            <a:endParaRPr lang="en-US" sz="6218" dirty="0"/>
+              <a:rPr lang="en-US" sz="6218" b="1" kern="0" spc="-4">
+                <a:solidFill>
+                  <a:schemeClr val="accent2">
+                    <a:lumMod val="75000"/>
+                  </a:schemeClr>
+                </a:solidFill>
+              </a:rPr>
+              <a:t>03</a:t>
+            </a:r>
+            <a:endParaRPr lang="en-US" sz="6218" b="1" kern="0" spc="-4" dirty="0">
+              <a:solidFill>
+                <a:schemeClr val="accent2">
+                  <a:lumMod val="75000"/>
+                </a:schemeClr>
+              </a:solidFill>
+            </a:endParaRPr>
           </a:p>
         </p:txBody>
       </p:sp>
@@ -9343,7 +12769,7 @@
 </p:sld>
 </file>
 
-<file path=ppt/slides/slide3.xml><?xml version="1.0" encoding="utf-8"?>
+<file path=ppt/slides/slide5.xml><?xml version="1.0" encoding="utf-8"?>
 <p:sld xmlns:a="http://schemas.openxmlformats.org/drawingml/2006/main" xmlns:r="http://schemas.openxmlformats.org/officeDocument/2006/relationships" xmlns:p="http://schemas.openxmlformats.org/presentationml/2006/main">
   <p:cSld name="Slide 3">
     <p:spTree>
@@ -9447,7 +12873,7 @@
         <p:spPr>
           <a:xfrm>
             <a:off x="214313" y="285750"/>
-            <a:ext cx="1571625" cy="685800"/>
+            <a:ext cx="806888" cy="729880"/>
           </a:xfrm>
           <a:prstGeom prst="rect">
             <a:avLst/>
@@ -9468,14 +12894,22 @@
               <a:buNone/>
             </a:pPr>
             <a:r>
-              <a:rPr lang="en-US" sz="6218" b="1" kern="0" spc="-4" dirty="0">
-                <a:solidFill>
-                  <a:srgbClr val="F5F5F5"/>
-                </a:solidFill>
-              </a:rPr>
-              <a:t>03</a:t>
-            </a:r>
-            <a:endParaRPr lang="en-US" sz="6218" dirty="0"/>
+              <a:rPr lang="en-US" sz="6218" b="1" kern="0" spc="-4">
+                <a:solidFill>
+                  <a:schemeClr val="accent2">
+                    <a:lumMod val="75000"/>
+                  </a:schemeClr>
+                </a:solidFill>
+              </a:rPr>
+              <a:t>04</a:t>
+            </a:r>
+            <a:endParaRPr lang="en-US" sz="6218" b="1" kern="0" spc="-4" dirty="0">
+              <a:solidFill>
+                <a:schemeClr val="accent2">
+                  <a:lumMod val="75000"/>
+                </a:schemeClr>
+              </a:solidFill>
+            </a:endParaRPr>
           </a:p>
         </p:txBody>
       </p:sp>
@@ -9571,7 +13005,7 @@
         </p:nvSpPr>
         <p:spPr>
           <a:xfrm>
-            <a:off x="2428875" y="1237264"/>
+            <a:off x="2428875" y="1001050"/>
             <a:ext cx="6286500" cy="233958"/>
           </a:xfrm>
           <a:prstGeom prst="rect">
@@ -9612,7 +13046,7 @@
         </p:nvSpPr>
         <p:spPr>
           <a:xfrm>
-            <a:off x="2428875" y="1785547"/>
+            <a:off x="2428875" y="1663627"/>
             <a:ext cx="6286500" cy="2000250"/>
           </a:xfrm>
           <a:prstGeom prst="rect">
@@ -9652,8 +13086,8 @@
         </p:blipFill>
         <p:spPr>
           <a:xfrm>
-            <a:off x="3780858" y="1785547"/>
-            <a:ext cx="3582535" cy="2000222"/>
+            <a:off x="3230880" y="1740747"/>
+            <a:ext cx="4477173" cy="1864312"/>
           </a:xfrm>
           <a:prstGeom prst="rect">
             <a:avLst/>
@@ -10188,7 +13622,7 @@
 </p:sld>
 </file>
 
-<file path=ppt/slides/slide4.xml><?xml version="1.0" encoding="utf-8"?>
+<file path=ppt/slides/slide6.xml><?xml version="1.0" encoding="utf-8"?>
 <p:sld xmlns:a="http://schemas.openxmlformats.org/drawingml/2006/main" xmlns:r="http://schemas.openxmlformats.org/officeDocument/2006/relationships" xmlns:p="http://schemas.openxmlformats.org/presentationml/2006/main">
   <p:cSld name="Slide 4">
     <p:spTree>
@@ -10292,7 +13726,7 @@
         <p:spPr>
           <a:xfrm>
             <a:off x="214313" y="285750"/>
-            <a:ext cx="1571625" cy="685800"/>
+            <a:ext cx="806888" cy="729880"/>
           </a:xfrm>
           <a:prstGeom prst="rect">
             <a:avLst/>
@@ -10313,14 +13747,22 @@
               <a:buNone/>
             </a:pPr>
             <a:r>
-              <a:rPr lang="en-US" sz="6218" b="1" kern="0" spc="-4" dirty="0">
-                <a:solidFill>
-                  <a:srgbClr val="F5F5F5"/>
-                </a:solidFill>
-              </a:rPr>
-              <a:t>04</a:t>
-            </a:r>
-            <a:endParaRPr lang="en-US" sz="6218" dirty="0"/>
+              <a:rPr lang="en-US" sz="6218" b="1" kern="0" spc="-4">
+                <a:solidFill>
+                  <a:schemeClr val="accent2">
+                    <a:lumMod val="75000"/>
+                  </a:schemeClr>
+                </a:solidFill>
+              </a:rPr>
+              <a:t>05</a:t>
+            </a:r>
+            <a:endParaRPr lang="en-US" sz="6218" b="1" kern="0" spc="-4" dirty="0">
+              <a:solidFill>
+                <a:schemeClr val="accent2">
+                  <a:lumMod val="75000"/>
+                </a:schemeClr>
+              </a:solidFill>
+            </a:endParaRPr>
           </a:p>
         </p:txBody>
       </p:sp>
@@ -10896,7 +14338,7 @@
 </p:sld>
 </file>
 
-<file path=ppt/slides/slide5.xml><?xml version="1.0" encoding="utf-8"?>
+<file path=ppt/slides/slide7.xml><?xml version="1.0" encoding="utf-8"?>
 <p:sld xmlns:a="http://schemas.openxmlformats.org/drawingml/2006/main" xmlns:r="http://schemas.openxmlformats.org/officeDocument/2006/relationships" xmlns:p="http://schemas.openxmlformats.org/presentationml/2006/main">
   <p:cSld name="Slide 5">
     <p:spTree>
@@ -11000,7 +14442,7 @@
         <p:spPr>
           <a:xfrm>
             <a:off x="214313" y="285750"/>
-            <a:ext cx="1571625" cy="685800"/>
+            <a:ext cx="806888" cy="729880"/>
           </a:xfrm>
           <a:prstGeom prst="rect">
             <a:avLst/>
@@ -11021,14 +14463,22 @@
               <a:buNone/>
             </a:pPr>
             <a:r>
-              <a:rPr lang="en-US" sz="6218" b="1" kern="0" spc="-4" dirty="0">
-                <a:solidFill>
-                  <a:srgbClr val="F5F5F5"/>
-                </a:solidFill>
-              </a:rPr>
-              <a:t>05</a:t>
-            </a:r>
-            <a:endParaRPr lang="en-US" sz="6218" dirty="0"/>
+              <a:rPr lang="en-US" sz="6218" b="1" kern="0" spc="-4">
+                <a:solidFill>
+                  <a:schemeClr val="accent2">
+                    <a:lumMod val="75000"/>
+                  </a:schemeClr>
+                </a:solidFill>
+              </a:rPr>
+              <a:t>06</a:t>
+            </a:r>
+            <a:endParaRPr lang="en-US" sz="6218" b="1" kern="0" spc="-4" dirty="0">
+              <a:solidFill>
+                <a:schemeClr val="accent2">
+                  <a:lumMod val="75000"/>
+                </a:schemeClr>
+              </a:solidFill>
+            </a:endParaRPr>
           </a:p>
         </p:txBody>
       </p:sp>
@@ -11621,7 +15071,7 @@
 </p:sld>
 </file>
 
-<file path=ppt/slides/slide6.xml><?xml version="1.0" encoding="utf-8"?>
+<file path=ppt/slides/slide8.xml><?xml version="1.0" encoding="utf-8"?>
 <p:sld xmlns:a="http://schemas.openxmlformats.org/drawingml/2006/main" xmlns:r="http://schemas.openxmlformats.org/officeDocument/2006/relationships" xmlns:p="http://schemas.openxmlformats.org/presentationml/2006/main">
   <p:cSld name="Slide 6">
     <p:spTree>
@@ -11725,7 +15175,7 @@
         <p:spPr>
           <a:xfrm>
             <a:off x="214313" y="285750"/>
-            <a:ext cx="1571625" cy="685800"/>
+            <a:ext cx="806888" cy="729880"/>
           </a:xfrm>
           <a:prstGeom prst="rect">
             <a:avLst/>
@@ -11746,14 +15196,22 @@
               <a:buNone/>
             </a:pPr>
             <a:r>
-              <a:rPr lang="en-US" sz="6218" b="1" kern="0" spc="-4" dirty="0">
-                <a:solidFill>
-                  <a:srgbClr val="F5F5F5"/>
-                </a:solidFill>
-              </a:rPr>
-              <a:t>06</a:t>
-            </a:r>
-            <a:endParaRPr lang="en-US" sz="6218" dirty="0"/>
+              <a:rPr lang="en-US" sz="6218" b="1" kern="0" spc="-4">
+                <a:solidFill>
+                  <a:schemeClr val="accent2">
+                    <a:lumMod val="75000"/>
+                  </a:schemeClr>
+                </a:solidFill>
+              </a:rPr>
+              <a:t>07</a:t>
+            </a:r>
+            <a:endParaRPr lang="en-US" sz="6218" b="1" kern="0" spc="-4" dirty="0">
+              <a:solidFill>
+                <a:schemeClr val="accent2">
+                  <a:lumMod val="75000"/>
+                </a:schemeClr>
+              </a:solidFill>
+            </a:endParaRPr>
           </a:p>
         </p:txBody>
       </p:sp>
@@ -12109,7 +15567,7 @@
         <p:spPr>
           <a:xfrm>
             <a:off x="5943600" y="1931296"/>
-            <a:ext cx="2400300" cy="312539"/>
+            <a:ext cx="1880515" cy="265778"/>
           </a:xfrm>
           <a:prstGeom prst="rect">
             <a:avLst/>
@@ -12135,7 +15593,15 @@
                   <a:srgbClr val="111111"/>
                 </a:solidFill>
               </a:rPr>
-              <a:t>Pin Respaldo (B)</a:t>
+              <a:t>Pin Respaldo (</a:t>
+            </a:r>
+            <a:r>
+              <a:rPr lang="en-US" sz="1602" b="1">
+                <a:solidFill>
+                  <a:srgbClr val="111111"/>
+                </a:solidFill>
+              </a:rPr>
+              <a:t>B) (C) …</a:t>
             </a:r>
             <a:endParaRPr lang="en-US" sz="1602" dirty="0"/>
           </a:p>
@@ -12366,7 +15832,7 @@
 </p:sld>
 </file>
 
-<file path=ppt/slides/slide7.xml><?xml version="1.0" encoding="utf-8"?>
+<file path=ppt/slides/slide9.xml><?xml version="1.0" encoding="utf-8"?>
 <p:sld xmlns:a="http://schemas.openxmlformats.org/drawingml/2006/main" xmlns:r="http://schemas.openxmlformats.org/officeDocument/2006/relationships" xmlns:p="http://schemas.openxmlformats.org/presentationml/2006/main">
   <p:cSld name="Slide 7">
     <p:spTree>
@@ -12470,7 +15936,7 @@
         <p:spPr>
           <a:xfrm>
             <a:off x="214313" y="285750"/>
-            <a:ext cx="1571625" cy="685800"/>
+            <a:ext cx="806888" cy="729880"/>
           </a:xfrm>
           <a:prstGeom prst="rect">
             <a:avLst/>
@@ -12491,14 +15957,22 @@
               <a:buNone/>
             </a:pPr>
             <a:r>
-              <a:rPr lang="en-US" sz="6218" b="1" kern="0" spc="-4" dirty="0">
-                <a:solidFill>
-                  <a:srgbClr val="F5F5F5"/>
-                </a:solidFill>
-              </a:rPr>
-              <a:t>07</a:t>
-            </a:r>
-            <a:endParaRPr lang="en-US" sz="6218" dirty="0"/>
+              <a:rPr lang="en-US" sz="6218" b="1" kern="0" spc="-4">
+                <a:solidFill>
+                  <a:schemeClr val="accent2">
+                    <a:lumMod val="75000"/>
+                  </a:schemeClr>
+                </a:solidFill>
+              </a:rPr>
+              <a:t>08</a:t>
+            </a:r>
+            <a:endParaRPr lang="en-US" sz="6218" b="1" kern="0" spc="-4" dirty="0">
+              <a:solidFill>
+                <a:schemeClr val="accent2">
+                  <a:lumMod val="75000"/>
+                </a:schemeClr>
+              </a:solidFill>
+            </a:endParaRPr>
           </a:p>
         </p:txBody>
       </p:sp>
@@ -13433,1972 +16907,6 @@
               </a:rPr>
               <a:t>.
  El ciclo se repite: B es activo, C es backup.</a:t>
-            </a:r>
-            <a:endParaRPr lang="en-US" sz="834" dirty="0"/>
-          </a:p>
-        </p:txBody>
-      </p:sp>
-    </p:spTree>
-  </p:cSld>
-  <p:clrMapOvr>
-    <a:masterClrMapping/>
-  </p:clrMapOvr>
-</p:sld>
-</file>
-
-<file path=ppt/slides/slide8.xml><?xml version="1.0" encoding="utf-8"?>
-<p:sld xmlns:a="http://schemas.openxmlformats.org/drawingml/2006/main" xmlns:r="http://schemas.openxmlformats.org/officeDocument/2006/relationships" xmlns:p="http://schemas.openxmlformats.org/presentationml/2006/main">
-  <p:cSld name="Slide 8">
-    <p:spTree>
-      <p:nvGrpSpPr>
-        <p:cNvPr id="1" name=""/>
-        <p:cNvGrpSpPr/>
-        <p:nvPr/>
-      </p:nvGrpSpPr>
-      <p:grpSpPr>
-        <a:xfrm>
-          <a:off x="0" y="0"/>
-          <a:ext cx="0" cy="0"/>
-          <a:chOff x="0" y="0"/>
-          <a:chExt cx="0" cy="0"/>
-        </a:xfrm>
-      </p:grpSpPr>
-      <p:pic>
-        <p:nvPicPr>
-          <p:cNvPr id="2" name="Image 0" descr="preencoded.png"/>
-          <p:cNvPicPr>
-            <a:picLocks noChangeAspect="1"/>
-          </p:cNvPicPr>
-          <p:nvPr/>
-        </p:nvPicPr>
-        <p:blipFill>
-          <a:blip r:embed="rId3"/>
-          <a:stretch>
-            <a:fillRect/>
-          </a:stretch>
-        </p:blipFill>
-        <p:spPr>
-          <a:xfrm>
-            <a:off x="0" y="0"/>
-            <a:ext cx="9144000" cy="5143500"/>
-          </a:xfrm>
-          <a:prstGeom prst="rect">
-            <a:avLst/>
-          </a:prstGeom>
-        </p:spPr>
-      </p:pic>
-      <p:sp>
-        <p:nvSpPr>
-          <p:cNvPr id="3" name="Shape 0"/>
-          <p:cNvSpPr/>
-          <p:nvPr/>
-        </p:nvSpPr>
-        <p:spPr>
-          <a:xfrm>
-            <a:off x="0" y="0"/>
-            <a:ext cx="2000250" cy="5143500"/>
-          </a:xfrm>
-          <a:prstGeom prst="rect">
-            <a:avLst/>
-          </a:prstGeom>
-          <a:solidFill>
-            <a:srgbClr val="111111"/>
-          </a:solidFill>
-          <a:ln/>
-        </p:spPr>
-        <p:txBody>
-          <a:bodyPr/>
-          <a:lstStyle/>
-          <a:p>
-            <a:endParaRPr lang="es-CL"/>
-          </a:p>
-        </p:txBody>
-      </p:sp>
-      <p:sp>
-        <p:nvSpPr>
-          <p:cNvPr id="4" name="Shape 1"/>
-          <p:cNvSpPr/>
-          <p:nvPr/>
-        </p:nvSpPr>
-        <p:spPr>
-          <a:xfrm>
-            <a:off x="1971675" y="0"/>
-            <a:ext cx="28575" cy="5143500"/>
-          </a:xfrm>
-          <a:prstGeom prst="rect">
-            <a:avLst/>
-          </a:prstGeom>
-          <a:solidFill>
-            <a:srgbClr val="111111"/>
-          </a:solidFill>
-          <a:ln/>
-        </p:spPr>
-        <p:txBody>
-          <a:bodyPr/>
-          <a:lstStyle/>
-          <a:p>
-            <a:endParaRPr lang="es-CL"/>
-          </a:p>
-        </p:txBody>
-      </p:sp>
-      <p:sp>
-        <p:nvSpPr>
-          <p:cNvPr id="5" name="Text 2"/>
-          <p:cNvSpPr/>
-          <p:nvPr/>
-        </p:nvSpPr>
-        <p:spPr>
-          <a:xfrm>
-            <a:off x="142875" y="285750"/>
-            <a:ext cx="1714500" cy="685800"/>
-          </a:xfrm>
-          <a:prstGeom prst="rect">
-            <a:avLst/>
-          </a:prstGeom>
-          <a:noFill/>
-          <a:ln/>
-        </p:spPr>
-        <p:txBody>
-          <a:bodyPr wrap="none" lIns="0" tIns="0" rIns="0" bIns="0" rtlCol="0" anchor="t">
-            <a:spAutoFit/>
-          </a:bodyPr>
-          <a:lstStyle/>
-          <a:p>
-            <a:pPr marL="0" indent="0" algn="l">
-              <a:lnSpc>
-                <a:spcPts val="5400"/>
-              </a:lnSpc>
-              <a:buNone/>
-            </a:pPr>
-            <a:r>
-              <a:rPr lang="en-US" sz="6218" b="1" kern="0" spc="-4" dirty="0">
-                <a:solidFill>
-                  <a:srgbClr val="F5F5F5"/>
-                </a:solidFill>
-              </a:rPr>
-              <a:t>08</a:t>
-            </a:r>
-            <a:endParaRPr lang="en-US" sz="6218" dirty="0"/>
-          </a:p>
-        </p:txBody>
-      </p:sp>
-      <p:sp>
-        <p:nvSpPr>
-          <p:cNvPr id="6" name="Text 3"/>
-          <p:cNvSpPr/>
-          <p:nvPr/>
-        </p:nvSpPr>
-        <p:spPr>
-          <a:xfrm>
-            <a:off x="142875" y="4825603"/>
-            <a:ext cx="1714500" cy="175022"/>
-          </a:xfrm>
-          <a:prstGeom prst="rect">
-            <a:avLst/>
-          </a:prstGeom>
-          <a:noFill/>
-          <a:ln/>
-        </p:spPr>
-        <p:txBody>
-          <a:bodyPr wrap="none" lIns="0" tIns="0" rIns="0" bIns="0" rtlCol="0" anchor="t">
-            <a:spAutoFit/>
-          </a:bodyPr>
-          <a:lstStyle/>
-          <a:p>
-            <a:pPr marL="0" indent="0" algn="l">
-              <a:lnSpc>
-                <a:spcPts val="1200"/>
-              </a:lnSpc>
-              <a:buNone/>
-            </a:pPr>
-            <a:r>
-              <a:rPr lang="en-US" sz="942" kern="0" spc="2" dirty="0">
-                <a:solidFill>
-                  <a:srgbClr val="F5F5F5">
-                    <a:alpha val="80000"/>
-                  </a:srgbClr>
-                </a:solidFill>
-              </a:rPr>
-              <a:t>Android NSC</a:t>
-            </a:r>
-            <a:endParaRPr lang="en-US" sz="942" dirty="0"/>
-          </a:p>
-        </p:txBody>
-      </p:sp>
-      <p:sp>
-        <p:nvSpPr>
-          <p:cNvPr id="7" name="Text 4"/>
-          <p:cNvSpPr/>
-          <p:nvPr/>
-        </p:nvSpPr>
-        <p:spPr>
-          <a:xfrm>
-            <a:off x="2428875" y="285750"/>
-            <a:ext cx="6286500" cy="377168"/>
-          </a:xfrm>
-          <a:prstGeom prst="rect">
-            <a:avLst/>
-          </a:prstGeom>
-          <a:noFill/>
-          <a:ln/>
-        </p:spPr>
-        <p:txBody>
-          <a:bodyPr wrap="none" lIns="0" tIns="0" rIns="0" bIns="0" rtlCol="0" anchor="t">
-            <a:spAutoFit/>
-          </a:bodyPr>
-          <a:lstStyle/>
-          <a:p>
-            <a:pPr marL="0" indent="0" algn="l">
-              <a:lnSpc>
-                <a:spcPts val="3000"/>
-              </a:lnSpc>
-              <a:buNone/>
-            </a:pPr>
-            <a:r>
-              <a:rPr lang="en-US" sz="2436" b="1" kern="0" spc="-1" dirty="0">
-                <a:solidFill>
-                  <a:srgbClr val="111111"/>
-                </a:solidFill>
-              </a:rPr>
-              <a:t>Android: Enfoque Recomendado</a:t>
-            </a:r>
-            <a:endParaRPr lang="en-US" sz="2436" dirty="0"/>
-          </a:p>
-        </p:txBody>
-      </p:sp>
-      <p:sp>
-        <p:nvSpPr>
-          <p:cNvPr id="8" name="Text 5"/>
-          <p:cNvSpPr/>
-          <p:nvPr/>
-        </p:nvSpPr>
-        <p:spPr>
-          <a:xfrm>
-            <a:off x="2428875" y="734355"/>
-            <a:ext cx="6286500" cy="194667"/>
-          </a:xfrm>
-          <a:prstGeom prst="rect">
-            <a:avLst/>
-          </a:prstGeom>
-          <a:noFill/>
-          <a:ln/>
-        </p:spPr>
-        <p:txBody>
-          <a:bodyPr wrap="none" lIns="0" tIns="0" rIns="0" bIns="0" rtlCol="0" anchor="t">
-            <a:spAutoFit/>
-          </a:bodyPr>
-          <a:lstStyle/>
-          <a:p>
-            <a:pPr marL="0" indent="0" algn="l">
-              <a:lnSpc>
-                <a:spcPts val="1400"/>
-              </a:lnSpc>
-              <a:buNone/>
-            </a:pPr>
-            <a:r>
-              <a:rPr lang="en-US" sz="987" b="1" dirty="0">
-                <a:solidFill>
-                  <a:srgbClr val="0044CC"/>
-                </a:solidFill>
-              </a:rPr>
-              <a:t>Network Security Configuration (NSC)</a:t>
-            </a:r>
-            <a:endParaRPr lang="en-US" sz="987" dirty="0"/>
-          </a:p>
-        </p:txBody>
-      </p:sp>
-      <p:pic>
-        <p:nvPicPr>
-          <p:cNvPr id="9" name="Image 1" descr="preencoded.png"/>
-          <p:cNvPicPr>
-            <a:picLocks noChangeAspect="1"/>
-          </p:cNvPicPr>
-          <p:nvPr/>
-        </p:nvPicPr>
-        <p:blipFill>
-          <a:blip r:embed="rId4"/>
-          <a:stretch>
-            <a:fillRect/>
-          </a:stretch>
-        </p:blipFill>
-        <p:spPr>
-          <a:xfrm>
-            <a:off x="2428875" y="1214772"/>
-            <a:ext cx="96441" cy="128588"/>
-          </a:xfrm>
-          <a:prstGeom prst="rect">
-            <a:avLst/>
-          </a:prstGeom>
-        </p:spPr>
-      </p:pic>
-      <p:sp>
-        <p:nvSpPr>
-          <p:cNvPr id="10" name="Text 6"/>
-          <p:cNvSpPr/>
-          <p:nvPr/>
-        </p:nvSpPr>
-        <p:spPr>
-          <a:xfrm>
-            <a:off x="2611041" y="1186197"/>
-            <a:ext cx="2875359" cy="540051"/>
-          </a:xfrm>
-          <a:prstGeom prst="rect">
-            <a:avLst/>
-          </a:prstGeom>
-          <a:noFill/>
-          <a:ln/>
-        </p:spPr>
-        <p:txBody>
-          <a:bodyPr wrap="square" lIns="0" tIns="0" rIns="0" bIns="0" rtlCol="0" anchor="t">
-            <a:spAutoFit/>
-          </a:bodyPr>
-          <a:lstStyle/>
-          <a:p>
-            <a:pPr marL="0" indent="0" algn="l">
-              <a:lnSpc>
-                <a:spcPts val="1400"/>
-              </a:lnSpc>
-              <a:buNone/>
-            </a:pPr>
-            <a:r>
-              <a:rPr lang="en-US" sz="885" b="1" dirty="0">
-                <a:solidFill>
-                  <a:srgbClr val="111111"/>
-                </a:solidFill>
-              </a:rPr>
-              <a:t>Declarativo (XML)</a:t>
-            </a:r>
-            <a:r>
-              <a:rPr lang="en-US" sz="942" dirty="0">
-                <a:solidFill>
-                  <a:srgbClr val="111111"/>
-                </a:solidFill>
-              </a:rPr>
-              <a:t>
-Configuración separada del código, reduciendo errores de implementación.</a:t>
-            </a:r>
-            <a:endParaRPr lang="en-US" sz="885" dirty="0"/>
-          </a:p>
-        </p:txBody>
-      </p:sp>
-      <p:pic>
-        <p:nvPicPr>
-          <p:cNvPr id="11" name="Image 2" descr="preencoded.png"/>
-          <p:cNvPicPr>
-            <a:picLocks noChangeAspect="1"/>
-          </p:cNvPicPr>
-          <p:nvPr/>
-        </p:nvPicPr>
-        <p:blipFill>
-          <a:blip r:embed="rId5"/>
-          <a:stretch>
-            <a:fillRect/>
-          </a:stretch>
-        </p:blipFill>
-        <p:spPr>
-          <a:xfrm>
-            <a:off x="2428875" y="1840548"/>
-            <a:ext cx="128588" cy="128588"/>
-          </a:xfrm>
-          <a:prstGeom prst="rect">
-            <a:avLst/>
-          </a:prstGeom>
-        </p:spPr>
-      </p:pic>
-      <p:sp>
-        <p:nvSpPr>
-          <p:cNvPr id="12" name="Text 7"/>
-          <p:cNvSpPr/>
-          <p:nvPr/>
-        </p:nvSpPr>
-        <p:spPr>
-          <a:xfrm>
-            <a:off x="2643188" y="1811973"/>
-            <a:ext cx="2843213" cy="540051"/>
-          </a:xfrm>
-          <a:prstGeom prst="rect">
-            <a:avLst/>
-          </a:prstGeom>
-          <a:noFill/>
-          <a:ln/>
-        </p:spPr>
-        <p:txBody>
-          <a:bodyPr wrap="square" lIns="0" tIns="0" rIns="0" bIns="0" rtlCol="0" anchor="t">
-            <a:spAutoFit/>
-          </a:bodyPr>
-          <a:lstStyle/>
-          <a:p>
-            <a:pPr marL="0" indent="0" algn="l">
-              <a:lnSpc>
-                <a:spcPts val="1400"/>
-              </a:lnSpc>
-              <a:buNone/>
-            </a:pPr>
-            <a:r>
-              <a:rPr lang="en-US" sz="885" b="1" dirty="0">
-                <a:solidFill>
-                  <a:srgbClr val="111111"/>
-                </a:solidFill>
-              </a:rPr>
-              <a:t>Soporte Multi-Pin</a:t>
-            </a:r>
-            <a:r>
-              <a:rPr lang="en-US" sz="942" dirty="0">
-                <a:solidFill>
-                  <a:srgbClr val="111111"/>
-                </a:solidFill>
-              </a:rPr>
-              <a:t>
-Nativo para definir PinA (Activo) y PinB (Backup).</a:t>
-            </a:r>
-            <a:endParaRPr lang="en-US" sz="885" dirty="0"/>
-          </a:p>
-        </p:txBody>
-      </p:sp>
-      <p:pic>
-        <p:nvPicPr>
-          <p:cNvPr id="13" name="Image 3" descr="preencoded.png"/>
-          <p:cNvPicPr>
-            <a:picLocks noChangeAspect="1"/>
-          </p:cNvPicPr>
-          <p:nvPr/>
-        </p:nvPicPr>
-        <p:blipFill>
-          <a:blip r:embed="rId6"/>
-          <a:stretch>
-            <a:fillRect/>
-          </a:stretch>
-        </p:blipFill>
-        <p:spPr>
-          <a:xfrm>
-            <a:off x="2428875" y="2466324"/>
-            <a:ext cx="96441" cy="128588"/>
-          </a:xfrm>
-          <a:prstGeom prst="rect">
-            <a:avLst/>
-          </a:prstGeom>
-        </p:spPr>
-      </p:pic>
-      <p:sp>
-        <p:nvSpPr>
-          <p:cNvPr id="14" name="Text 8"/>
-          <p:cNvSpPr/>
-          <p:nvPr/>
-        </p:nvSpPr>
-        <p:spPr>
-          <a:xfrm>
-            <a:off x="2611041" y="2437749"/>
-            <a:ext cx="2875359" cy="540051"/>
-          </a:xfrm>
-          <a:prstGeom prst="rect">
-            <a:avLst/>
-          </a:prstGeom>
-          <a:noFill/>
-          <a:ln/>
-        </p:spPr>
-        <p:txBody>
-          <a:bodyPr wrap="square" lIns="0" tIns="0" rIns="0" bIns="0" rtlCol="0" anchor="t">
-            <a:spAutoFit/>
-          </a:bodyPr>
-          <a:lstStyle/>
-          <a:p>
-            <a:pPr marL="0" indent="0" algn="l">
-              <a:lnSpc>
-                <a:spcPts val="1400"/>
-              </a:lnSpc>
-              <a:buNone/>
-            </a:pPr>
-            <a:r>
-              <a:rPr lang="en-US" sz="885" b="1" dirty="0">
-                <a:solidFill>
-                  <a:srgbClr val="111111"/>
-                </a:solidFill>
-              </a:rPr>
-              <a:t>Expiración de Pin-Set</a:t>
-            </a:r>
-            <a:r>
-              <a:rPr lang="en-US" sz="942" dirty="0">
-                <a:solidFill>
-                  <a:srgbClr val="111111"/>
-                </a:solidFill>
-              </a:rPr>
-              <a:t>
-Fuerza la revisión periódica y evita bloqueos eternos.</a:t>
-            </a:r>
-            <a:endParaRPr lang="en-US" sz="885" dirty="0"/>
-          </a:p>
-        </p:txBody>
-      </p:sp>
-      <p:sp>
-        <p:nvSpPr>
-          <p:cNvPr id="15" name="Shape 9"/>
-          <p:cNvSpPr/>
-          <p:nvPr/>
-        </p:nvSpPr>
-        <p:spPr>
-          <a:xfrm>
-            <a:off x="2428875" y="3192112"/>
-            <a:ext cx="3057525" cy="1131503"/>
-          </a:xfrm>
-          <a:prstGeom prst="rect">
-            <a:avLst/>
-          </a:prstGeom>
-          <a:solidFill>
-            <a:srgbClr val="111111"/>
-          </a:solidFill>
-          <a:ln/>
-        </p:spPr>
-        <p:txBody>
-          <a:bodyPr/>
-          <a:lstStyle/>
-          <a:p>
-            <a:endParaRPr lang="es-CL"/>
-          </a:p>
-        </p:txBody>
-      </p:sp>
-      <p:sp>
-        <p:nvSpPr>
-          <p:cNvPr id="16" name="Shape 10"/>
-          <p:cNvSpPr/>
-          <p:nvPr/>
-        </p:nvSpPr>
-        <p:spPr>
-          <a:xfrm>
-            <a:off x="2428875" y="3192112"/>
-            <a:ext cx="42863" cy="1131503"/>
-          </a:xfrm>
-          <a:prstGeom prst="rect">
-            <a:avLst/>
-          </a:prstGeom>
-          <a:solidFill>
-            <a:srgbClr val="0044CC"/>
-          </a:solidFill>
-          <a:ln/>
-        </p:spPr>
-        <p:txBody>
-          <a:bodyPr/>
-          <a:lstStyle/>
-          <a:p>
-            <a:endParaRPr lang="es-CL"/>
-          </a:p>
-        </p:txBody>
-      </p:sp>
-      <p:sp>
-        <p:nvSpPr>
-          <p:cNvPr id="17" name="Shape 11"/>
-          <p:cNvSpPr/>
-          <p:nvPr/>
-        </p:nvSpPr>
-        <p:spPr>
-          <a:xfrm>
-            <a:off x="3747176" y="3106387"/>
-            <a:ext cx="1596349" cy="165729"/>
-          </a:xfrm>
-          <a:prstGeom prst="rect">
-            <a:avLst/>
-          </a:prstGeom>
-          <a:solidFill>
-            <a:srgbClr val="0044CC"/>
-          </a:solidFill>
-          <a:ln/>
-        </p:spPr>
-        <p:txBody>
-          <a:bodyPr/>
-          <a:lstStyle/>
-          <a:p>
-            <a:endParaRPr lang="es-CL"/>
-          </a:p>
-        </p:txBody>
-      </p:sp>
-      <p:sp>
-        <p:nvSpPr>
-          <p:cNvPr id="18" name="Text 12"/>
-          <p:cNvSpPr/>
-          <p:nvPr/>
-        </p:nvSpPr>
-        <p:spPr>
-          <a:xfrm>
-            <a:off x="3747176" y="3106387"/>
-            <a:ext cx="1596349" cy="165729"/>
-          </a:xfrm>
-          <a:prstGeom prst="rect">
-            <a:avLst/>
-          </a:prstGeom>
-          <a:noFill/>
-          <a:ln/>
-        </p:spPr>
-        <p:txBody>
-          <a:bodyPr wrap="none" lIns="85090" tIns="17018" rIns="85090" bIns="17018" rtlCol="0" anchor="t">
-            <a:spAutoFit/>
-          </a:bodyPr>
-          <a:lstStyle/>
-          <a:p>
-            <a:pPr marL="0" indent="0" algn="l">
-              <a:lnSpc>
-                <a:spcPts val="1100"/>
-              </a:lnSpc>
-              <a:buNone/>
-            </a:pPr>
-            <a:r>
-              <a:rPr lang="en-US" sz="584" b="1" dirty="0">
-                <a:solidFill>
-                  <a:srgbClr val="FFFFFF"/>
-                </a:solidFill>
-              </a:rPr>
-              <a:t>network_security_config.xml</a:t>
-            </a:r>
-            <a:endParaRPr lang="en-US" sz="584" dirty="0"/>
-          </a:p>
-        </p:txBody>
-      </p:sp>
-      <p:sp>
-        <p:nvSpPr>
-          <p:cNvPr id="19" name="Text 13"/>
-          <p:cNvSpPr/>
-          <p:nvPr/>
-        </p:nvSpPr>
-        <p:spPr>
-          <a:xfrm>
-            <a:off x="2514600" y="3288553"/>
-            <a:ext cx="2583526" cy="135731"/>
-          </a:xfrm>
-          <a:prstGeom prst="rect">
-            <a:avLst/>
-          </a:prstGeom>
-          <a:noFill/>
-          <a:ln/>
-        </p:spPr>
-        <p:txBody>
-          <a:bodyPr wrap="none" lIns="0" tIns="0" rIns="0" bIns="0" rtlCol="0" anchor="t">
-            <a:spAutoFit/>
-          </a:bodyPr>
-          <a:lstStyle/>
-          <a:p>
-            <a:pPr marL="0" indent="0" algn="l">
-              <a:lnSpc>
-                <a:spcPts val="1300"/>
-              </a:lnSpc>
-              <a:buNone/>
-            </a:pPr>
-            <a:r>
-              <a:rPr lang="en-US" sz="727" dirty="0">
-                <a:solidFill>
-                  <a:srgbClr val="F5F5F5"/>
-                </a:solidFill>
-              </a:rPr>
-              <a:t>&lt;domain-config&gt; &lt;domain includeSubdomains="true"&gt;</a:t>
-            </a:r>
-            <a:endParaRPr lang="en-US" sz="727" dirty="0"/>
-          </a:p>
-        </p:txBody>
-      </p:sp>
-      <p:sp>
-        <p:nvSpPr>
-          <p:cNvPr id="20" name="Text 14"/>
-          <p:cNvSpPr/>
-          <p:nvPr/>
-        </p:nvSpPr>
-        <p:spPr>
-          <a:xfrm>
-            <a:off x="2514600" y="3448562"/>
-            <a:ext cx="2634732" cy="135731"/>
-          </a:xfrm>
-          <a:prstGeom prst="rect">
-            <a:avLst/>
-          </a:prstGeom>
-          <a:noFill/>
-          <a:ln/>
-        </p:spPr>
-        <p:txBody>
-          <a:bodyPr wrap="none" lIns="0" tIns="0" rIns="0" bIns="0" rtlCol="0" anchor="t">
-            <a:spAutoFit/>
-          </a:bodyPr>
-          <a:lstStyle/>
-          <a:p>
-            <a:pPr marL="0" indent="0" algn="l">
-              <a:lnSpc>
-                <a:spcPts val="1300"/>
-              </a:lnSpc>
-              <a:buNone/>
-            </a:pPr>
-            <a:r>
-              <a:rPr lang="en-US" sz="727" dirty="0">
-                <a:solidFill>
-                  <a:srgbClr val="F5F5F5"/>
-                </a:solidFill>
-              </a:rPr>
-              <a:t>api.banco.com &lt;/domain&gt; &lt;pin-set expiration="2026-12-</a:t>
-            </a:r>
-            <a:endParaRPr lang="en-US" sz="727" dirty="0"/>
-          </a:p>
-        </p:txBody>
-      </p:sp>
-      <p:sp>
-        <p:nvSpPr>
-          <p:cNvPr id="21" name="Text 15"/>
-          <p:cNvSpPr/>
-          <p:nvPr/>
-        </p:nvSpPr>
-        <p:spPr>
-          <a:xfrm>
-            <a:off x="2514600" y="3448562"/>
-            <a:ext cx="2847175" cy="295740"/>
-          </a:xfrm>
-          <a:prstGeom prst="rect">
-            <a:avLst/>
-          </a:prstGeom>
-          <a:noFill/>
-          <a:ln/>
-        </p:spPr>
-        <p:txBody>
-          <a:bodyPr wrap="square" lIns="0" tIns="0" rIns="0" bIns="0" rtlCol="0" anchor="t">
-            <a:spAutoFit/>
-          </a:bodyPr>
-          <a:lstStyle/>
-          <a:p>
-            <a:pPr marL="0" indent="0" algn="l">
-              <a:lnSpc>
-                <a:spcPts val="1300"/>
-              </a:lnSpc>
-              <a:buNone/>
-            </a:pPr>
-            <a:r>
-              <a:rPr lang="en-US" sz="727" dirty="0">
-                <a:solidFill>
-                  <a:srgbClr val="F5F5F5"/>
-                </a:solidFill>
-              </a:rPr>
-              <a:t>31"&gt; &lt;!-- Pin A: Activo --&gt; &lt;pin digest="SHA-</a:t>
-            </a:r>
-            <a:endParaRPr lang="en-US" sz="727" dirty="0"/>
-          </a:p>
-        </p:txBody>
-      </p:sp>
-      <p:sp>
-        <p:nvSpPr>
-          <p:cNvPr id="22" name="Text 16"/>
-          <p:cNvSpPr/>
-          <p:nvPr/>
-        </p:nvSpPr>
-        <p:spPr>
-          <a:xfrm>
-            <a:off x="2514600" y="3608570"/>
-            <a:ext cx="2771580" cy="295740"/>
-          </a:xfrm>
-          <a:prstGeom prst="rect">
-            <a:avLst/>
-          </a:prstGeom>
-          <a:noFill/>
-          <a:ln/>
-        </p:spPr>
-        <p:txBody>
-          <a:bodyPr wrap="square" lIns="0" tIns="0" rIns="0" bIns="0" rtlCol="0" anchor="t">
-            <a:spAutoFit/>
-          </a:bodyPr>
-          <a:lstStyle/>
-          <a:p>
-            <a:pPr marL="0" indent="0" algn="l">
-              <a:lnSpc>
-                <a:spcPts val="1300"/>
-              </a:lnSpc>
-              <a:buNone/>
-            </a:pPr>
-            <a:r>
-              <a:rPr lang="en-US" sz="727" dirty="0">
-                <a:solidFill>
-                  <a:srgbClr val="F5F5F5"/>
-                </a:solidFill>
-              </a:rPr>
-              <a:t>256"&gt;7HIpUjXmFqg...&lt;/pin&gt; &lt;!-- Pin B: Backup --&gt; &lt;pin</a:t>
-            </a:r>
-            <a:endParaRPr lang="en-US" sz="727" dirty="0"/>
-          </a:p>
-        </p:txBody>
-      </p:sp>
-      <p:sp>
-        <p:nvSpPr>
-          <p:cNvPr id="23" name="Text 17"/>
-          <p:cNvSpPr/>
-          <p:nvPr/>
-        </p:nvSpPr>
-        <p:spPr>
-          <a:xfrm>
-            <a:off x="2514600" y="3768579"/>
-            <a:ext cx="2157385" cy="295740"/>
-          </a:xfrm>
-          <a:prstGeom prst="rect">
-            <a:avLst/>
-          </a:prstGeom>
-          <a:noFill/>
-          <a:ln/>
-        </p:spPr>
-        <p:txBody>
-          <a:bodyPr wrap="square" lIns="0" tIns="0" rIns="0" bIns="0" rtlCol="0" anchor="t">
-            <a:spAutoFit/>
-          </a:bodyPr>
-          <a:lstStyle/>
-          <a:p>
-            <a:pPr marL="0" indent="0" algn="l">
-              <a:lnSpc>
-                <a:spcPts val="1300"/>
-              </a:lnSpc>
-              <a:buNone/>
-            </a:pPr>
-            <a:r>
-              <a:rPr lang="en-US" sz="727" dirty="0">
-                <a:solidFill>
-                  <a:srgbClr val="F5F5F5"/>
-                </a:solidFill>
-              </a:rPr>
-              <a:t>digest="SHA-256"&gt;9JKL0pQvTrs...&lt;/pin&gt; &lt;/pin-set&gt;</a:t>
-            </a:r>
-            <a:endParaRPr lang="en-US" sz="727" dirty="0"/>
-          </a:p>
-        </p:txBody>
-      </p:sp>
-      <p:sp>
-        <p:nvSpPr>
-          <p:cNvPr id="24" name="Text 18"/>
-          <p:cNvSpPr/>
-          <p:nvPr/>
-        </p:nvSpPr>
-        <p:spPr>
-          <a:xfrm>
-            <a:off x="4277041" y="3928588"/>
-            <a:ext cx="835121" cy="135731"/>
-          </a:xfrm>
-          <a:prstGeom prst="rect">
-            <a:avLst/>
-          </a:prstGeom>
-          <a:noFill/>
-          <a:ln/>
-        </p:spPr>
-        <p:txBody>
-          <a:bodyPr wrap="none" lIns="0" tIns="0" rIns="0" bIns="0" rtlCol="0" anchor="t">
-            <a:spAutoFit/>
-          </a:bodyPr>
-          <a:lstStyle/>
-          <a:p>
-            <a:pPr marL="0" indent="0" algn="l">
-              <a:lnSpc>
-                <a:spcPts val="1300"/>
-              </a:lnSpc>
-              <a:buNone/>
-            </a:pPr>
-            <a:r>
-              <a:rPr lang="en-US" sz="727" dirty="0">
-                <a:solidFill>
-                  <a:srgbClr val="F5F5F5"/>
-                </a:solidFill>
-              </a:rPr>
-              <a:t>&lt;/domain-config&gt;</a:t>
-            </a:r>
-            <a:endParaRPr lang="en-US" sz="727" dirty="0"/>
-          </a:p>
-        </p:txBody>
-      </p:sp>
-      <p:sp>
-        <p:nvSpPr>
-          <p:cNvPr id="25" name="Shape 19"/>
-          <p:cNvSpPr/>
-          <p:nvPr/>
-        </p:nvSpPr>
-        <p:spPr>
-          <a:xfrm>
-            <a:off x="5657850" y="1186197"/>
-            <a:ext cx="3057525" cy="3814428"/>
-          </a:xfrm>
-          <a:prstGeom prst="rect">
-            <a:avLst/>
-          </a:prstGeom>
-          <a:solidFill>
-            <a:srgbClr val="FFFFFF"/>
-          </a:solidFill>
-          <a:ln w="18288">
-            <a:solidFill>
-              <a:srgbClr val="111111"/>
-            </a:solidFill>
-            <a:prstDash val="solid"/>
-          </a:ln>
-        </p:spPr>
-        <p:txBody>
-          <a:bodyPr/>
-          <a:lstStyle/>
-          <a:p>
-            <a:endParaRPr lang="es-CL"/>
-          </a:p>
-        </p:txBody>
-      </p:sp>
-      <p:pic>
-        <p:nvPicPr>
-          <p:cNvPr id="26" name="Image 4" descr="preencoded.png"/>
-          <p:cNvPicPr>
-            <a:picLocks noChangeAspect="1"/>
-          </p:cNvPicPr>
-          <p:nvPr/>
-        </p:nvPicPr>
-        <p:blipFill>
-          <a:blip r:embed="rId7"/>
-          <a:stretch>
-            <a:fillRect/>
-          </a:stretch>
-        </p:blipFill>
-        <p:spPr>
-          <a:xfrm>
-            <a:off x="5715000" y="1243347"/>
-            <a:ext cx="2943225" cy="3292934"/>
-          </a:xfrm>
-          <a:prstGeom prst="rect">
-            <a:avLst/>
-          </a:prstGeom>
-        </p:spPr>
-      </p:pic>
-      <p:sp>
-        <p:nvSpPr>
-          <p:cNvPr id="27" name="Text 20"/>
-          <p:cNvSpPr/>
-          <p:nvPr/>
-        </p:nvSpPr>
-        <p:spPr>
-          <a:xfrm>
-            <a:off x="5715000" y="4622006"/>
-            <a:ext cx="2943225" cy="321469"/>
-          </a:xfrm>
-          <a:prstGeom prst="rect">
-            <a:avLst/>
-          </a:prstGeom>
-          <a:noFill/>
-          <a:ln/>
-        </p:spPr>
-        <p:txBody>
-          <a:bodyPr wrap="square" lIns="0" tIns="51054" rIns="0" bIns="0" rtlCol="0" anchor="t">
-            <a:spAutoFit/>
-          </a:bodyPr>
-          <a:lstStyle/>
-          <a:p>
-            <a:pPr marL="0" indent="0" algn="l">
-              <a:lnSpc>
-                <a:spcPts val="900"/>
-              </a:lnSpc>
-              <a:buNone/>
-            </a:pPr>
-            <a:r>
-              <a:rPr lang="en-US" sz="727" dirty="0">
-                <a:solidFill>
-                  <a:srgbClr val="666666"/>
-                </a:solidFill>
-              </a:rPr>
-              <a:t>&gt; NOTA: Usar OkHttp CertificatePinner solo para casos avanzados (multi-stack).</a:t>
-            </a:r>
-            <a:endParaRPr lang="en-US" sz="727" dirty="0"/>
-          </a:p>
-        </p:txBody>
-      </p:sp>
-    </p:spTree>
-  </p:cSld>
-  <p:clrMapOvr>
-    <a:masterClrMapping/>
-  </p:clrMapOvr>
-</p:sld>
-</file>
-
-<file path=ppt/slides/slide9.xml><?xml version="1.0" encoding="utf-8"?>
-<p:sld xmlns:a="http://schemas.openxmlformats.org/drawingml/2006/main" xmlns:r="http://schemas.openxmlformats.org/officeDocument/2006/relationships" xmlns:p="http://schemas.openxmlformats.org/presentationml/2006/main">
-  <p:cSld name="Slide 9">
-    <p:spTree>
-      <p:nvGrpSpPr>
-        <p:cNvPr id="1" name=""/>
-        <p:cNvGrpSpPr/>
-        <p:nvPr/>
-      </p:nvGrpSpPr>
-      <p:grpSpPr>
-        <a:xfrm>
-          <a:off x="0" y="0"/>
-          <a:ext cx="0" cy="0"/>
-          <a:chOff x="0" y="0"/>
-          <a:chExt cx="0" cy="0"/>
-        </a:xfrm>
-      </p:grpSpPr>
-      <p:pic>
-        <p:nvPicPr>
-          <p:cNvPr id="2" name="Image 0" descr="preencoded.png"/>
-          <p:cNvPicPr>
-            <a:picLocks noChangeAspect="1"/>
-          </p:cNvPicPr>
-          <p:nvPr/>
-        </p:nvPicPr>
-        <p:blipFill>
-          <a:blip r:embed="rId3"/>
-          <a:stretch>
-            <a:fillRect/>
-          </a:stretch>
-        </p:blipFill>
-        <p:spPr>
-          <a:xfrm>
-            <a:off x="0" y="0"/>
-            <a:ext cx="9144000" cy="5143500"/>
-          </a:xfrm>
-          <a:prstGeom prst="rect">
-            <a:avLst/>
-          </a:prstGeom>
-        </p:spPr>
-      </p:pic>
-      <p:sp>
-        <p:nvSpPr>
-          <p:cNvPr id="3" name="Shape 0"/>
-          <p:cNvSpPr/>
-          <p:nvPr/>
-        </p:nvSpPr>
-        <p:spPr>
-          <a:xfrm>
-            <a:off x="0" y="0"/>
-            <a:ext cx="2000250" cy="5143500"/>
-          </a:xfrm>
-          <a:prstGeom prst="rect">
-            <a:avLst/>
-          </a:prstGeom>
-          <a:solidFill>
-            <a:srgbClr val="111111"/>
-          </a:solidFill>
-          <a:ln/>
-        </p:spPr>
-        <p:txBody>
-          <a:bodyPr/>
-          <a:lstStyle/>
-          <a:p>
-            <a:endParaRPr lang="es-CL"/>
-          </a:p>
-        </p:txBody>
-      </p:sp>
-      <p:sp>
-        <p:nvSpPr>
-          <p:cNvPr id="4" name="Shape 1"/>
-          <p:cNvSpPr/>
-          <p:nvPr/>
-        </p:nvSpPr>
-        <p:spPr>
-          <a:xfrm>
-            <a:off x="1971675" y="0"/>
-            <a:ext cx="28575" cy="5143500"/>
-          </a:xfrm>
-          <a:prstGeom prst="rect">
-            <a:avLst/>
-          </a:prstGeom>
-          <a:solidFill>
-            <a:srgbClr val="111111"/>
-          </a:solidFill>
-          <a:ln/>
-        </p:spPr>
-        <p:txBody>
-          <a:bodyPr/>
-          <a:lstStyle/>
-          <a:p>
-            <a:endParaRPr lang="es-CL"/>
-          </a:p>
-        </p:txBody>
-      </p:sp>
-      <p:sp>
-        <p:nvSpPr>
-          <p:cNvPr id="5" name="Text 2"/>
-          <p:cNvSpPr/>
-          <p:nvPr/>
-        </p:nvSpPr>
-        <p:spPr>
-          <a:xfrm>
-            <a:off x="214313" y="285750"/>
-            <a:ext cx="1571625" cy="685800"/>
-          </a:xfrm>
-          <a:prstGeom prst="rect">
-            <a:avLst/>
-          </a:prstGeom>
-          <a:noFill/>
-          <a:ln/>
-        </p:spPr>
-        <p:txBody>
-          <a:bodyPr wrap="none" lIns="0" tIns="0" rIns="0" bIns="0" rtlCol="0" anchor="t">
-            <a:spAutoFit/>
-          </a:bodyPr>
-          <a:lstStyle/>
-          <a:p>
-            <a:pPr marL="0" indent="0" algn="l">
-              <a:lnSpc>
-                <a:spcPts val="5400"/>
-              </a:lnSpc>
-              <a:buNone/>
-            </a:pPr>
-            <a:r>
-              <a:rPr lang="en-US" sz="6218" b="1" kern="0" spc="-4" dirty="0">
-                <a:solidFill>
-                  <a:srgbClr val="F5F5F5"/>
-                </a:solidFill>
-              </a:rPr>
-              <a:t>09</a:t>
-            </a:r>
-            <a:endParaRPr lang="en-US" sz="6218" dirty="0"/>
-          </a:p>
-        </p:txBody>
-      </p:sp>
-      <p:sp>
-        <p:nvSpPr>
-          <p:cNvPr id="6" name="Text 3"/>
-          <p:cNvSpPr/>
-          <p:nvPr/>
-        </p:nvSpPr>
-        <p:spPr>
-          <a:xfrm>
-            <a:off x="214313" y="1057275"/>
-            <a:ext cx="1571625" cy="175022"/>
-          </a:xfrm>
-          <a:prstGeom prst="rect">
-            <a:avLst/>
-          </a:prstGeom>
-          <a:noFill/>
-          <a:ln/>
-        </p:spPr>
-        <p:txBody>
-          <a:bodyPr wrap="none" lIns="0" tIns="0" rIns="0" bIns="0" rtlCol="0" anchor="t">
-            <a:spAutoFit/>
-          </a:bodyPr>
-          <a:lstStyle/>
-          <a:p>
-            <a:pPr marL="0" indent="0" algn="l">
-              <a:lnSpc>
-                <a:spcPts val="1200"/>
-              </a:lnSpc>
-              <a:buNone/>
-            </a:pPr>
-            <a:r>
-              <a:rPr lang="en-US" sz="942" kern="0" spc="2" dirty="0">
-                <a:solidFill>
-                  <a:srgbClr val="F5F5F5">
-                    <a:alpha val="80000"/>
-                  </a:srgbClr>
-                </a:solidFill>
-              </a:rPr>
-              <a:t>iOS Approach</a:t>
-            </a:r>
-            <a:endParaRPr lang="en-US" sz="942" dirty="0"/>
-          </a:p>
-        </p:txBody>
-      </p:sp>
-      <p:sp>
-        <p:nvSpPr>
-          <p:cNvPr id="7" name="Text 4"/>
-          <p:cNvSpPr/>
-          <p:nvPr/>
-        </p:nvSpPr>
-        <p:spPr>
-          <a:xfrm>
-            <a:off x="2428875" y="285750"/>
-            <a:ext cx="6286500" cy="440038"/>
-          </a:xfrm>
-          <a:prstGeom prst="rect">
-            <a:avLst/>
-          </a:prstGeom>
-          <a:noFill/>
-          <a:ln/>
-        </p:spPr>
-        <p:txBody>
-          <a:bodyPr wrap="none" lIns="0" tIns="0" rIns="0" bIns="0" rtlCol="0" anchor="t">
-            <a:spAutoFit/>
-          </a:bodyPr>
-          <a:lstStyle/>
-          <a:p>
-            <a:pPr marL="0" indent="0" algn="l">
-              <a:lnSpc>
-                <a:spcPts val="3500"/>
-              </a:lnSpc>
-              <a:buNone/>
-            </a:pPr>
-            <a:r>
-              <a:rPr lang="en-US" sz="2862" b="1" kern="0" spc="-1" dirty="0">
-                <a:solidFill>
-                  <a:srgbClr val="111111"/>
-                </a:solidFill>
-              </a:rPr>
-              <a:t>iOS: Enfoque Recomendado</a:t>
-            </a:r>
-            <a:endParaRPr lang="en-US" sz="2862" dirty="0"/>
-          </a:p>
-        </p:txBody>
-      </p:sp>
-      <p:sp>
-        <p:nvSpPr>
-          <p:cNvPr id="8" name="Text 5"/>
-          <p:cNvSpPr/>
-          <p:nvPr/>
-        </p:nvSpPr>
-        <p:spPr>
-          <a:xfrm>
-            <a:off x="2428875" y="797226"/>
-            <a:ext cx="6286500" cy="233958"/>
-          </a:xfrm>
-          <a:prstGeom prst="rect">
-            <a:avLst/>
-          </a:prstGeom>
-          <a:noFill/>
-          <a:ln/>
-        </p:spPr>
-        <p:txBody>
-          <a:bodyPr wrap="none" lIns="0" tIns="0" rIns="0" bIns="0" rtlCol="0" anchor="t">
-            <a:spAutoFit/>
-          </a:bodyPr>
-          <a:lstStyle/>
-          <a:p>
-            <a:pPr marL="0" indent="0" algn="l">
-              <a:lnSpc>
-                <a:spcPts val="1600"/>
-              </a:lnSpc>
-              <a:buNone/>
-            </a:pPr>
-            <a:r>
-              <a:rPr lang="en-US" sz="1193" b="1" dirty="0">
-                <a:solidFill>
-                  <a:srgbClr val="0044CC"/>
-                </a:solidFill>
-              </a:rPr>
-              <a:t>Validación Explícita en URLSession</a:t>
-            </a:r>
-            <a:endParaRPr lang="en-US" sz="1193" dirty="0"/>
-          </a:p>
-        </p:txBody>
-      </p:sp>
-      <p:sp>
-        <p:nvSpPr>
-          <p:cNvPr id="10" name="Text 7"/>
-          <p:cNvSpPr/>
-          <p:nvPr/>
-        </p:nvSpPr>
-        <p:spPr>
-          <a:xfrm>
-            <a:off x="2786063" y="1202634"/>
-            <a:ext cx="3311826" cy="194667"/>
-          </a:xfrm>
-          <a:prstGeom prst="rect">
-            <a:avLst/>
-          </a:prstGeom>
-          <a:noFill/>
-          <a:ln/>
-        </p:spPr>
-        <p:txBody>
-          <a:bodyPr wrap="none" lIns="0" tIns="0" rIns="0" bIns="0" rtlCol="0" anchor="t">
-            <a:spAutoFit/>
-          </a:bodyPr>
-          <a:lstStyle/>
-          <a:p>
-            <a:pPr marL="0" indent="0" algn="l">
-              <a:lnSpc>
-                <a:spcPts val="1400"/>
-              </a:lnSpc>
-              <a:buNone/>
-            </a:pPr>
-            <a:r>
-              <a:rPr lang="en-US" sz="987" b="1" dirty="0">
-                <a:solidFill>
-                  <a:srgbClr val="111111"/>
-                </a:solidFill>
-              </a:rPr>
-              <a:t>Interceptar Desafío</a:t>
-            </a:r>
-            <a:endParaRPr lang="en-US" sz="987" dirty="0"/>
-          </a:p>
-        </p:txBody>
-      </p:sp>
-      <p:sp>
-        <p:nvSpPr>
-          <p:cNvPr id="11" name="Text 8"/>
-          <p:cNvSpPr/>
-          <p:nvPr/>
-        </p:nvSpPr>
-        <p:spPr>
-          <a:xfrm>
-            <a:off x="2786063" y="1433020"/>
-            <a:ext cx="3311826" cy="320018"/>
-          </a:xfrm>
-          <a:prstGeom prst="rect">
-            <a:avLst/>
-          </a:prstGeom>
-          <a:noFill/>
-          <a:ln/>
-        </p:spPr>
-        <p:txBody>
-          <a:bodyPr wrap="square" lIns="0" tIns="0" rIns="0" bIns="0" rtlCol="0" anchor="t">
-            <a:spAutoFit/>
-          </a:bodyPr>
-          <a:lstStyle/>
-          <a:p>
-            <a:pPr marL="0" indent="0" algn="l">
-              <a:lnSpc>
-                <a:spcPts val="1300"/>
-              </a:lnSpc>
-              <a:buNone/>
-            </a:pPr>
-            <a:r>
-              <a:rPr lang="en-US" sz="834" dirty="0">
-                <a:solidFill>
-                  <a:srgbClr val="333333"/>
-                </a:solidFill>
-              </a:rPr>
-              <a:t>Implementar URLSessionDelegate para capturar el desafío de autenticación del servidor.</a:t>
-            </a:r>
-            <a:endParaRPr lang="en-US" sz="834" dirty="0"/>
-          </a:p>
-        </p:txBody>
-      </p:sp>
-      <p:sp>
-        <p:nvSpPr>
-          <p:cNvPr id="13" name="Text 10"/>
-          <p:cNvSpPr/>
-          <p:nvPr/>
-        </p:nvSpPr>
-        <p:spPr>
-          <a:xfrm>
-            <a:off x="2786063" y="1838762"/>
-            <a:ext cx="3311826" cy="194667"/>
-          </a:xfrm>
-          <a:prstGeom prst="rect">
-            <a:avLst/>
-          </a:prstGeom>
-          <a:noFill/>
-          <a:ln/>
-        </p:spPr>
-        <p:txBody>
-          <a:bodyPr wrap="none" lIns="0" tIns="0" rIns="0" bIns="0" rtlCol="0" anchor="t">
-            <a:spAutoFit/>
-          </a:bodyPr>
-          <a:lstStyle/>
-          <a:p>
-            <a:pPr marL="0" indent="0" algn="l">
-              <a:lnSpc>
-                <a:spcPts val="1400"/>
-              </a:lnSpc>
-              <a:buNone/>
-            </a:pPr>
-            <a:r>
-              <a:rPr lang="en-US" sz="987" b="1" dirty="0">
-                <a:solidFill>
-                  <a:srgbClr val="111111"/>
-                </a:solidFill>
-              </a:rPr>
-              <a:t>Evaluar Trust Estándar</a:t>
-            </a:r>
-            <a:endParaRPr lang="en-US" sz="987" dirty="0"/>
-          </a:p>
-        </p:txBody>
-      </p:sp>
-      <p:sp>
-        <p:nvSpPr>
-          <p:cNvPr id="14" name="Text 11"/>
-          <p:cNvSpPr/>
-          <p:nvPr/>
-        </p:nvSpPr>
-        <p:spPr>
-          <a:xfrm>
-            <a:off x="2786063" y="2069148"/>
-            <a:ext cx="3311826" cy="320018"/>
-          </a:xfrm>
-          <a:prstGeom prst="rect">
-            <a:avLst/>
-          </a:prstGeom>
-          <a:noFill/>
-          <a:ln/>
-        </p:spPr>
-        <p:txBody>
-          <a:bodyPr wrap="square" lIns="0" tIns="0" rIns="0" bIns="0" rtlCol="0" anchor="t">
-            <a:spAutoFit/>
-          </a:bodyPr>
-          <a:lstStyle/>
-          <a:p>
-            <a:pPr marL="0" indent="0" algn="l">
-              <a:lnSpc>
-                <a:spcPts val="1300"/>
-              </a:lnSpc>
-              <a:buNone/>
-            </a:pPr>
-            <a:r>
-              <a:rPr lang="en-US" sz="834" dirty="0">
-                <a:solidFill>
-                  <a:srgbClr val="333333"/>
-                </a:solidFill>
-              </a:rPr>
-              <a:t>Validar la cadena de certificados normalmente usando las APIs del sistema. No inventar un trust alternativo.</a:t>
-            </a:r>
-            <a:endParaRPr lang="en-US" sz="834" dirty="0"/>
-          </a:p>
-        </p:txBody>
-      </p:sp>
-      <p:sp>
-        <p:nvSpPr>
-          <p:cNvPr id="16" name="Text 13"/>
-          <p:cNvSpPr/>
-          <p:nvPr/>
-        </p:nvSpPr>
-        <p:spPr>
-          <a:xfrm>
-            <a:off x="2786063" y="2474891"/>
-            <a:ext cx="3311826" cy="194667"/>
-          </a:xfrm>
-          <a:prstGeom prst="rect">
-            <a:avLst/>
-          </a:prstGeom>
-          <a:noFill/>
-          <a:ln/>
-        </p:spPr>
-        <p:txBody>
-          <a:bodyPr wrap="none" lIns="0" tIns="0" rIns="0" bIns="0" rtlCol="0" anchor="t">
-            <a:spAutoFit/>
-          </a:bodyPr>
-          <a:lstStyle/>
-          <a:p>
-            <a:pPr marL="0" indent="0" algn="l">
-              <a:lnSpc>
-                <a:spcPts val="1400"/>
-              </a:lnSpc>
-              <a:buNone/>
-            </a:pPr>
-            <a:r>
-              <a:rPr lang="en-US" sz="987" b="1" dirty="0">
-                <a:solidFill>
-                  <a:srgbClr val="111111"/>
-                </a:solidFill>
-              </a:rPr>
-              <a:t>Extraer Public Key</a:t>
-            </a:r>
-            <a:endParaRPr lang="en-US" sz="987" dirty="0"/>
-          </a:p>
-        </p:txBody>
-      </p:sp>
-      <p:sp>
-        <p:nvSpPr>
-          <p:cNvPr id="17" name="Text 14"/>
-          <p:cNvSpPr/>
-          <p:nvPr/>
-        </p:nvSpPr>
-        <p:spPr>
-          <a:xfrm>
-            <a:off x="2786063" y="2705277"/>
-            <a:ext cx="3311826" cy="320018"/>
-          </a:xfrm>
-          <a:prstGeom prst="rect">
-            <a:avLst/>
-          </a:prstGeom>
-          <a:noFill/>
-          <a:ln/>
-        </p:spPr>
-        <p:txBody>
-          <a:bodyPr wrap="square" lIns="0" tIns="0" rIns="0" bIns="0" rtlCol="0" anchor="t">
-            <a:spAutoFit/>
-          </a:bodyPr>
-          <a:lstStyle/>
-          <a:p>
-            <a:pPr marL="0" indent="0" algn="l">
-              <a:lnSpc>
-                <a:spcPts val="1300"/>
-              </a:lnSpc>
-              <a:buNone/>
-            </a:pPr>
-            <a:r>
-              <a:rPr lang="en-US" sz="834" dirty="0">
-                <a:solidFill>
-                  <a:srgbClr val="333333"/>
-                </a:solidFill>
-              </a:rPr>
-              <a:t>Obtener la clave pública del certificado leaf (o intermedio si aplica).</a:t>
-            </a:r>
-            <a:endParaRPr lang="en-US" sz="834" dirty="0"/>
-          </a:p>
-        </p:txBody>
-      </p:sp>
-      <p:sp>
-        <p:nvSpPr>
-          <p:cNvPr id="19" name="Text 16"/>
-          <p:cNvSpPr/>
-          <p:nvPr/>
-        </p:nvSpPr>
-        <p:spPr>
-          <a:xfrm>
-            <a:off x="2786063" y="3111019"/>
-            <a:ext cx="3311826" cy="194667"/>
-          </a:xfrm>
-          <a:prstGeom prst="rect">
-            <a:avLst/>
-          </a:prstGeom>
-          <a:noFill/>
-          <a:ln/>
-        </p:spPr>
-        <p:txBody>
-          <a:bodyPr wrap="none" lIns="0" tIns="0" rIns="0" bIns="0" rtlCol="0" anchor="t">
-            <a:spAutoFit/>
-          </a:bodyPr>
-          <a:lstStyle/>
-          <a:p>
-            <a:pPr marL="0" indent="0" algn="l">
-              <a:lnSpc>
-                <a:spcPts val="1400"/>
-              </a:lnSpc>
-              <a:buNone/>
-            </a:pPr>
-            <a:r>
-              <a:rPr lang="en-US" sz="987" b="1" dirty="0">
-                <a:solidFill>
-                  <a:srgbClr val="111111"/>
-                </a:solidFill>
-              </a:rPr>
-              <a:t>Comparar SPKI Hash</a:t>
-            </a:r>
-            <a:endParaRPr lang="en-US" sz="987" dirty="0"/>
-          </a:p>
-        </p:txBody>
-      </p:sp>
-      <p:sp>
-        <p:nvSpPr>
-          <p:cNvPr id="20" name="Text 17"/>
-          <p:cNvSpPr/>
-          <p:nvPr/>
-        </p:nvSpPr>
-        <p:spPr>
-          <a:xfrm>
-            <a:off x="2786063" y="3341405"/>
-            <a:ext cx="3311826" cy="320018"/>
-          </a:xfrm>
-          <a:prstGeom prst="rect">
-            <a:avLst/>
-          </a:prstGeom>
-          <a:noFill/>
-          <a:ln/>
-        </p:spPr>
-        <p:txBody>
-          <a:bodyPr wrap="square" lIns="0" tIns="0" rIns="0" bIns="0" rtlCol="0" anchor="t">
-            <a:spAutoFit/>
-          </a:bodyPr>
-          <a:lstStyle/>
-          <a:p>
-            <a:pPr marL="0" indent="0" algn="l">
-              <a:lnSpc>
-                <a:spcPts val="1300"/>
-              </a:lnSpc>
-              <a:buNone/>
-            </a:pPr>
-            <a:r>
-              <a:rPr lang="en-US" sz="834" dirty="0">
-                <a:solidFill>
-                  <a:srgbClr val="333333"/>
-                </a:solidFill>
-              </a:rPr>
-              <a:t>Calcular SHA-256 de la clave pública y comparar contra los pins permitidos (A y B).</a:t>
-            </a:r>
-            <a:endParaRPr lang="en-US" sz="834" dirty="0"/>
-          </a:p>
-        </p:txBody>
-      </p:sp>
-      <p:sp>
-        <p:nvSpPr>
-          <p:cNvPr id="22" name="Text 19"/>
-          <p:cNvSpPr/>
-          <p:nvPr/>
-        </p:nvSpPr>
-        <p:spPr>
-          <a:xfrm>
-            <a:off x="2786063" y="3747148"/>
-            <a:ext cx="3311826" cy="194667"/>
-          </a:xfrm>
-          <a:prstGeom prst="rect">
-            <a:avLst/>
-          </a:prstGeom>
-          <a:noFill/>
-          <a:ln/>
-        </p:spPr>
-        <p:txBody>
-          <a:bodyPr wrap="none" lIns="0" tIns="0" rIns="0" bIns="0" rtlCol="0" anchor="t">
-            <a:spAutoFit/>
-          </a:bodyPr>
-          <a:lstStyle/>
-          <a:p>
-            <a:pPr marL="0" indent="0" algn="l">
-              <a:lnSpc>
-                <a:spcPts val="1400"/>
-              </a:lnSpc>
-              <a:buNone/>
-            </a:pPr>
-            <a:r>
-              <a:rPr lang="en-US" sz="987" b="1" dirty="0">
-                <a:solidFill>
-                  <a:srgbClr val="111111"/>
-                </a:solidFill>
-              </a:rPr>
-              <a:t>Decisión Final</a:t>
-            </a:r>
-            <a:endParaRPr lang="en-US" sz="987" dirty="0"/>
-          </a:p>
-        </p:txBody>
-      </p:sp>
-      <p:sp>
-        <p:nvSpPr>
-          <p:cNvPr id="23" name="Text 20"/>
-          <p:cNvSpPr/>
-          <p:nvPr/>
-        </p:nvSpPr>
-        <p:spPr>
-          <a:xfrm>
-            <a:off x="2786063" y="3977534"/>
-            <a:ext cx="3311826" cy="320018"/>
-          </a:xfrm>
-          <a:prstGeom prst="rect">
-            <a:avLst/>
-          </a:prstGeom>
-          <a:noFill/>
-          <a:ln/>
-        </p:spPr>
-        <p:txBody>
-          <a:bodyPr wrap="square" lIns="0" tIns="0" rIns="0" bIns="0" rtlCol="0" anchor="t">
-            <a:spAutoFit/>
-          </a:bodyPr>
-          <a:lstStyle/>
-          <a:p>
-            <a:pPr marL="0" indent="0" algn="l">
-              <a:lnSpc>
-                <a:spcPts val="1300"/>
-              </a:lnSpc>
-              <a:buNone/>
-            </a:pPr>
-            <a:r>
-              <a:rPr lang="en-US" sz="834" dirty="0">
-                <a:solidFill>
-                  <a:srgbClr val="333333"/>
-                </a:solidFill>
-              </a:rPr>
-              <a:t>Rechazar explícitamente la conexión si no hay coincidencia de pin.</a:t>
-            </a:r>
-            <a:endParaRPr lang="en-US" sz="834" dirty="0"/>
-          </a:p>
-        </p:txBody>
-      </p:sp>
-      <p:sp>
-        <p:nvSpPr>
-          <p:cNvPr id="24" name="Shape 21"/>
-          <p:cNvSpPr/>
-          <p:nvPr/>
-        </p:nvSpPr>
-        <p:spPr>
-          <a:xfrm>
-            <a:off x="6269338" y="1202634"/>
-            <a:ext cx="2446037" cy="787598"/>
-          </a:xfrm>
-          <a:prstGeom prst="rect">
-            <a:avLst/>
-          </a:prstGeom>
-          <a:solidFill>
-            <a:srgbClr val="111111"/>
-          </a:solidFill>
-          <a:ln/>
-        </p:spPr>
-        <p:txBody>
-          <a:bodyPr/>
-          <a:lstStyle/>
-          <a:p>
-            <a:endParaRPr lang="es-CL"/>
-          </a:p>
-        </p:txBody>
-      </p:sp>
-      <p:sp>
-        <p:nvSpPr>
-          <p:cNvPr id="25" name="Shape 22"/>
-          <p:cNvSpPr/>
-          <p:nvPr/>
-        </p:nvSpPr>
-        <p:spPr>
-          <a:xfrm>
-            <a:off x="6269338" y="1202634"/>
-            <a:ext cx="42863" cy="787598"/>
-          </a:xfrm>
-          <a:prstGeom prst="rect">
-            <a:avLst/>
-          </a:prstGeom>
-          <a:solidFill>
-            <a:srgbClr val="0044CC"/>
-          </a:solidFill>
-          <a:ln/>
-        </p:spPr>
-        <p:txBody>
-          <a:bodyPr/>
-          <a:lstStyle/>
-          <a:p>
-            <a:endParaRPr lang="es-CL"/>
-          </a:p>
-        </p:txBody>
-      </p:sp>
-      <p:sp>
-        <p:nvSpPr>
-          <p:cNvPr id="26" name="Text 23"/>
-          <p:cNvSpPr/>
-          <p:nvPr/>
-        </p:nvSpPr>
-        <p:spPr>
-          <a:xfrm>
-            <a:off x="6397926" y="1331221"/>
-            <a:ext cx="2188862" cy="116086"/>
-          </a:xfrm>
-          <a:prstGeom prst="rect">
-            <a:avLst/>
-          </a:prstGeom>
-          <a:noFill/>
-          <a:ln/>
-        </p:spPr>
-        <p:txBody>
-          <a:bodyPr wrap="none" lIns="0" tIns="0" rIns="0" bIns="0" rtlCol="0" anchor="t">
-            <a:spAutoFit/>
-          </a:bodyPr>
-          <a:lstStyle/>
-          <a:p>
-            <a:pPr marL="0" indent="0" algn="l">
-              <a:lnSpc>
-                <a:spcPts val="800"/>
-              </a:lnSpc>
-              <a:buNone/>
-            </a:pPr>
-            <a:r>
-              <a:rPr lang="en-US" sz="621" dirty="0">
-                <a:solidFill>
-                  <a:srgbClr val="888888"/>
-                </a:solidFill>
-              </a:rPr>
-              <a:t>API Recomendada (2026)</a:t>
-            </a:r>
-            <a:endParaRPr lang="en-US" sz="621" dirty="0"/>
-          </a:p>
-        </p:txBody>
-      </p:sp>
-      <p:sp>
-        <p:nvSpPr>
-          <p:cNvPr id="27" name="Text 24"/>
-          <p:cNvSpPr/>
-          <p:nvPr/>
-        </p:nvSpPr>
-        <p:spPr>
-          <a:xfrm>
-            <a:off x="6397926" y="1518745"/>
-            <a:ext cx="2188862" cy="155377"/>
-          </a:xfrm>
-          <a:prstGeom prst="rect">
-            <a:avLst/>
-          </a:prstGeom>
-          <a:noFill/>
-          <a:ln/>
-        </p:spPr>
-        <p:txBody>
-          <a:bodyPr wrap="none" lIns="0" tIns="0" rIns="0" bIns="0" rtlCol="0" anchor="t">
-            <a:spAutoFit/>
-          </a:bodyPr>
-          <a:lstStyle/>
-          <a:p>
-            <a:pPr marL="0" indent="0" algn="l">
-              <a:lnSpc>
-                <a:spcPts val="1100"/>
-              </a:lnSpc>
-              <a:buNone/>
-            </a:pPr>
-            <a:r>
-              <a:rPr lang="en-US" sz="834" dirty="0">
-                <a:solidFill>
-                  <a:srgbClr val="00FF00"/>
-                </a:solidFill>
-              </a:rPr>
-              <a:t>SecTrustEvaluateWithError</a:t>
-            </a:r>
-            <a:endParaRPr lang="en-US" sz="834" dirty="0"/>
-          </a:p>
-        </p:txBody>
-      </p:sp>
-      <p:sp>
-        <p:nvSpPr>
-          <p:cNvPr id="28" name="Text 25"/>
-          <p:cNvSpPr/>
-          <p:nvPr/>
-        </p:nvSpPr>
-        <p:spPr>
-          <a:xfrm>
-            <a:off x="6397926" y="1745559"/>
-            <a:ext cx="2188862" cy="116086"/>
-          </a:xfrm>
-          <a:prstGeom prst="rect">
-            <a:avLst/>
-          </a:prstGeom>
-          <a:noFill/>
-          <a:ln/>
-        </p:spPr>
-        <p:txBody>
-          <a:bodyPr wrap="none" lIns="0" tIns="0" rIns="0" bIns="0" rtlCol="0" anchor="t">
-            <a:spAutoFit/>
-          </a:bodyPr>
-          <a:lstStyle/>
-          <a:p>
-            <a:pPr marL="0" indent="0" algn="l">
-              <a:lnSpc>
-                <a:spcPts val="800"/>
-              </a:lnSpc>
-              <a:buNone/>
-            </a:pPr>
-            <a:r>
-              <a:rPr lang="en-US" sz="621" dirty="0">
-                <a:solidFill>
-                  <a:srgbClr val="888888"/>
-                </a:solidFill>
-              </a:rPr>
-              <a:t>(Reemplaza al deprecado SecTrustEvaluate)</a:t>
-            </a:r>
-            <a:endParaRPr lang="en-US" sz="621" dirty="0"/>
-          </a:p>
-        </p:txBody>
-      </p:sp>
-      <p:sp>
-        <p:nvSpPr>
-          <p:cNvPr id="29" name="Shape 26"/>
-          <p:cNvSpPr/>
-          <p:nvPr/>
-        </p:nvSpPr>
-        <p:spPr>
-          <a:xfrm>
-            <a:off x="6269338" y="2118820"/>
-            <a:ext cx="2446037" cy="1163315"/>
-          </a:xfrm>
-          <a:prstGeom prst="rect">
-            <a:avLst/>
-          </a:prstGeom>
-          <a:solidFill>
-            <a:srgbClr val="FFFFFF"/>
-          </a:solidFill>
-          <a:ln w="27432">
-            <a:solidFill>
-              <a:srgbClr val="FF3300"/>
-            </a:solidFill>
-            <a:prstDash val="solid"/>
-          </a:ln>
-        </p:spPr>
-        <p:txBody>
-          <a:bodyPr/>
-          <a:lstStyle/>
-          <a:p>
-            <a:endParaRPr lang="es-CL"/>
-          </a:p>
-        </p:txBody>
-      </p:sp>
-      <p:pic>
-        <p:nvPicPr>
-          <p:cNvPr id="30" name="Image 1" descr="preencoded.png"/>
-          <p:cNvPicPr>
-            <a:picLocks noChangeAspect="1"/>
-          </p:cNvPicPr>
-          <p:nvPr/>
-        </p:nvPicPr>
-        <p:blipFill>
-          <a:blip r:embed="rId4"/>
-          <a:stretch>
-            <a:fillRect/>
-          </a:stretch>
-        </p:blipFill>
-        <p:spPr>
-          <a:xfrm>
-            <a:off x="6369351" y="2244728"/>
-            <a:ext cx="142875" cy="142875"/>
-          </a:xfrm>
-          <a:prstGeom prst="rect">
-            <a:avLst/>
-          </a:prstGeom>
-        </p:spPr>
-      </p:pic>
-      <p:sp>
-        <p:nvSpPr>
-          <p:cNvPr id="31" name="Text 27"/>
-          <p:cNvSpPr/>
-          <p:nvPr/>
-        </p:nvSpPr>
-        <p:spPr>
-          <a:xfrm>
-            <a:off x="6583663" y="2218832"/>
-            <a:ext cx="1125727" cy="194667"/>
-          </a:xfrm>
-          <a:prstGeom prst="rect">
-            <a:avLst/>
-          </a:prstGeom>
-          <a:noFill/>
-          <a:ln/>
-        </p:spPr>
-        <p:txBody>
-          <a:bodyPr wrap="none" lIns="0" tIns="0" rIns="0" bIns="0" rtlCol="0" anchor="t">
-            <a:spAutoFit/>
-          </a:bodyPr>
-          <a:lstStyle/>
-          <a:p>
-            <a:pPr marL="0" indent="0" algn="l">
-              <a:lnSpc>
-                <a:spcPts val="1400"/>
-              </a:lnSpc>
-              <a:buNone/>
-            </a:pPr>
-            <a:r>
-              <a:rPr lang="en-US" sz="987" b="1" dirty="0">
-                <a:solidFill>
-                  <a:srgbClr val="FF3300"/>
-                </a:solidFill>
-              </a:rPr>
-              <a:t>Punto Crítico</a:t>
-            </a:r>
-            <a:endParaRPr lang="en-US" sz="987" dirty="0"/>
-          </a:p>
-        </p:txBody>
-      </p:sp>
-      <p:sp>
-        <p:nvSpPr>
-          <p:cNvPr id="32" name="Text 28"/>
-          <p:cNvSpPr/>
-          <p:nvPr/>
-        </p:nvSpPr>
-        <p:spPr>
-          <a:xfrm>
-            <a:off x="6369351" y="2484937"/>
-            <a:ext cx="2246012" cy="640035"/>
-          </a:xfrm>
-          <a:prstGeom prst="rect">
-            <a:avLst/>
-          </a:prstGeom>
-          <a:noFill/>
-          <a:ln/>
-        </p:spPr>
-        <p:txBody>
-          <a:bodyPr wrap="square" lIns="0" tIns="0" rIns="0" bIns="0" rtlCol="0" anchor="t">
-            <a:spAutoFit/>
-          </a:bodyPr>
-          <a:lstStyle/>
-          <a:p>
-            <a:pPr marL="0" indent="0" algn="l">
-              <a:lnSpc>
-                <a:spcPts val="1300"/>
-              </a:lnSpc>
-              <a:buNone/>
-            </a:pPr>
-            <a:r>
-              <a:rPr lang="en-US" sz="834" dirty="0">
-                <a:solidFill>
-                  <a:srgbClr val="111111"/>
-                </a:solidFill>
-              </a:rPr>
-              <a:t>No saltarse la validación de trust de Apple. El Pinning es una capa </a:t>
-            </a:r>
-            <a:r>
-              <a:rPr lang="en-US" sz="784" b="1" dirty="0">
-                <a:solidFill>
-                  <a:srgbClr val="111111"/>
-                </a:solidFill>
-              </a:rPr>
-              <a:t>adicional</a:t>
-            </a:r>
-            <a:r>
-              <a:rPr lang="en-US" sz="834" dirty="0">
-                <a:solidFill>
-                  <a:srgbClr val="111111"/>
-                </a:solidFill>
-              </a:rPr>
-              <a:t>, no un reemplazo de la validación CA estándar.</a:t>
             </a:r>
             <a:endParaRPr lang="en-US" sz="834" dirty="0"/>
           </a:p>
